--- a/其他/家中遠端連線至公司.pptx
+++ b/其他/家中遠端連線至公司.pptx
@@ -5,21 +5,26 @@
     <p:sldMasterId id="2147483648" r:id="rId1"/>
   </p:sldMasterIdLst>
   <p:sldIdLst>
-    <p:sldId id="269" r:id="rId2"/>
-    <p:sldId id="271" r:id="rId3"/>
+    <p:sldId id="281" r:id="rId2"/>
+    <p:sldId id="269" r:id="rId3"/>
     <p:sldId id="270" r:id="rId4"/>
     <p:sldId id="280" r:id="rId5"/>
-    <p:sldId id="278" r:id="rId6"/>
-    <p:sldId id="274" r:id="rId7"/>
-    <p:sldId id="276" r:id="rId8"/>
-    <p:sldId id="277" r:id="rId9"/>
-    <p:sldId id="273" r:id="rId10"/>
-    <p:sldId id="263" r:id="rId11"/>
-    <p:sldId id="257" r:id="rId12"/>
-    <p:sldId id="258" r:id="rId13"/>
-    <p:sldId id="259" r:id="rId14"/>
-    <p:sldId id="260" r:id="rId15"/>
-    <p:sldId id="272" r:id="rId16"/>
+    <p:sldId id="286" r:id="rId6"/>
+    <p:sldId id="288" r:id="rId7"/>
+    <p:sldId id="283" r:id="rId8"/>
+    <p:sldId id="278" r:id="rId9"/>
+    <p:sldId id="284" r:id="rId10"/>
+    <p:sldId id="285" r:id="rId11"/>
+    <p:sldId id="274" r:id="rId12"/>
+    <p:sldId id="277" r:id="rId13"/>
+    <p:sldId id="282" r:id="rId14"/>
+    <p:sldId id="263" r:id="rId15"/>
+    <p:sldId id="257" r:id="rId16"/>
+    <p:sldId id="273" r:id="rId17"/>
+    <p:sldId id="258" r:id="rId18"/>
+    <p:sldId id="259" r:id="rId19"/>
+    <p:sldId id="260" r:id="rId20"/>
+    <p:sldId id="272" r:id="rId21"/>
   </p:sldIdLst>
   <p:sldSz cx="12192000" cy="6858000"/>
   <p:notesSz cx="6858000" cy="9144000"/>
@@ -284,7 +289,7 @@
           <a:p>
             <a:fld id="{2FF7AA5E-ACAD-43E5-A584-35521C4B65F3}" type="datetimeFigureOut">
               <a:rPr lang="zh-TW" altLang="en-US" smtClean="0"/>
-              <a:t>2025/7/1</a:t>
+              <a:t>2025/9/18</a:t>
             </a:fld>
             <a:endParaRPr lang="zh-TW" altLang="en-US"/>
           </a:p>
@@ -482,7 +487,7 @@
           <a:p>
             <a:fld id="{2FF7AA5E-ACAD-43E5-A584-35521C4B65F3}" type="datetimeFigureOut">
               <a:rPr lang="zh-TW" altLang="en-US" smtClean="0"/>
-              <a:t>2025/7/1</a:t>
+              <a:t>2025/9/18</a:t>
             </a:fld>
             <a:endParaRPr lang="zh-TW" altLang="en-US"/>
           </a:p>
@@ -690,7 +695,7 @@
           <a:p>
             <a:fld id="{2FF7AA5E-ACAD-43E5-A584-35521C4B65F3}" type="datetimeFigureOut">
               <a:rPr lang="zh-TW" altLang="en-US" smtClean="0"/>
-              <a:t>2025/7/1</a:t>
+              <a:t>2025/9/18</a:t>
             </a:fld>
             <a:endParaRPr lang="zh-TW" altLang="en-US"/>
           </a:p>
@@ -888,7 +893,7 @@
           <a:p>
             <a:fld id="{2FF7AA5E-ACAD-43E5-A584-35521C4B65F3}" type="datetimeFigureOut">
               <a:rPr lang="zh-TW" altLang="en-US" smtClean="0"/>
-              <a:t>2025/7/1</a:t>
+              <a:t>2025/9/18</a:t>
             </a:fld>
             <a:endParaRPr lang="zh-TW" altLang="en-US"/>
           </a:p>
@@ -1163,7 +1168,7 @@
           <a:p>
             <a:fld id="{2FF7AA5E-ACAD-43E5-A584-35521C4B65F3}" type="datetimeFigureOut">
               <a:rPr lang="zh-TW" altLang="en-US" smtClean="0"/>
-              <a:t>2025/7/1</a:t>
+              <a:t>2025/9/18</a:t>
             </a:fld>
             <a:endParaRPr lang="zh-TW" altLang="en-US"/>
           </a:p>
@@ -1428,7 +1433,7 @@
           <a:p>
             <a:fld id="{2FF7AA5E-ACAD-43E5-A584-35521C4B65F3}" type="datetimeFigureOut">
               <a:rPr lang="zh-TW" altLang="en-US" smtClean="0"/>
-              <a:t>2025/7/1</a:t>
+              <a:t>2025/9/18</a:t>
             </a:fld>
             <a:endParaRPr lang="zh-TW" altLang="en-US"/>
           </a:p>
@@ -1840,7 +1845,7 @@
           <a:p>
             <a:fld id="{2FF7AA5E-ACAD-43E5-A584-35521C4B65F3}" type="datetimeFigureOut">
               <a:rPr lang="zh-TW" altLang="en-US" smtClean="0"/>
-              <a:t>2025/7/1</a:t>
+              <a:t>2025/9/18</a:t>
             </a:fld>
             <a:endParaRPr lang="zh-TW" altLang="en-US"/>
           </a:p>
@@ -1981,7 +1986,7 @@
           <a:p>
             <a:fld id="{2FF7AA5E-ACAD-43E5-A584-35521C4B65F3}" type="datetimeFigureOut">
               <a:rPr lang="zh-TW" altLang="en-US" smtClean="0"/>
-              <a:t>2025/7/1</a:t>
+              <a:t>2025/9/18</a:t>
             </a:fld>
             <a:endParaRPr lang="zh-TW" altLang="en-US"/>
           </a:p>
@@ -2094,7 +2099,7 @@
           <a:p>
             <a:fld id="{2FF7AA5E-ACAD-43E5-A584-35521C4B65F3}" type="datetimeFigureOut">
               <a:rPr lang="zh-TW" altLang="en-US" smtClean="0"/>
-              <a:t>2025/7/1</a:t>
+              <a:t>2025/9/18</a:t>
             </a:fld>
             <a:endParaRPr lang="zh-TW" altLang="en-US"/>
           </a:p>
@@ -2405,7 +2410,7 @@
           <a:p>
             <a:fld id="{2FF7AA5E-ACAD-43E5-A584-35521C4B65F3}" type="datetimeFigureOut">
               <a:rPr lang="zh-TW" altLang="en-US" smtClean="0"/>
-              <a:t>2025/7/1</a:t>
+              <a:t>2025/9/18</a:t>
             </a:fld>
             <a:endParaRPr lang="zh-TW" altLang="en-US"/>
           </a:p>
@@ -2693,7 +2698,7 @@
           <a:p>
             <a:fld id="{2FF7AA5E-ACAD-43E5-A584-35521C4B65F3}" type="datetimeFigureOut">
               <a:rPr lang="zh-TW" altLang="en-US" smtClean="0"/>
-              <a:t>2025/7/1</a:t>
+              <a:t>2025/9/18</a:t>
             </a:fld>
             <a:endParaRPr lang="zh-TW" altLang="en-US"/>
           </a:p>
@@ -2934,7 +2939,7 @@
           <a:p>
             <a:fld id="{2FF7AA5E-ACAD-43E5-A584-35521C4B65F3}" type="datetimeFigureOut">
               <a:rPr lang="zh-TW" altLang="en-US" smtClean="0"/>
-              <a:t>2025/7/1</a:t>
+              <a:t>2025/9/18</a:t>
             </a:fld>
             <a:endParaRPr lang="zh-TW" altLang="en-US"/>
           </a:p>
@@ -3353,10 +3358,10 @@
       </p:grpSpPr>
       <p:sp>
         <p:nvSpPr>
-          <p:cNvPr id="5" name="文字方塊 4">
-            <a:extLst>
-              <a:ext uri="{FF2B5EF4-FFF2-40B4-BE49-F238E27FC236}">
-                <a16:creationId xmlns:a16="http://schemas.microsoft.com/office/drawing/2014/main" id="{D9A38466-C785-BC51-E489-49EFC40A135F}"/>
+          <p:cNvPr id="4" name="文字方塊 3">
+            <a:extLst>
+              <a:ext uri="{FF2B5EF4-FFF2-40B4-BE49-F238E27FC236}">
+                <a16:creationId xmlns:a16="http://schemas.microsoft.com/office/drawing/2014/main" id="{BA6B874B-A74D-F052-4AD5-82D9D21FD46F}"/>
               </a:ext>
             </a:extLst>
           </p:cNvPr>
@@ -3365,8 +3370,8 @@
         </p:nvSpPr>
         <p:spPr>
           <a:xfrm>
-            <a:off x="130478" y="84899"/>
-            <a:ext cx="11959922" cy="523220"/>
+            <a:off x="4601840" y="3105834"/>
+            <a:ext cx="2988319" cy="646331"/>
           </a:xfrm>
           <a:prstGeom prst="rect">
             <a:avLst/>
@@ -3374,25 +3379,74 @@
           <a:noFill/>
         </p:spPr>
         <p:txBody>
-          <a:bodyPr wrap="square">
+          <a:bodyPr wrap="none" rtlCol="0">
             <a:spAutoFit/>
           </a:bodyPr>
           <a:lstStyle/>
           <a:p>
-            <a:pPr algn="ctr"/>
-            <a:r>
-              <a:rPr lang="en-US" sz="2800" dirty="0"/>
-              <a:t>https://a00a.atlassian.net/wiki/spaces/NTCITH/pages/132448907/VPN</a:t>
-            </a:r>
-          </a:p>
-        </p:txBody>
-      </p:sp>
+            <a:r>
+              <a:rPr lang="en-US" sz="3600" dirty="0">
+                <a:latin typeface="微軟正黑體" panose="020B0604030504040204" pitchFamily="34" charset="-120"/>
+                <a:ea typeface="微軟正黑體" panose="020B0604030504040204" pitchFamily="34" charset="-120"/>
+              </a:rPr>
+              <a:t>VPN</a:t>
+            </a:r>
+            <a:r>
+              <a:rPr lang="zh-TW" altLang="en-US" sz="3600" dirty="0">
+                <a:latin typeface="微軟正黑體" panose="020B0604030504040204" pitchFamily="34" charset="-120"/>
+                <a:ea typeface="微軟正黑體" panose="020B0604030504040204" pitchFamily="34" charset="-120"/>
+              </a:rPr>
+              <a:t>權限申請</a:t>
+            </a:r>
+            <a:endParaRPr lang="en-US" sz="3600" dirty="0">
+              <a:latin typeface="微軟正黑體" panose="020B0604030504040204" pitchFamily="34" charset="-120"/>
+              <a:ea typeface="微軟正黑體" panose="020B0604030504040204" pitchFamily="34" charset="-120"/>
+            </a:endParaRPr>
+          </a:p>
+        </p:txBody>
+      </p:sp>
+    </p:spTree>
+    <p:extLst>
+      <p:ext uri="{BB962C8B-B14F-4D97-AF65-F5344CB8AC3E}">
+        <p14:creationId xmlns:p14="http://schemas.microsoft.com/office/powerpoint/2010/main" val="1192972292"/>
+      </p:ext>
+    </p:extLst>
+  </p:cSld>
+  <p:clrMapOvr>
+    <a:masterClrMapping/>
+  </p:clrMapOvr>
+</p:sld>
+</file>
+
+<file path=ppt/slides/slide10.xml><?xml version="1.0" encoding="utf-8"?>
+<p:sld xmlns:a="http://schemas.openxmlformats.org/drawingml/2006/main" xmlns:r="http://schemas.openxmlformats.org/officeDocument/2006/relationships" xmlns:p="http://schemas.openxmlformats.org/presentationml/2006/main">
+  <p:cSld>
+    <p:spTree>
+      <p:nvGrpSpPr>
+        <p:cNvPr id="1" name="">
+          <a:extLst>
+            <a:ext uri="{FF2B5EF4-FFF2-40B4-BE49-F238E27FC236}">
+              <a16:creationId xmlns:a16="http://schemas.microsoft.com/office/drawing/2014/main" id="{D6DC47BE-0872-7DBD-CA16-9B1546E74966}"/>
+            </a:ext>
+          </a:extLst>
+        </p:cNvPr>
+        <p:cNvGrpSpPr/>
+        <p:nvPr/>
+      </p:nvGrpSpPr>
+      <p:grpSpPr>
+        <a:xfrm>
+          <a:off x="0" y="0"/>
+          <a:ext cx="0" cy="0"/>
+          <a:chOff x="0" y="0"/>
+          <a:chExt cx="0" cy="0"/>
+        </a:xfrm>
+      </p:grpSpPr>
       <p:pic>
         <p:nvPicPr>
-          <p:cNvPr id="7" name="圖片 6" descr="一張含有 文字, 螢幕擷取畫面, 字型 的圖片&#10;&#10;AI 產生的內容可能不正確。">
-            <a:extLst>
-              <a:ext uri="{FF2B5EF4-FFF2-40B4-BE49-F238E27FC236}">
-                <a16:creationId xmlns:a16="http://schemas.microsoft.com/office/drawing/2014/main" id="{E57B45E2-BAFF-67A8-6007-6D03CA809602}"/>
+          <p:cNvPr id="7" name="圖片 6" descr="一張含有 文字, 字型, 螢幕擷取畫面 的圖片&#10;&#10;AI 產生的內容可能不正確。">
+            <a:extLst>
+              <a:ext uri="{FF2B5EF4-FFF2-40B4-BE49-F238E27FC236}">
+                <a16:creationId xmlns:a16="http://schemas.microsoft.com/office/drawing/2014/main" id="{E3B92E2E-5213-68DD-1492-270A2F45822C}"/>
               </a:ext>
             </a:extLst>
           </p:cNvPr>
@@ -3415,20 +3469,157 @@
         </p:blipFill>
         <p:spPr>
           <a:xfrm>
-            <a:off x="0" y="697788"/>
-            <a:ext cx="12192000" cy="3530566"/>
+            <a:off x="2711422" y="5563944"/>
+            <a:ext cx="6798034" cy="898914"/>
           </a:xfrm>
           <a:prstGeom prst="rect">
             <a:avLst/>
           </a:prstGeom>
+          <a:ln>
+            <a:solidFill>
+              <a:schemeClr val="tx1"/>
+            </a:solidFill>
+          </a:ln>
         </p:spPr>
       </p:pic>
-      <p:sp>
-        <p:nvSpPr>
-          <p:cNvPr id="8" name="矩形 7">
-            <a:extLst>
-              <a:ext uri="{FF2B5EF4-FFF2-40B4-BE49-F238E27FC236}">
-                <a16:creationId xmlns:a16="http://schemas.microsoft.com/office/drawing/2014/main" id="{F613EB6B-C2B2-E5D0-0012-80F235F1D720}"/>
+      <p:grpSp>
+        <p:nvGrpSpPr>
+          <p:cNvPr id="5" name="群組 4">
+            <a:extLst>
+              <a:ext uri="{FF2B5EF4-FFF2-40B4-BE49-F238E27FC236}">
+                <a16:creationId xmlns:a16="http://schemas.microsoft.com/office/drawing/2014/main" id="{C401CBB3-166A-265C-9C49-E51496EA206E}"/>
+              </a:ext>
+            </a:extLst>
+          </p:cNvPr>
+          <p:cNvGrpSpPr/>
+          <p:nvPr/>
+        </p:nvGrpSpPr>
+        <p:grpSpPr>
+          <a:xfrm>
+            <a:off x="2584018" y="656610"/>
+            <a:ext cx="7023964" cy="4511218"/>
+            <a:chOff x="2073854" y="653927"/>
+            <a:chExt cx="8044291" cy="5166534"/>
+          </a:xfrm>
+        </p:grpSpPr>
+        <p:pic>
+          <p:nvPicPr>
+            <p:cNvPr id="2" name="圖片 1" descr="一張含有 文字, 螢幕擷取畫面, 數字, 字型 的圖片&#10;&#10;AI 產生的內容可能不正確。">
+              <a:extLst>
+                <a:ext uri="{FF2B5EF4-FFF2-40B4-BE49-F238E27FC236}">
+                  <a16:creationId xmlns:a16="http://schemas.microsoft.com/office/drawing/2014/main" id="{8327EA84-80F4-9889-053F-642A45810AD0}"/>
+                </a:ext>
+              </a:extLst>
+            </p:cNvPr>
+            <p:cNvPicPr>
+              <a:picLocks noChangeAspect="1"/>
+            </p:cNvPicPr>
+            <p:nvPr/>
+          </p:nvPicPr>
+          <p:blipFill>
+            <a:blip r:embed="rId3">
+              <a:extLst>
+                <a:ext uri="{28A0092B-C50C-407E-A947-70E740481C1C}">
+                  <a14:useLocalDpi xmlns:a14="http://schemas.microsoft.com/office/drawing/2010/main" val="0"/>
+                </a:ext>
+              </a:extLst>
+            </a:blip>
+            <a:stretch>
+              <a:fillRect/>
+            </a:stretch>
+          </p:blipFill>
+          <p:spPr>
+            <a:xfrm>
+              <a:off x="2073855" y="653927"/>
+              <a:ext cx="8044290" cy="3899269"/>
+            </a:xfrm>
+            <a:prstGeom prst="rect">
+              <a:avLst/>
+            </a:prstGeom>
+          </p:spPr>
+        </p:pic>
+        <p:pic>
+          <p:nvPicPr>
+            <p:cNvPr id="19" name="圖片 18" descr="一張含有 文字, 字型, 螢幕擷取畫面 的圖片&#10;&#10;AI 產生的內容可能不正確。">
+              <a:extLst>
+                <a:ext uri="{FF2B5EF4-FFF2-40B4-BE49-F238E27FC236}">
+                  <a16:creationId xmlns:a16="http://schemas.microsoft.com/office/drawing/2014/main" id="{455E13A2-B241-6285-2A1F-A8CBC7CFD1FD}"/>
+                </a:ext>
+              </a:extLst>
+            </p:cNvPr>
+            <p:cNvPicPr>
+              <a:picLocks noChangeAspect="1"/>
+            </p:cNvPicPr>
+            <p:nvPr/>
+          </p:nvPicPr>
+          <p:blipFill>
+            <a:blip r:embed="rId4">
+              <a:extLst>
+                <a:ext uri="{28A0092B-C50C-407E-A947-70E740481C1C}">
+                  <a14:useLocalDpi xmlns:a14="http://schemas.microsoft.com/office/drawing/2010/main" val="0"/>
+                </a:ext>
+              </a:extLst>
+            </a:blip>
+            <a:stretch>
+              <a:fillRect/>
+            </a:stretch>
+          </p:blipFill>
+          <p:spPr>
+            <a:xfrm>
+              <a:off x="2073854" y="4661121"/>
+              <a:ext cx="8044290" cy="1159340"/>
+            </a:xfrm>
+            <a:prstGeom prst="rect">
+              <a:avLst/>
+            </a:prstGeom>
+          </p:spPr>
+        </p:pic>
+      </p:grpSp>
+      <p:sp>
+        <p:nvSpPr>
+          <p:cNvPr id="21" name="文字方塊 20">
+            <a:extLst>
+              <a:ext uri="{FF2B5EF4-FFF2-40B4-BE49-F238E27FC236}">
+                <a16:creationId xmlns:a16="http://schemas.microsoft.com/office/drawing/2014/main" id="{AABC79DE-8CE8-4E23-A705-5E293AAB6A5E}"/>
+              </a:ext>
+            </a:extLst>
+          </p:cNvPr>
+          <p:cNvSpPr txBox="1"/>
+          <p:nvPr/>
+        </p:nvSpPr>
+        <p:spPr>
+          <a:xfrm>
+            <a:off x="5999318" y="6473635"/>
+            <a:ext cx="1569660" cy="369332"/>
+          </a:xfrm>
+          <a:prstGeom prst="rect">
+            <a:avLst/>
+          </a:prstGeom>
+          <a:noFill/>
+        </p:spPr>
+        <p:txBody>
+          <a:bodyPr wrap="none" rtlCol="0">
+            <a:spAutoFit/>
+          </a:bodyPr>
+          <a:lstStyle/>
+          <a:p>
+            <a:r>
+              <a:rPr lang="zh-TW" altLang="en-US" b="1" dirty="0">
+                <a:solidFill>
+                  <a:srgbClr val="FF0000"/>
+                </a:solidFill>
+              </a:rPr>
+              <a:t>填寫申請需求</a:t>
+            </a:r>
+          </a:p>
+        </p:txBody>
+      </p:sp>
+      <p:sp>
+        <p:nvSpPr>
+          <p:cNvPr id="25" name="矩形 24">
+            <a:extLst>
+              <a:ext uri="{FF2B5EF4-FFF2-40B4-BE49-F238E27FC236}">
+                <a16:creationId xmlns:a16="http://schemas.microsoft.com/office/drawing/2014/main" id="{98D448D9-EB2F-0746-1C27-280F7A8B933D}"/>
               </a:ext>
             </a:extLst>
           </p:cNvPr>
@@ -3437,8 +3628,8 @@
         </p:nvSpPr>
         <p:spPr>
           <a:xfrm>
-            <a:off x="6206836" y="1834575"/>
-            <a:ext cx="1634838" cy="212434"/>
+            <a:off x="3020290" y="2850752"/>
+            <a:ext cx="1828801" cy="335793"/>
           </a:xfrm>
           <a:prstGeom prst="rect">
             <a:avLst/>
@@ -3481,48 +3672,53 @@
           </a:p>
         </p:txBody>
       </p:sp>
-      <p:pic>
-        <p:nvPicPr>
-          <p:cNvPr id="12" name="圖片 11" descr="一張含有 文字, 螢幕擷取畫面, 字型 的圖片&#10;&#10;AI 產生的內容可能不正確。">
-            <a:extLst>
-              <a:ext uri="{FF2B5EF4-FFF2-40B4-BE49-F238E27FC236}">
-                <a16:creationId xmlns:a16="http://schemas.microsoft.com/office/drawing/2014/main" id="{1B53FCC2-6AD4-7C61-CE60-91B76D8D7427}"/>
-              </a:ext>
-            </a:extLst>
-          </p:cNvPr>
-          <p:cNvPicPr>
-            <a:picLocks noChangeAspect="1"/>
-          </p:cNvPicPr>
-          <p:nvPr/>
-        </p:nvPicPr>
-        <p:blipFill>
-          <a:blip r:embed="rId3">
-            <a:extLst>
-              <a:ext uri="{28A0092B-C50C-407E-A947-70E740481C1C}">
-                <a14:useLocalDpi xmlns:a14="http://schemas.microsoft.com/office/drawing/2010/main" val="0"/>
-              </a:ext>
-            </a:extLst>
-          </a:blip>
-          <a:stretch>
-            <a:fillRect/>
-          </a:stretch>
-        </p:blipFill>
-        <p:spPr>
-          <a:xfrm>
-            <a:off x="4552479" y="4246826"/>
-            <a:ext cx="3372321" cy="2391109"/>
+      <p:sp>
+        <p:nvSpPr>
+          <p:cNvPr id="4" name="文字方塊 3">
+            <a:extLst>
+              <a:ext uri="{FF2B5EF4-FFF2-40B4-BE49-F238E27FC236}">
+                <a16:creationId xmlns:a16="http://schemas.microsoft.com/office/drawing/2014/main" id="{A431E921-7CDB-DCD1-AEA2-8E291A623F30}"/>
+              </a:ext>
+            </a:extLst>
+          </p:cNvPr>
+          <p:cNvSpPr txBox="1"/>
+          <p:nvPr/>
+        </p:nvSpPr>
+        <p:spPr>
+          <a:xfrm>
+            <a:off x="130478" y="38719"/>
+            <a:ext cx="11959922" cy="523220"/>
           </a:xfrm>
           <a:prstGeom prst="rect">
             <a:avLst/>
           </a:prstGeom>
-        </p:spPr>
-      </p:pic>
-      <p:sp>
-        <p:nvSpPr>
-          <p:cNvPr id="14" name="箭號: 向右 13">
-            <a:extLst>
-              <a:ext uri="{FF2B5EF4-FFF2-40B4-BE49-F238E27FC236}">
-                <a16:creationId xmlns:a16="http://schemas.microsoft.com/office/drawing/2014/main" id="{0D09C369-C42C-9791-EB11-15598BFBFA06}"/>
+          <a:noFill/>
+          <a:ln w="38100">
+            <a:solidFill>
+              <a:srgbClr val="FF0000"/>
+            </a:solidFill>
+          </a:ln>
+        </p:spPr>
+        <p:txBody>
+          <a:bodyPr wrap="square">
+            <a:spAutoFit/>
+          </a:bodyPr>
+          <a:lstStyle/>
+          <a:p>
+            <a:pPr algn="ctr"/>
+            <a:r>
+              <a:rPr lang="en-US" sz="2800" dirty="0"/>
+              <a:t>https://a00a.atlassian.net/wiki/spaces/NTCITH/pages/132448907/VPN</a:t>
+            </a:r>
+          </a:p>
+        </p:txBody>
+      </p:sp>
+      <p:sp>
+        <p:nvSpPr>
+          <p:cNvPr id="6" name="箭號: 向下 5">
+            <a:extLst>
+              <a:ext uri="{FF2B5EF4-FFF2-40B4-BE49-F238E27FC236}">
+                <a16:creationId xmlns:a16="http://schemas.microsoft.com/office/drawing/2014/main" id="{D9588766-0ED6-7486-46AD-79A13CB6BEA0}"/>
               </a:ext>
             </a:extLst>
           </p:cNvPr>
@@ -3531,10 +3727,10 @@
         </p:nvSpPr>
         <p:spPr>
           <a:xfrm>
-            <a:off x="4239491" y="4821380"/>
-            <a:ext cx="386878" cy="323272"/>
-          </a:xfrm>
-          <a:prstGeom prst="rightArrow">
+            <a:off x="5868085" y="5137204"/>
+            <a:ext cx="455825" cy="270356"/>
+          </a:xfrm>
+          <a:prstGeom prst="downArrow">
             <a:avLst/>
           </a:prstGeom>
           <a:solidFill>
@@ -3571,10 +3767,10 @@
       </p:sp>
       <p:sp>
         <p:nvSpPr>
-          <p:cNvPr id="15" name="箭號: 向右 14">
-            <a:extLst>
-              <a:ext uri="{FF2B5EF4-FFF2-40B4-BE49-F238E27FC236}">
-                <a16:creationId xmlns:a16="http://schemas.microsoft.com/office/drawing/2014/main" id="{DB99211E-7E98-6D1B-5EC1-B52C38D87ABC}"/>
+          <p:cNvPr id="11" name="矩形 10">
+            <a:extLst>
+              <a:ext uri="{FF2B5EF4-FFF2-40B4-BE49-F238E27FC236}">
+                <a16:creationId xmlns:a16="http://schemas.microsoft.com/office/drawing/2014/main" id="{13411FDE-0BD0-AF45-3C71-AD5AA9221B3A}"/>
               </a:ext>
             </a:extLst>
           </p:cNvPr>
@@ -3583,17 +3779,17 @@
         </p:nvSpPr>
         <p:spPr>
           <a:xfrm>
-            <a:off x="4239491" y="6107140"/>
-            <a:ext cx="386878" cy="323272"/>
-          </a:xfrm>
-          <a:prstGeom prst="rightArrow">
-            <a:avLst/>
-          </a:prstGeom>
-          <a:solidFill>
-            <a:srgbClr val="FF0000"/>
-          </a:solidFill>
-          <a:ln>
-            <a:noFill/>
+            <a:off x="6323910" y="5772847"/>
+            <a:ext cx="640308" cy="147662"/>
+          </a:xfrm>
+          <a:prstGeom prst="rect">
+            <a:avLst/>
+          </a:prstGeom>
+          <a:noFill/>
+          <a:ln w="38100">
+            <a:solidFill>
+              <a:srgbClr val="FF0000"/>
+            </a:solidFill>
           </a:ln>
         </p:spPr>
         <p:style>
@@ -3617,289 +3813,20 @@
           <a:lstStyle/>
           <a:p>
             <a:pPr algn="ctr"/>
-            <a:endParaRPr lang="en-US"/>
-          </a:p>
-        </p:txBody>
-      </p:sp>
-      <p:sp>
-        <p:nvSpPr>
-          <p:cNvPr id="16" name="文字方塊 15">
-            <a:extLst>
-              <a:ext uri="{FF2B5EF4-FFF2-40B4-BE49-F238E27FC236}">
-                <a16:creationId xmlns:a16="http://schemas.microsoft.com/office/drawing/2014/main" id="{1FEE7F85-9E75-5AD6-4C39-1756A52A3722}"/>
-              </a:ext>
-            </a:extLst>
-          </p:cNvPr>
-          <p:cNvSpPr txBox="1"/>
-          <p:nvPr/>
-        </p:nvSpPr>
-        <p:spPr>
-          <a:xfrm>
-            <a:off x="2720742" y="4793856"/>
-            <a:ext cx="1519968" cy="369332"/>
-          </a:xfrm>
-          <a:prstGeom prst="rect">
-            <a:avLst/>
-          </a:prstGeom>
-          <a:noFill/>
-        </p:spPr>
-        <p:txBody>
-          <a:bodyPr wrap="none" rtlCol="0">
-            <a:spAutoFit/>
-          </a:bodyPr>
-          <a:lstStyle/>
-          <a:p>
-            <a:r>
-              <a:rPr lang="en-US" altLang="zh-TW" b="1" dirty="0">
+            <a:endParaRPr lang="en-US">
+              <a:ln>
                 <a:solidFill>
                   <a:srgbClr val="FF0000"/>
                 </a:solidFill>
-              </a:rPr>
-              <a:t>VPN</a:t>
-            </a:r>
-            <a:r>
-              <a:rPr lang="zh-TW" altLang="en-US" b="1" dirty="0">
-                <a:solidFill>
-                  <a:srgbClr val="FF0000"/>
-                </a:solidFill>
-              </a:rPr>
-              <a:t>下載教學</a:t>
-            </a:r>
-          </a:p>
-        </p:txBody>
-      </p:sp>
-      <p:sp>
-        <p:nvSpPr>
-          <p:cNvPr id="17" name="文字方塊 16">
-            <a:extLst>
-              <a:ext uri="{FF2B5EF4-FFF2-40B4-BE49-F238E27FC236}">
-                <a16:creationId xmlns:a16="http://schemas.microsoft.com/office/drawing/2014/main" id="{4C23EC02-8C84-EAB2-63B9-84EDE8456FD0}"/>
-              </a:ext>
-            </a:extLst>
-          </p:cNvPr>
-          <p:cNvSpPr txBox="1"/>
-          <p:nvPr/>
-        </p:nvSpPr>
-        <p:spPr>
-          <a:xfrm>
-            <a:off x="3169435" y="6084110"/>
-            <a:ext cx="1058303" cy="369332"/>
-          </a:xfrm>
-          <a:prstGeom prst="rect">
-            <a:avLst/>
-          </a:prstGeom>
-          <a:noFill/>
-        </p:spPr>
-        <p:txBody>
-          <a:bodyPr wrap="none" rtlCol="0">
-            <a:spAutoFit/>
-          </a:bodyPr>
-          <a:lstStyle/>
-          <a:p>
-            <a:r>
-              <a:rPr lang="en-US" altLang="zh-TW" b="1" dirty="0">
-                <a:solidFill>
-                  <a:srgbClr val="FF0000"/>
-                </a:solidFill>
-              </a:rPr>
-              <a:t>VPN</a:t>
-            </a:r>
-            <a:r>
-              <a:rPr lang="zh-TW" altLang="en-US" b="1" dirty="0">
-                <a:solidFill>
-                  <a:srgbClr val="FF0000"/>
-                </a:solidFill>
-              </a:rPr>
-              <a:t>下載</a:t>
-            </a:r>
+              </a:ln>
+            </a:endParaRPr>
           </a:p>
         </p:txBody>
       </p:sp>
     </p:spTree>
     <p:extLst>
       <p:ext uri="{BB962C8B-B14F-4D97-AF65-F5344CB8AC3E}">
-        <p14:creationId xmlns:p14="http://schemas.microsoft.com/office/powerpoint/2010/main" val="2633401457"/>
-      </p:ext>
-    </p:extLst>
-  </p:cSld>
-  <p:clrMapOvr>
-    <a:masterClrMapping/>
-  </p:clrMapOvr>
-</p:sld>
-</file>
-
-<file path=ppt/slides/slide10.xml><?xml version="1.0" encoding="utf-8"?>
-<p:sld xmlns:a="http://schemas.openxmlformats.org/drawingml/2006/main" xmlns:r="http://schemas.openxmlformats.org/officeDocument/2006/relationships" xmlns:p="http://schemas.openxmlformats.org/presentationml/2006/main">
-  <p:cSld>
-    <p:spTree>
-      <p:nvGrpSpPr>
-        <p:cNvPr id="1" name=""/>
-        <p:cNvGrpSpPr/>
-        <p:nvPr/>
-      </p:nvGrpSpPr>
-      <p:grpSpPr>
-        <a:xfrm>
-          <a:off x="0" y="0"/>
-          <a:ext cx="0" cy="0"/>
-          <a:chOff x="0" y="0"/>
-          <a:chExt cx="0" cy="0"/>
-        </a:xfrm>
-      </p:grpSpPr>
-      <p:pic>
-        <p:nvPicPr>
-          <p:cNvPr id="7" name="圖片 6">
-            <a:extLst>
-              <a:ext uri="{FF2B5EF4-FFF2-40B4-BE49-F238E27FC236}">
-                <a16:creationId xmlns:a16="http://schemas.microsoft.com/office/drawing/2014/main" id="{88488BB9-3321-2B54-416D-15643A404569}"/>
-              </a:ext>
-            </a:extLst>
-          </p:cNvPr>
-          <p:cNvPicPr>
-            <a:picLocks noChangeAspect="1"/>
-          </p:cNvPicPr>
-          <p:nvPr/>
-        </p:nvPicPr>
-        <p:blipFill>
-          <a:blip r:embed="rId2"/>
-          <a:stretch>
-            <a:fillRect/>
-          </a:stretch>
-        </p:blipFill>
-        <p:spPr>
-          <a:xfrm>
-            <a:off x="3777670" y="2762156"/>
-            <a:ext cx="1066949" cy="1333686"/>
-          </a:xfrm>
-          <a:prstGeom prst="rect">
-            <a:avLst/>
-          </a:prstGeom>
-        </p:spPr>
-      </p:pic>
-      <p:pic>
-        <p:nvPicPr>
-          <p:cNvPr id="9" name="圖片 8">
-            <a:extLst>
-              <a:ext uri="{FF2B5EF4-FFF2-40B4-BE49-F238E27FC236}">
-                <a16:creationId xmlns:a16="http://schemas.microsoft.com/office/drawing/2014/main" id="{639EF4ED-E5CF-93A2-FA71-A008164866C0}"/>
-              </a:ext>
-            </a:extLst>
-          </p:cNvPr>
-          <p:cNvPicPr>
-            <a:picLocks noChangeAspect="1"/>
-          </p:cNvPicPr>
-          <p:nvPr/>
-        </p:nvPicPr>
-        <p:blipFill>
-          <a:blip r:embed="rId3"/>
-          <a:stretch>
-            <a:fillRect/>
-          </a:stretch>
-        </p:blipFill>
-        <p:spPr>
-          <a:xfrm>
-            <a:off x="5172350" y="2552576"/>
-            <a:ext cx="3896269" cy="1752845"/>
-          </a:xfrm>
-          <a:prstGeom prst="rect">
-            <a:avLst/>
-          </a:prstGeom>
-        </p:spPr>
-      </p:pic>
-      <p:sp>
-        <p:nvSpPr>
-          <p:cNvPr id="4" name="文字方塊 3">
-            <a:extLst>
-              <a:ext uri="{FF2B5EF4-FFF2-40B4-BE49-F238E27FC236}">
-                <a16:creationId xmlns:a16="http://schemas.microsoft.com/office/drawing/2014/main" id="{3E7A6D5C-D5AA-5894-F324-02ABAA438BA0}"/>
-              </a:ext>
-            </a:extLst>
-          </p:cNvPr>
-          <p:cNvSpPr txBox="1"/>
-          <p:nvPr/>
-        </p:nvSpPr>
-        <p:spPr>
-          <a:xfrm>
-            <a:off x="4638806" y="1786152"/>
-            <a:ext cx="2914388" cy="646331"/>
-          </a:xfrm>
-          <a:prstGeom prst="rect">
-            <a:avLst/>
-          </a:prstGeom>
-          <a:noFill/>
-        </p:spPr>
-        <p:txBody>
-          <a:bodyPr wrap="none" rtlCol="0">
-            <a:spAutoFit/>
-          </a:bodyPr>
-          <a:lstStyle/>
-          <a:p>
-            <a:r>
-              <a:rPr lang="zh-TW" altLang="en-US" b="1" dirty="0">
-                <a:solidFill>
-                  <a:srgbClr val="FF0000"/>
-                </a:solidFill>
-              </a:rPr>
-              <a:t>打開</a:t>
-            </a:r>
-            <a:r>
-              <a:rPr lang="en-US" altLang="zh-TW" b="1" dirty="0">
-                <a:solidFill>
-                  <a:srgbClr val="FF0000"/>
-                </a:solidFill>
-              </a:rPr>
-              <a:t>CISCO</a:t>
-            </a:r>
-            <a:r>
-              <a:rPr lang="zh-TW" altLang="en-US" b="1" dirty="0">
-                <a:solidFill>
-                  <a:srgbClr val="FF0000"/>
-                </a:solidFill>
-              </a:rPr>
-              <a:t> </a:t>
-            </a:r>
-            <a:r>
-              <a:rPr lang="en-US" altLang="zh-TW" b="1" dirty="0">
-                <a:solidFill>
-                  <a:srgbClr val="FF0000"/>
-                </a:solidFill>
-              </a:rPr>
-              <a:t>VPN</a:t>
-            </a:r>
-            <a:br>
-              <a:rPr lang="en-US" altLang="zh-TW" b="1" dirty="0">
-                <a:solidFill>
-                  <a:srgbClr val="FF0000"/>
-                </a:solidFill>
-              </a:rPr>
-            </a:br>
-            <a:r>
-              <a:rPr lang="zh-TW" altLang="en-US" b="1" dirty="0">
-                <a:solidFill>
-                  <a:srgbClr val="FF0000"/>
-                </a:solidFill>
-              </a:rPr>
-              <a:t>輸入 </a:t>
-            </a:r>
-            <a:r>
-              <a:rPr lang="en-US" altLang="zh-TW" b="1" dirty="0">
-                <a:solidFill>
-                  <a:srgbClr val="FF0000"/>
-                </a:solidFill>
-              </a:rPr>
-              <a:t>“VPN.NUVOTON.COM”</a:t>
-            </a:r>
-            <a:endParaRPr lang="zh-TW" altLang="en-US" b="1" dirty="0">
-              <a:solidFill>
-                <a:srgbClr val="FF0000"/>
-              </a:solidFill>
-            </a:endParaRPr>
-          </a:p>
-        </p:txBody>
-      </p:sp>
-    </p:spTree>
-    <p:extLst>
-      <p:ext uri="{BB962C8B-B14F-4D97-AF65-F5344CB8AC3E}">
-        <p14:creationId xmlns:p14="http://schemas.microsoft.com/office/powerpoint/2010/main" val="4018000184"/>
+        <p14:creationId xmlns:p14="http://schemas.microsoft.com/office/powerpoint/2010/main" val="1830303835"/>
       </p:ext>
     </p:extLst>
   </p:cSld>
@@ -3914,7 +3841,13 @@
   <p:cSld>
     <p:spTree>
       <p:nvGrpSpPr>
-        <p:cNvPr id="1" name=""/>
+        <p:cNvPr id="1" name="">
+          <a:extLst>
+            <a:ext uri="{FF2B5EF4-FFF2-40B4-BE49-F238E27FC236}">
+              <a16:creationId xmlns:a16="http://schemas.microsoft.com/office/drawing/2014/main" id="{F9116C4D-CE4E-0FB1-861B-888AD24E0D1B}"/>
+            </a:ext>
+          </a:extLst>
+        </p:cNvPr>
         <p:cNvGrpSpPr/>
         <p:nvPr/>
       </p:nvGrpSpPr>
@@ -3928,10 +3861,10 @@
       </p:grpSpPr>
       <p:pic>
         <p:nvPicPr>
-          <p:cNvPr id="5" name="圖片 4">
-            <a:extLst>
-              <a:ext uri="{FF2B5EF4-FFF2-40B4-BE49-F238E27FC236}">
-                <a16:creationId xmlns:a16="http://schemas.microsoft.com/office/drawing/2014/main" id="{063DE1F6-C503-0E64-36E8-9117AF3318F2}"/>
+          <p:cNvPr id="4" name="圖片 3" descr="一張含有 文字, 螢幕擷取畫面, 字型 的圖片&#10;&#10;AI 產生的內容可能不正確。">
+            <a:extLst>
+              <a:ext uri="{FF2B5EF4-FFF2-40B4-BE49-F238E27FC236}">
+                <a16:creationId xmlns:a16="http://schemas.microsoft.com/office/drawing/2014/main" id="{C9CBA5BC-1B94-05D1-8452-90497EAA5FE8}"/>
               </a:ext>
             </a:extLst>
           </p:cNvPr>
@@ -3941,27 +3874,91 @@
           <p:nvPr/>
         </p:nvPicPr>
         <p:blipFill>
-          <a:blip r:embed="rId2"/>
+          <a:blip r:embed="rId2">
+            <a:extLst>
+              <a:ext uri="{28A0092B-C50C-407E-A947-70E740481C1C}">
+                <a14:useLocalDpi xmlns:a14="http://schemas.microsoft.com/office/drawing/2010/main" val="0"/>
+              </a:ext>
+            </a:extLst>
+          </a:blip>
           <a:stretch>
             <a:fillRect/>
           </a:stretch>
         </p:blipFill>
         <p:spPr>
           <a:xfrm>
-            <a:off x="5398263" y="2381396"/>
-            <a:ext cx="3191320" cy="2095792"/>
+            <a:off x="2997087" y="170500"/>
+            <a:ext cx="6197825" cy="2763641"/>
           </a:xfrm>
           <a:prstGeom prst="rect">
             <a:avLst/>
           </a:prstGeom>
         </p:spPr>
       </p:pic>
+      <p:sp>
+        <p:nvSpPr>
+          <p:cNvPr id="8" name="矩形 7">
+            <a:extLst>
+              <a:ext uri="{FF2B5EF4-FFF2-40B4-BE49-F238E27FC236}">
+                <a16:creationId xmlns:a16="http://schemas.microsoft.com/office/drawing/2014/main" id="{2E7D1B4D-EBEA-CAEB-BC95-DEF570661A1C}"/>
+              </a:ext>
+            </a:extLst>
+          </p:cNvPr>
+          <p:cNvSpPr/>
+          <p:nvPr/>
+        </p:nvSpPr>
+        <p:spPr>
+          <a:xfrm>
+            <a:off x="3103419" y="2346036"/>
+            <a:ext cx="6091493" cy="526477"/>
+          </a:xfrm>
+          <a:prstGeom prst="rect">
+            <a:avLst/>
+          </a:prstGeom>
+          <a:noFill/>
+          <a:ln w="38100">
+            <a:solidFill>
+              <a:srgbClr val="FF0000"/>
+            </a:solidFill>
+          </a:ln>
+        </p:spPr>
+        <p:style>
+          <a:lnRef idx="2">
+            <a:schemeClr val="accent1">
+              <a:shade val="15000"/>
+            </a:schemeClr>
+          </a:lnRef>
+          <a:fillRef idx="1">
+            <a:schemeClr val="accent1"/>
+          </a:fillRef>
+          <a:effectRef idx="0">
+            <a:schemeClr val="accent1"/>
+          </a:effectRef>
+          <a:fontRef idx="minor">
+            <a:schemeClr val="lt1"/>
+          </a:fontRef>
+        </p:style>
+        <p:txBody>
+          <a:bodyPr rtlCol="0" anchor="ctr"/>
+          <a:lstStyle/>
+          <a:p>
+            <a:pPr algn="ctr"/>
+            <a:endParaRPr lang="en-US">
+              <a:ln>
+                <a:solidFill>
+                  <a:srgbClr val="FF0000"/>
+                </a:solidFill>
+              </a:ln>
+            </a:endParaRPr>
+          </a:p>
+        </p:txBody>
+      </p:sp>
       <p:pic>
         <p:nvPicPr>
-          <p:cNvPr id="7" name="圖片 6">
-            <a:extLst>
-              <a:ext uri="{FF2B5EF4-FFF2-40B4-BE49-F238E27FC236}">
-                <a16:creationId xmlns:a16="http://schemas.microsoft.com/office/drawing/2014/main" id="{E354BEB2-CB38-D947-9E9F-6EF684A739C2}"/>
+          <p:cNvPr id="2" name="圖片 1" descr="一張含有 文字, 螢幕擷取畫面, 數字, 行 的圖片&#10;&#10;AI 產生的內容可能不正確。">
+            <a:extLst>
+              <a:ext uri="{FF2B5EF4-FFF2-40B4-BE49-F238E27FC236}">
+                <a16:creationId xmlns:a16="http://schemas.microsoft.com/office/drawing/2014/main" id="{B5A204A2-7336-FF12-4B40-D77789AD7FB5}"/>
               </a:ext>
             </a:extLst>
           </p:cNvPr>
@@ -3971,15 +3968,21 @@
           <p:nvPr/>
         </p:nvPicPr>
         <p:blipFill>
-          <a:blip r:embed="rId3"/>
+          <a:blip r:embed="rId3">
+            <a:extLst>
+              <a:ext uri="{28A0092B-C50C-407E-A947-70E740481C1C}">
+                <a14:useLocalDpi xmlns:a14="http://schemas.microsoft.com/office/drawing/2010/main" val="0"/>
+              </a:ext>
+            </a:extLst>
+          </a:blip>
           <a:stretch>
             <a:fillRect/>
           </a:stretch>
         </p:blipFill>
         <p:spPr>
           <a:xfrm>
-            <a:off x="8962788" y="2168335"/>
-            <a:ext cx="3086531" cy="2543530"/>
+            <a:off x="2889977" y="3279034"/>
+            <a:ext cx="6412043" cy="3510066"/>
           </a:xfrm>
           <a:prstGeom prst="rect">
             <a:avLst/>
@@ -3988,10 +3991,120 @@
       </p:pic>
       <p:sp>
         <p:nvSpPr>
-          <p:cNvPr id="8" name="文字方塊 7">
-            <a:extLst>
-              <a:ext uri="{FF2B5EF4-FFF2-40B4-BE49-F238E27FC236}">
-                <a16:creationId xmlns:a16="http://schemas.microsoft.com/office/drawing/2014/main" id="{4C520B91-2D74-15D6-5444-75AC453D2E51}"/>
+          <p:cNvPr id="5" name="箭號: 向下 4">
+            <a:extLst>
+              <a:ext uri="{FF2B5EF4-FFF2-40B4-BE49-F238E27FC236}">
+                <a16:creationId xmlns:a16="http://schemas.microsoft.com/office/drawing/2014/main" id="{3A311B44-CE37-D8BF-2535-B7CA5460CB20}"/>
+              </a:ext>
+            </a:extLst>
+          </p:cNvPr>
+          <p:cNvSpPr/>
+          <p:nvPr/>
+        </p:nvSpPr>
+        <p:spPr>
+          <a:xfrm>
+            <a:off x="5868085" y="3045748"/>
+            <a:ext cx="455825" cy="270356"/>
+          </a:xfrm>
+          <a:prstGeom prst="downArrow">
+            <a:avLst/>
+          </a:prstGeom>
+          <a:solidFill>
+            <a:srgbClr val="FF0000"/>
+          </a:solidFill>
+          <a:ln>
+            <a:noFill/>
+          </a:ln>
+        </p:spPr>
+        <p:style>
+          <a:lnRef idx="2">
+            <a:schemeClr val="accent1">
+              <a:shade val="15000"/>
+            </a:schemeClr>
+          </a:lnRef>
+          <a:fillRef idx="1">
+            <a:schemeClr val="accent1"/>
+          </a:fillRef>
+          <a:effectRef idx="0">
+            <a:schemeClr val="accent1"/>
+          </a:effectRef>
+          <a:fontRef idx="minor">
+            <a:schemeClr val="lt1"/>
+          </a:fontRef>
+        </p:style>
+        <p:txBody>
+          <a:bodyPr rtlCol="0" anchor="ctr"/>
+          <a:lstStyle/>
+          <a:p>
+            <a:pPr algn="ctr"/>
+            <a:endParaRPr lang="en-US"/>
+          </a:p>
+        </p:txBody>
+      </p:sp>
+      <p:sp>
+        <p:nvSpPr>
+          <p:cNvPr id="9" name="矩形 8">
+            <a:extLst>
+              <a:ext uri="{FF2B5EF4-FFF2-40B4-BE49-F238E27FC236}">
+                <a16:creationId xmlns:a16="http://schemas.microsoft.com/office/drawing/2014/main" id="{D3ED8E8D-F2D6-CDDE-6401-16DF462A0317}"/>
+              </a:ext>
+            </a:extLst>
+          </p:cNvPr>
+          <p:cNvSpPr/>
+          <p:nvPr/>
+        </p:nvSpPr>
+        <p:spPr>
+          <a:xfrm>
+            <a:off x="5384800" y="6345382"/>
+            <a:ext cx="1450109" cy="457202"/>
+          </a:xfrm>
+          <a:prstGeom prst="rect">
+            <a:avLst/>
+          </a:prstGeom>
+          <a:noFill/>
+          <a:ln w="38100">
+            <a:solidFill>
+              <a:srgbClr val="FF0000"/>
+            </a:solidFill>
+          </a:ln>
+        </p:spPr>
+        <p:style>
+          <a:lnRef idx="2">
+            <a:schemeClr val="accent1">
+              <a:shade val="15000"/>
+            </a:schemeClr>
+          </a:lnRef>
+          <a:fillRef idx="1">
+            <a:schemeClr val="accent1"/>
+          </a:fillRef>
+          <a:effectRef idx="0">
+            <a:schemeClr val="accent1"/>
+          </a:effectRef>
+          <a:fontRef idx="minor">
+            <a:schemeClr val="lt1"/>
+          </a:fontRef>
+        </p:style>
+        <p:txBody>
+          <a:bodyPr rtlCol="0" anchor="ctr"/>
+          <a:lstStyle/>
+          <a:p>
+            <a:pPr algn="ctr"/>
+            <a:endParaRPr lang="en-US">
+              <a:ln>
+                <a:solidFill>
+                  <a:srgbClr val="FF0000"/>
+                </a:solidFill>
+              </a:ln>
+            </a:endParaRPr>
+          </a:p>
+        </p:txBody>
+      </p:sp>
+      <p:sp>
+        <p:nvSpPr>
+          <p:cNvPr id="10" name="文字方塊 9">
+            <a:extLst>
+              <a:ext uri="{FF2B5EF4-FFF2-40B4-BE49-F238E27FC236}">
+                <a16:creationId xmlns:a16="http://schemas.microsoft.com/office/drawing/2014/main" id="{E27FA2E6-B954-BCFD-C520-8995262A618B}"/>
               </a:ext>
             </a:extLst>
           </p:cNvPr>
@@ -4000,8 +4113,8 @@
         </p:nvSpPr>
         <p:spPr>
           <a:xfrm>
-            <a:off x="2221764" y="1502067"/>
-            <a:ext cx="1107996" cy="369332"/>
+            <a:off x="7653189" y="6389317"/>
+            <a:ext cx="3006913" cy="369332"/>
           </a:xfrm>
           <a:prstGeom prst="rect">
             <a:avLst/>
@@ -4020,95 +4133,33 @@
                   <a:srgbClr val="FF0000"/>
                 </a:solidFill>
               </a:rPr>
-              <a:t>確定連線</a:t>
-            </a:r>
-          </a:p>
-        </p:txBody>
-      </p:sp>
-      <p:sp>
-        <p:nvSpPr>
-          <p:cNvPr id="9" name="文字方塊 8">
-            <a:extLst>
-              <a:ext uri="{FF2B5EF4-FFF2-40B4-BE49-F238E27FC236}">
-                <a16:creationId xmlns:a16="http://schemas.microsoft.com/office/drawing/2014/main" id="{77FB69B7-1762-958A-9A5A-3754F9724E12}"/>
-              </a:ext>
-            </a:extLst>
-          </p:cNvPr>
-          <p:cNvSpPr txBox="1"/>
-          <p:nvPr/>
-        </p:nvSpPr>
-        <p:spPr>
-          <a:xfrm>
-            <a:off x="6439925" y="1502067"/>
-            <a:ext cx="1107996" cy="369332"/>
-          </a:xfrm>
-          <a:prstGeom prst="rect">
-            <a:avLst/>
-          </a:prstGeom>
-          <a:noFill/>
-        </p:spPr>
-        <p:txBody>
-          <a:bodyPr wrap="none" rtlCol="0">
-            <a:spAutoFit/>
-          </a:bodyPr>
-          <a:lstStyle/>
-          <a:p>
+              <a:t>上傳之前生成的 </a:t>
+            </a:r>
+            <a:r>
+              <a:rPr lang="en-US" altLang="zh-TW" b="1" dirty="0">
+                <a:solidFill>
+                  <a:srgbClr val="FF0000"/>
+                </a:solidFill>
+              </a:rPr>
+              <a:t>“.msg” </a:t>
+            </a:r>
             <a:r>
               <a:rPr lang="zh-TW" altLang="en-US" b="1" dirty="0">
                 <a:solidFill>
                   <a:srgbClr val="FF0000"/>
                 </a:solidFill>
               </a:rPr>
-              <a:t>公司帳密</a:t>
-            </a:r>
-          </a:p>
-        </p:txBody>
-      </p:sp>
-      <p:sp>
-        <p:nvSpPr>
-          <p:cNvPr id="10" name="文字方塊 9">
-            <a:extLst>
-              <a:ext uri="{FF2B5EF4-FFF2-40B4-BE49-F238E27FC236}">
-                <a16:creationId xmlns:a16="http://schemas.microsoft.com/office/drawing/2014/main" id="{8A17627B-63EF-71FA-798C-5A1C1304C8F2}"/>
-              </a:ext>
-            </a:extLst>
-          </p:cNvPr>
-          <p:cNvSpPr txBox="1"/>
-          <p:nvPr/>
-        </p:nvSpPr>
-        <p:spPr>
-          <a:xfrm>
-            <a:off x="9846635" y="1502067"/>
-            <a:ext cx="1569660" cy="369332"/>
-          </a:xfrm>
-          <a:prstGeom prst="rect">
-            <a:avLst/>
-          </a:prstGeom>
-          <a:noFill/>
-        </p:spPr>
-        <p:txBody>
-          <a:bodyPr wrap="none" rtlCol="0">
-            <a:spAutoFit/>
-          </a:bodyPr>
-          <a:lstStyle/>
-          <a:p>
-            <a:r>
-              <a:rPr lang="zh-TW" altLang="en-US" b="1" dirty="0">
-                <a:solidFill>
-                  <a:srgbClr val="FF0000"/>
-                </a:solidFill>
-              </a:rPr>
-              <a:t>手機收驗證碼</a:t>
+              <a:t>信件</a:t>
             </a:r>
           </a:p>
         </p:txBody>
       </p:sp>
       <p:pic>
         <p:nvPicPr>
-          <p:cNvPr id="12" name="圖片 11">
-            <a:extLst>
-              <a:ext uri="{FF2B5EF4-FFF2-40B4-BE49-F238E27FC236}">
-                <a16:creationId xmlns:a16="http://schemas.microsoft.com/office/drawing/2014/main" id="{9ACCEE04-1928-D4FF-7082-B063B5F08491}"/>
+          <p:cNvPr id="6" name="圖片 5" descr="一張含有 文字, 字型, 設計 的圖片&#10;&#10;AI 產生的內容可能不正確。">
+            <a:extLst>
+              <a:ext uri="{FF2B5EF4-FFF2-40B4-BE49-F238E27FC236}">
+                <a16:creationId xmlns:a16="http://schemas.microsoft.com/office/drawing/2014/main" id="{C3E87E3F-3954-D411-A954-9535CBFAE2D3}"/>
               </a:ext>
             </a:extLst>
           </p:cNvPr>
@@ -4118,25 +4169,70 @@
           <p:nvPr/>
         </p:nvPicPr>
         <p:blipFill>
-          <a:blip r:embed="rId4"/>
+          <a:blip r:embed="rId4">
+            <a:extLst>
+              <a:ext uri="{28A0092B-C50C-407E-A947-70E740481C1C}">
+                <a14:useLocalDpi xmlns:a14="http://schemas.microsoft.com/office/drawing/2010/main" val="0"/>
+              </a:ext>
+            </a:extLst>
+          </a:blip>
           <a:stretch>
             <a:fillRect/>
           </a:stretch>
         </p:blipFill>
         <p:spPr>
           <a:xfrm>
-            <a:off x="889765" y="2323081"/>
-            <a:ext cx="3879971" cy="2634710"/>
+            <a:off x="7112801" y="6252648"/>
+            <a:ext cx="535640" cy="595994"/>
           </a:xfrm>
           <a:prstGeom prst="rect">
             <a:avLst/>
           </a:prstGeom>
         </p:spPr>
       </p:pic>
+      <p:sp>
+        <p:nvSpPr>
+          <p:cNvPr id="7" name="文字方塊 6">
+            <a:extLst>
+              <a:ext uri="{FF2B5EF4-FFF2-40B4-BE49-F238E27FC236}">
+                <a16:creationId xmlns:a16="http://schemas.microsoft.com/office/drawing/2014/main" id="{81A7D0FA-763D-EEAF-2251-579C79C5D09A}"/>
+              </a:ext>
+            </a:extLst>
+          </p:cNvPr>
+          <p:cNvSpPr txBox="1"/>
+          <p:nvPr/>
+        </p:nvSpPr>
+        <p:spPr>
+          <a:xfrm>
+            <a:off x="3288145" y="5373317"/>
+            <a:ext cx="1261884" cy="307777"/>
+          </a:xfrm>
+          <a:prstGeom prst="rect">
+            <a:avLst/>
+          </a:prstGeom>
+          <a:noFill/>
+        </p:spPr>
+        <p:txBody>
+          <a:bodyPr wrap="none" rtlCol="0">
+            <a:spAutoFit/>
+          </a:bodyPr>
+          <a:lstStyle/>
+          <a:p>
+            <a:r>
+              <a:rPr lang="zh-TW" altLang="en-US" sz="1400" b="1" dirty="0">
+                <a:solidFill>
+                  <a:srgbClr val="FF0000"/>
+                </a:solidFill>
+              </a:rPr>
+              <a:t>簡單說明需求</a:t>
+            </a:r>
+          </a:p>
+        </p:txBody>
+      </p:sp>
     </p:spTree>
     <p:extLst>
       <p:ext uri="{BB962C8B-B14F-4D97-AF65-F5344CB8AC3E}">
-        <p14:creationId xmlns:p14="http://schemas.microsoft.com/office/powerpoint/2010/main" val="1795280776"/>
+        <p14:creationId xmlns:p14="http://schemas.microsoft.com/office/powerpoint/2010/main" val="3775983163"/>
       </p:ext>
     </p:extLst>
   </p:cSld>
@@ -4151,7 +4247,13 @@
   <p:cSld>
     <p:spTree>
       <p:nvGrpSpPr>
-        <p:cNvPr id="1" name=""/>
+        <p:cNvPr id="1" name="">
+          <a:extLst>
+            <a:ext uri="{FF2B5EF4-FFF2-40B4-BE49-F238E27FC236}">
+              <a16:creationId xmlns:a16="http://schemas.microsoft.com/office/drawing/2014/main" id="{FCB722A4-6196-14C2-FDB9-10A9BB878089}"/>
+            </a:ext>
+          </a:extLst>
+        </p:cNvPr>
         <p:cNvGrpSpPr/>
         <p:nvPr/>
       </p:nvGrpSpPr>
@@ -4163,219 +4265,12 @@
           <a:chExt cx="0" cy="0"/>
         </a:xfrm>
       </p:grpSpPr>
-      <p:sp>
-        <p:nvSpPr>
-          <p:cNvPr id="6" name="文字方塊 5">
-            <a:extLst>
-              <a:ext uri="{FF2B5EF4-FFF2-40B4-BE49-F238E27FC236}">
-                <a16:creationId xmlns:a16="http://schemas.microsoft.com/office/drawing/2014/main" id="{CF4E190D-8541-DD02-D8A0-E6AAABBB1AB1}"/>
-              </a:ext>
-            </a:extLst>
-          </p:cNvPr>
-          <p:cNvSpPr txBox="1"/>
-          <p:nvPr/>
-        </p:nvSpPr>
-        <p:spPr>
-          <a:xfrm>
-            <a:off x="1825770" y="1449049"/>
-            <a:ext cx="1824538" cy="369332"/>
-          </a:xfrm>
-          <a:prstGeom prst="rect">
-            <a:avLst/>
-          </a:prstGeom>
-          <a:noFill/>
-        </p:spPr>
-        <p:txBody>
-          <a:bodyPr wrap="none" rtlCol="0">
-            <a:spAutoFit/>
-          </a:bodyPr>
-          <a:lstStyle/>
-          <a:p>
-            <a:r>
-              <a:rPr lang="zh-TW" altLang="en-US" b="1" dirty="0">
-                <a:solidFill>
-                  <a:srgbClr val="FF0000"/>
-                </a:solidFill>
-              </a:rPr>
-              <a:t>點擊 </a:t>
-            </a:r>
-            <a:r>
-              <a:rPr lang="en-US" altLang="zh-TW" b="1" dirty="0">
-                <a:solidFill>
-                  <a:srgbClr val="FF0000"/>
-                </a:solidFill>
-              </a:rPr>
-              <a:t>“</a:t>
-            </a:r>
-            <a:r>
-              <a:rPr lang="zh-TW" altLang="en-US" b="1" dirty="0">
-                <a:solidFill>
-                  <a:srgbClr val="FF0000"/>
-                </a:solidFill>
-              </a:rPr>
-              <a:t>顯示選項</a:t>
-            </a:r>
-            <a:r>
-              <a:rPr lang="en-US" altLang="zh-TW" b="1" dirty="0">
-                <a:solidFill>
-                  <a:srgbClr val="FF0000"/>
-                </a:solidFill>
-              </a:rPr>
-              <a:t>”</a:t>
-            </a:r>
-            <a:endParaRPr lang="zh-TW" altLang="en-US" b="1" dirty="0">
-              <a:solidFill>
-                <a:srgbClr val="FF0000"/>
-              </a:solidFill>
-            </a:endParaRPr>
-          </a:p>
-        </p:txBody>
-      </p:sp>
-      <p:sp>
-        <p:nvSpPr>
-          <p:cNvPr id="7" name="文字方塊 6">
-            <a:extLst>
-              <a:ext uri="{FF2B5EF4-FFF2-40B4-BE49-F238E27FC236}">
-                <a16:creationId xmlns:a16="http://schemas.microsoft.com/office/drawing/2014/main" id="{020F7E33-75A6-3067-B0DF-31EF00A68AFC}"/>
-              </a:ext>
-            </a:extLst>
-          </p:cNvPr>
-          <p:cNvSpPr txBox="1"/>
-          <p:nvPr/>
-        </p:nvSpPr>
-        <p:spPr>
-          <a:xfrm>
-            <a:off x="6213682" y="1310405"/>
-            <a:ext cx="5258171" cy="646331"/>
-          </a:xfrm>
-          <a:prstGeom prst="rect">
-            <a:avLst/>
-          </a:prstGeom>
-          <a:noFill/>
-        </p:spPr>
-        <p:txBody>
-          <a:bodyPr wrap="none" rtlCol="0">
-            <a:spAutoFit/>
-          </a:bodyPr>
-          <a:lstStyle/>
-          <a:p>
-            <a:r>
-              <a:rPr lang="zh-TW" altLang="en-US" b="1" dirty="0">
-                <a:solidFill>
-                  <a:srgbClr val="FF0000"/>
-                </a:solidFill>
-              </a:rPr>
-              <a:t>本機資源 </a:t>
-            </a:r>
-            <a:r>
-              <a:rPr lang="en-US" altLang="zh-TW" b="1" dirty="0">
-                <a:solidFill>
-                  <a:srgbClr val="FF0000"/>
-                </a:solidFill>
-              </a:rPr>
-              <a:t>-&gt; </a:t>
-            </a:r>
-            <a:r>
-              <a:rPr lang="zh-TW" altLang="en-US" b="1" dirty="0">
-                <a:solidFill>
-                  <a:srgbClr val="FF0000"/>
-                </a:solidFill>
-              </a:rPr>
-              <a:t>音訊設定 </a:t>
-            </a:r>
-            <a:r>
-              <a:rPr lang="en-US" altLang="zh-TW" b="1" dirty="0">
-                <a:solidFill>
-                  <a:srgbClr val="FF0000"/>
-                </a:solidFill>
-              </a:rPr>
-              <a:t>-&gt; </a:t>
-            </a:r>
-            <a:br>
-              <a:rPr lang="en-US" altLang="zh-TW" b="1" dirty="0">
-                <a:solidFill>
-                  <a:srgbClr val="FF0000"/>
-                </a:solidFill>
-              </a:rPr>
-            </a:br>
-            <a:r>
-              <a:rPr lang="zh-TW" altLang="en-US" b="1" dirty="0">
-                <a:solidFill>
-                  <a:srgbClr val="FF0000"/>
-                </a:solidFill>
-              </a:rPr>
-              <a:t>確認勾選 </a:t>
-            </a:r>
-            <a:r>
-              <a:rPr lang="en-US" altLang="zh-TW" b="1" dirty="0">
-                <a:solidFill>
-                  <a:srgbClr val="FF0000"/>
-                </a:solidFill>
-              </a:rPr>
-              <a:t>“</a:t>
-            </a:r>
-            <a:r>
-              <a:rPr lang="zh-TW" altLang="en-US" b="1" dirty="0">
-                <a:solidFill>
-                  <a:srgbClr val="FF0000"/>
-                </a:solidFill>
-              </a:rPr>
-              <a:t>在這部電腦上撥放</a:t>
-            </a:r>
-            <a:r>
-              <a:rPr lang="en-US" altLang="zh-TW" b="1" dirty="0">
-                <a:solidFill>
-                  <a:srgbClr val="FF0000"/>
-                </a:solidFill>
-              </a:rPr>
-              <a:t>”</a:t>
-            </a:r>
-            <a:r>
-              <a:rPr lang="zh-TW" altLang="en-US" b="1" dirty="0">
-                <a:solidFill>
-                  <a:srgbClr val="FF0000"/>
-                </a:solidFill>
-              </a:rPr>
-              <a:t>、</a:t>
-            </a:r>
-            <a:r>
-              <a:rPr lang="en-US" altLang="zh-TW" b="1" dirty="0">
-                <a:solidFill>
-                  <a:srgbClr val="FF0000"/>
-                </a:solidFill>
-              </a:rPr>
-              <a:t>”</a:t>
-            </a:r>
-            <a:r>
-              <a:rPr lang="zh-TW" altLang="en-US" b="1" dirty="0">
-                <a:solidFill>
-                  <a:srgbClr val="FF0000"/>
-                </a:solidFill>
-              </a:rPr>
-              <a:t>從這部電腦錄製</a:t>
-            </a:r>
-            <a:r>
-              <a:rPr lang="en-US" altLang="zh-TW" b="1" dirty="0">
-                <a:solidFill>
-                  <a:srgbClr val="FF0000"/>
-                </a:solidFill>
-              </a:rPr>
-              <a:t>”</a:t>
-            </a:r>
-            <a:endParaRPr lang="zh-TW" altLang="en-US" b="1" dirty="0">
-              <a:solidFill>
-                <a:srgbClr val="FF0000"/>
-              </a:solidFill>
-            </a:endParaRPr>
-          </a:p>
-        </p:txBody>
-      </p:sp>
       <p:pic>
         <p:nvPicPr>
-          <p:cNvPr id="9" name="圖片 8">
-            <a:extLst>
-              <a:ext uri="{FF2B5EF4-FFF2-40B4-BE49-F238E27FC236}">
-                <a16:creationId xmlns:a16="http://schemas.microsoft.com/office/drawing/2014/main" id="{8756C0E8-EB64-25EB-3079-BBF544005A29}"/>
+          <p:cNvPr id="5" name="圖片 4" descr="一張含有 文字, 螢幕擷取畫面, 軟體, 網頁 的圖片&#10;&#10;AI 產生的內容可能不正確。">
+            <a:extLst>
+              <a:ext uri="{FF2B5EF4-FFF2-40B4-BE49-F238E27FC236}">
+                <a16:creationId xmlns:a16="http://schemas.microsoft.com/office/drawing/2014/main" id="{63702DAA-E974-D2C9-F8B4-0C007C77ED84}"/>
               </a:ext>
             </a:extLst>
           </p:cNvPr>
@@ -4385,85 +4280,72 @@
           <p:nvPr/>
         </p:nvPicPr>
         <p:blipFill>
-          <a:blip r:embed="rId2"/>
+          <a:blip r:embed="rId2">
+            <a:extLst>
+              <a:ext uri="{28A0092B-C50C-407E-A947-70E740481C1C}">
+                <a14:useLocalDpi xmlns:a14="http://schemas.microsoft.com/office/drawing/2010/main" val="0"/>
+              </a:ext>
+            </a:extLst>
+          </a:blip>
           <a:stretch>
             <a:fillRect/>
           </a:stretch>
         </p:blipFill>
         <p:spPr>
           <a:xfrm>
-            <a:off x="418098" y="2109603"/>
-            <a:ext cx="4458322" cy="2638793"/>
+            <a:off x="3023795" y="868218"/>
+            <a:ext cx="6144410" cy="5989782"/>
           </a:xfrm>
           <a:prstGeom prst="rect">
             <a:avLst/>
           </a:prstGeom>
         </p:spPr>
       </p:pic>
-      <p:pic>
-        <p:nvPicPr>
-          <p:cNvPr id="13" name="圖片 12">
-            <a:extLst>
-              <a:ext uri="{FF2B5EF4-FFF2-40B4-BE49-F238E27FC236}">
-                <a16:creationId xmlns:a16="http://schemas.microsoft.com/office/drawing/2014/main" id="{4E87620C-7F3B-F7CC-B79A-488F8A60DE8E}"/>
-              </a:ext>
-            </a:extLst>
-          </p:cNvPr>
-          <p:cNvPicPr>
-            <a:picLocks noChangeAspect="1"/>
-          </p:cNvPicPr>
-          <p:nvPr/>
-        </p:nvPicPr>
-        <p:blipFill>
-          <a:blip r:embed="rId3"/>
-          <a:stretch>
-            <a:fillRect/>
-          </a:stretch>
-        </p:blipFill>
-        <p:spPr>
-          <a:xfrm>
-            <a:off x="8536632" y="2109603"/>
-            <a:ext cx="3593222" cy="2925798"/>
+      <p:sp>
+        <p:nvSpPr>
+          <p:cNvPr id="2" name="文字方塊 1">
+            <a:extLst>
+              <a:ext uri="{FF2B5EF4-FFF2-40B4-BE49-F238E27FC236}">
+                <a16:creationId xmlns:a16="http://schemas.microsoft.com/office/drawing/2014/main" id="{C282E49A-5838-9501-D3C3-BF187F341820}"/>
+              </a:ext>
+            </a:extLst>
+          </p:cNvPr>
+          <p:cNvSpPr txBox="1"/>
+          <p:nvPr/>
+        </p:nvSpPr>
+        <p:spPr>
+          <a:xfrm>
+            <a:off x="5695890" y="241036"/>
+            <a:ext cx="800219" cy="461665"/>
           </a:xfrm>
           <a:prstGeom prst="rect">
             <a:avLst/>
           </a:prstGeom>
-        </p:spPr>
-      </p:pic>
-      <p:pic>
-        <p:nvPicPr>
-          <p:cNvPr id="15" name="圖片 14">
-            <a:extLst>
-              <a:ext uri="{FF2B5EF4-FFF2-40B4-BE49-F238E27FC236}">
-                <a16:creationId xmlns:a16="http://schemas.microsoft.com/office/drawing/2014/main" id="{BA968835-8D83-B2F4-ED72-25606153ED2A}"/>
-              </a:ext>
-            </a:extLst>
-          </p:cNvPr>
-          <p:cNvPicPr>
-            <a:picLocks noChangeAspect="1"/>
-          </p:cNvPicPr>
-          <p:nvPr/>
-        </p:nvPicPr>
-        <p:blipFill>
-          <a:blip r:embed="rId4"/>
-          <a:stretch>
-            <a:fillRect/>
-          </a:stretch>
-        </p:blipFill>
-        <p:spPr>
-          <a:xfrm>
-            <a:off x="5390333" y="2109603"/>
-            <a:ext cx="3070088" cy="3664299"/>
-          </a:xfrm>
-          <a:prstGeom prst="rect">
-            <a:avLst/>
-          </a:prstGeom>
-        </p:spPr>
-      </p:pic>
+          <a:noFill/>
+        </p:spPr>
+        <p:txBody>
+          <a:bodyPr wrap="none" rtlCol="0">
+            <a:spAutoFit/>
+          </a:bodyPr>
+          <a:lstStyle/>
+          <a:p>
+            <a:r>
+              <a:rPr lang="zh-TW" altLang="en-US" sz="2400" b="1" dirty="0">
+                <a:solidFill>
+                  <a:srgbClr val="FF0000"/>
+                </a:solidFill>
+                <a:latin typeface="微軟正黑體" panose="020B0604030504040204" pitchFamily="34" charset="-120"/>
+                <a:ea typeface="微軟正黑體" panose="020B0604030504040204" pitchFamily="34" charset="-120"/>
+              </a:rPr>
+              <a:t>完成</a:t>
+            </a:r>
+          </a:p>
+        </p:txBody>
+      </p:sp>
     </p:spTree>
     <p:extLst>
       <p:ext uri="{BB962C8B-B14F-4D97-AF65-F5344CB8AC3E}">
-        <p14:creationId xmlns:p14="http://schemas.microsoft.com/office/powerpoint/2010/main" val="3152413103"/>
+        <p14:creationId xmlns:p14="http://schemas.microsoft.com/office/powerpoint/2010/main" val="787195075"/>
       </p:ext>
     </p:extLst>
   </p:cSld>
@@ -4490,42 +4372,12 @@
           <a:chExt cx="0" cy="0"/>
         </a:xfrm>
       </p:grpSpPr>
-      <p:pic>
-        <p:nvPicPr>
-          <p:cNvPr id="3" name="圖片 2">
-            <a:extLst>
-              <a:ext uri="{FF2B5EF4-FFF2-40B4-BE49-F238E27FC236}">
-                <a16:creationId xmlns:a16="http://schemas.microsoft.com/office/drawing/2014/main" id="{57BEF5B7-5AE1-30D5-B76C-1D4358AF5E21}"/>
-              </a:ext>
-            </a:extLst>
-          </p:cNvPr>
-          <p:cNvPicPr>
-            <a:picLocks noChangeAspect="1"/>
-          </p:cNvPicPr>
-          <p:nvPr/>
-        </p:nvPicPr>
-        <p:blipFill>
-          <a:blip r:embed="rId2"/>
-          <a:stretch>
-            <a:fillRect/>
-          </a:stretch>
-        </p:blipFill>
-        <p:spPr>
-          <a:xfrm>
-            <a:off x="6629294" y="2085787"/>
-            <a:ext cx="4305901" cy="3915321"/>
-          </a:xfrm>
-          <a:prstGeom prst="rect">
-            <a:avLst/>
-          </a:prstGeom>
-        </p:spPr>
-      </p:pic>
       <p:sp>
         <p:nvSpPr>
           <p:cNvPr id="4" name="文字方塊 3">
             <a:extLst>
               <a:ext uri="{FF2B5EF4-FFF2-40B4-BE49-F238E27FC236}">
-                <a16:creationId xmlns:a16="http://schemas.microsoft.com/office/drawing/2014/main" id="{47A4EC0C-54E9-4E65-F153-CCE2236A1C29}"/>
+                <a16:creationId xmlns:a16="http://schemas.microsoft.com/office/drawing/2014/main" id="{986330A0-0707-5576-B5A6-258DF73180BB}"/>
               </a:ext>
             </a:extLst>
           </p:cNvPr>
@@ -4534,8 +4386,8 @@
         </p:nvSpPr>
         <p:spPr>
           <a:xfrm>
-            <a:off x="2488962" y="1606243"/>
-            <a:ext cx="1994007" cy="369332"/>
+            <a:off x="5080337" y="3105834"/>
+            <a:ext cx="2031325" cy="646331"/>
           </a:xfrm>
           <a:prstGeom prst="rect">
             <a:avLst/>
@@ -4549,102 +4401,23 @@
           <a:lstStyle/>
           <a:p>
             <a:r>
-              <a:rPr lang="zh-TW" altLang="en-US" b="1" dirty="0">
-                <a:solidFill>
-                  <a:srgbClr val="FF0000"/>
-                </a:solidFill>
+              <a:rPr lang="zh-TW" altLang="en-US" sz="3600" dirty="0">
+                <a:latin typeface="微軟正黑體" panose="020B0604030504040204" pitchFamily="34" charset="-120"/>
+                <a:ea typeface="微軟正黑體" panose="020B0604030504040204" pitchFamily="34" charset="-120"/>
               </a:rPr>
-              <a:t>連線 </a:t>
-            </a:r>
-            <a:r>
-              <a:rPr lang="en-US" altLang="zh-TW" b="1" dirty="0">
-                <a:solidFill>
-                  <a:srgbClr val="FF0000"/>
-                </a:solidFill>
-              </a:rPr>
-              <a:t>“NTHCTERM”</a:t>
-            </a:r>
-            <a:endParaRPr lang="zh-TW" altLang="en-US" b="1" dirty="0">
-              <a:solidFill>
-                <a:srgbClr val="FF0000"/>
-              </a:solidFill>
+              <a:t>遠端連線</a:t>
+            </a:r>
+            <a:endParaRPr lang="en-US" sz="3600" dirty="0">
+              <a:latin typeface="微軟正黑體" panose="020B0604030504040204" pitchFamily="34" charset="-120"/>
+              <a:ea typeface="微軟正黑體" panose="020B0604030504040204" pitchFamily="34" charset="-120"/>
             </a:endParaRPr>
-          </a:p>
-        </p:txBody>
-      </p:sp>
-      <p:pic>
-        <p:nvPicPr>
-          <p:cNvPr id="6" name="圖片 5">
-            <a:extLst>
-              <a:ext uri="{FF2B5EF4-FFF2-40B4-BE49-F238E27FC236}">
-                <a16:creationId xmlns:a16="http://schemas.microsoft.com/office/drawing/2014/main" id="{21DEA886-28F2-FE93-AA9E-E48414B2392D}"/>
-              </a:ext>
-            </a:extLst>
-          </p:cNvPr>
-          <p:cNvPicPr>
-            <a:picLocks noChangeAspect="1"/>
-          </p:cNvPicPr>
-          <p:nvPr/>
-        </p:nvPicPr>
-        <p:blipFill>
-          <a:blip r:embed="rId3"/>
-          <a:stretch>
-            <a:fillRect/>
-          </a:stretch>
-        </p:blipFill>
-        <p:spPr>
-          <a:xfrm>
-            <a:off x="1256805" y="2085787"/>
-            <a:ext cx="4458322" cy="2686425"/>
-          </a:xfrm>
-          <a:prstGeom prst="rect">
-            <a:avLst/>
-          </a:prstGeom>
-        </p:spPr>
-      </p:pic>
-      <p:sp>
-        <p:nvSpPr>
-          <p:cNvPr id="7" name="文字方塊 6">
-            <a:extLst>
-              <a:ext uri="{FF2B5EF4-FFF2-40B4-BE49-F238E27FC236}">
-                <a16:creationId xmlns:a16="http://schemas.microsoft.com/office/drawing/2014/main" id="{71F2A970-601E-083F-BFAD-243E6CFFE1D3}"/>
-              </a:ext>
-            </a:extLst>
-          </p:cNvPr>
-          <p:cNvSpPr txBox="1"/>
-          <p:nvPr/>
-        </p:nvSpPr>
-        <p:spPr>
-          <a:xfrm>
-            <a:off x="8357103" y="1606243"/>
-            <a:ext cx="1107996" cy="369332"/>
-          </a:xfrm>
-          <a:prstGeom prst="rect">
-            <a:avLst/>
-          </a:prstGeom>
-          <a:noFill/>
-        </p:spPr>
-        <p:txBody>
-          <a:bodyPr wrap="none" rtlCol="0">
-            <a:spAutoFit/>
-          </a:bodyPr>
-          <a:lstStyle/>
-          <a:p>
-            <a:r>
-              <a:rPr lang="zh-TW" altLang="en-US" b="1" dirty="0">
-                <a:solidFill>
-                  <a:srgbClr val="FF0000"/>
-                </a:solidFill>
-              </a:rPr>
-              <a:t>公司帳密</a:t>
-            </a:r>
           </a:p>
         </p:txBody>
       </p:sp>
     </p:spTree>
     <p:extLst>
       <p:ext uri="{BB962C8B-B14F-4D97-AF65-F5344CB8AC3E}">
-        <p14:creationId xmlns:p14="http://schemas.microsoft.com/office/powerpoint/2010/main" val="1813945076"/>
+        <p14:creationId xmlns:p14="http://schemas.microsoft.com/office/powerpoint/2010/main" val="1492222047"/>
       </p:ext>
     </p:extLst>
   </p:cSld>
@@ -4673,6 +4446,1331 @@
       </p:grpSpPr>
       <p:pic>
         <p:nvPicPr>
+          <p:cNvPr id="7" name="圖片 6">
+            <a:extLst>
+              <a:ext uri="{FF2B5EF4-FFF2-40B4-BE49-F238E27FC236}">
+                <a16:creationId xmlns:a16="http://schemas.microsoft.com/office/drawing/2014/main" id="{88488BB9-3321-2B54-416D-15643A404569}"/>
+              </a:ext>
+            </a:extLst>
+          </p:cNvPr>
+          <p:cNvPicPr>
+            <a:picLocks noChangeAspect="1"/>
+          </p:cNvPicPr>
+          <p:nvPr/>
+        </p:nvPicPr>
+        <p:blipFill>
+          <a:blip r:embed="rId2"/>
+          <a:stretch>
+            <a:fillRect/>
+          </a:stretch>
+        </p:blipFill>
+        <p:spPr>
+          <a:xfrm>
+            <a:off x="3777670" y="2762156"/>
+            <a:ext cx="1066949" cy="1333686"/>
+          </a:xfrm>
+          <a:prstGeom prst="rect">
+            <a:avLst/>
+          </a:prstGeom>
+        </p:spPr>
+      </p:pic>
+      <p:pic>
+        <p:nvPicPr>
+          <p:cNvPr id="9" name="圖片 8">
+            <a:extLst>
+              <a:ext uri="{FF2B5EF4-FFF2-40B4-BE49-F238E27FC236}">
+                <a16:creationId xmlns:a16="http://schemas.microsoft.com/office/drawing/2014/main" id="{639EF4ED-E5CF-93A2-FA71-A008164866C0}"/>
+              </a:ext>
+            </a:extLst>
+          </p:cNvPr>
+          <p:cNvPicPr>
+            <a:picLocks noChangeAspect="1"/>
+          </p:cNvPicPr>
+          <p:nvPr/>
+        </p:nvPicPr>
+        <p:blipFill>
+          <a:blip r:embed="rId3"/>
+          <a:stretch>
+            <a:fillRect/>
+          </a:stretch>
+        </p:blipFill>
+        <p:spPr>
+          <a:xfrm>
+            <a:off x="5172350" y="2552576"/>
+            <a:ext cx="3896269" cy="1752845"/>
+          </a:xfrm>
+          <a:prstGeom prst="rect">
+            <a:avLst/>
+          </a:prstGeom>
+        </p:spPr>
+      </p:pic>
+      <p:sp>
+        <p:nvSpPr>
+          <p:cNvPr id="4" name="文字方塊 3">
+            <a:extLst>
+              <a:ext uri="{FF2B5EF4-FFF2-40B4-BE49-F238E27FC236}">
+                <a16:creationId xmlns:a16="http://schemas.microsoft.com/office/drawing/2014/main" id="{3E7A6D5C-D5AA-5894-F324-02ABAA438BA0}"/>
+              </a:ext>
+            </a:extLst>
+          </p:cNvPr>
+          <p:cNvSpPr txBox="1"/>
+          <p:nvPr/>
+        </p:nvSpPr>
+        <p:spPr>
+          <a:xfrm>
+            <a:off x="4638806" y="1786152"/>
+            <a:ext cx="2914388" cy="646331"/>
+          </a:xfrm>
+          <a:prstGeom prst="rect">
+            <a:avLst/>
+          </a:prstGeom>
+          <a:noFill/>
+        </p:spPr>
+        <p:txBody>
+          <a:bodyPr wrap="none" rtlCol="0">
+            <a:spAutoFit/>
+          </a:bodyPr>
+          <a:lstStyle/>
+          <a:p>
+            <a:r>
+              <a:rPr lang="zh-TW" altLang="en-US" b="1" dirty="0">
+                <a:solidFill>
+                  <a:srgbClr val="FF0000"/>
+                </a:solidFill>
+              </a:rPr>
+              <a:t>打開</a:t>
+            </a:r>
+            <a:r>
+              <a:rPr lang="en-US" altLang="zh-TW" b="1" dirty="0">
+                <a:solidFill>
+                  <a:srgbClr val="FF0000"/>
+                </a:solidFill>
+              </a:rPr>
+              <a:t>CISCO</a:t>
+            </a:r>
+            <a:r>
+              <a:rPr lang="zh-TW" altLang="en-US" b="1" dirty="0">
+                <a:solidFill>
+                  <a:srgbClr val="FF0000"/>
+                </a:solidFill>
+              </a:rPr>
+              <a:t> </a:t>
+            </a:r>
+            <a:r>
+              <a:rPr lang="en-US" altLang="zh-TW" b="1" dirty="0">
+                <a:solidFill>
+                  <a:srgbClr val="FF0000"/>
+                </a:solidFill>
+              </a:rPr>
+              <a:t>VPN</a:t>
+            </a:r>
+            <a:br>
+              <a:rPr lang="en-US" altLang="zh-TW" b="1" dirty="0">
+                <a:solidFill>
+                  <a:srgbClr val="FF0000"/>
+                </a:solidFill>
+              </a:rPr>
+            </a:br>
+            <a:r>
+              <a:rPr lang="zh-TW" altLang="en-US" b="1" dirty="0">
+                <a:solidFill>
+                  <a:srgbClr val="FF0000"/>
+                </a:solidFill>
+              </a:rPr>
+              <a:t>輸入 </a:t>
+            </a:r>
+            <a:r>
+              <a:rPr lang="en-US" altLang="zh-TW" b="1" dirty="0">
+                <a:solidFill>
+                  <a:srgbClr val="FF0000"/>
+                </a:solidFill>
+              </a:rPr>
+              <a:t>“VPN.NUVOTON.COM”</a:t>
+            </a:r>
+            <a:endParaRPr lang="zh-TW" altLang="en-US" b="1" dirty="0">
+              <a:solidFill>
+                <a:srgbClr val="FF0000"/>
+              </a:solidFill>
+            </a:endParaRPr>
+          </a:p>
+        </p:txBody>
+      </p:sp>
+    </p:spTree>
+    <p:extLst>
+      <p:ext uri="{BB962C8B-B14F-4D97-AF65-F5344CB8AC3E}">
+        <p14:creationId xmlns:p14="http://schemas.microsoft.com/office/powerpoint/2010/main" val="4018000184"/>
+      </p:ext>
+    </p:extLst>
+  </p:cSld>
+  <p:clrMapOvr>
+    <a:masterClrMapping/>
+  </p:clrMapOvr>
+</p:sld>
+</file>
+
+<file path=ppt/slides/slide15.xml><?xml version="1.0" encoding="utf-8"?>
+<p:sld xmlns:a="http://schemas.openxmlformats.org/drawingml/2006/main" xmlns:r="http://schemas.openxmlformats.org/officeDocument/2006/relationships" xmlns:p="http://schemas.openxmlformats.org/presentationml/2006/main">
+  <p:cSld>
+    <p:spTree>
+      <p:nvGrpSpPr>
+        <p:cNvPr id="1" name=""/>
+        <p:cNvGrpSpPr/>
+        <p:nvPr/>
+      </p:nvGrpSpPr>
+      <p:grpSpPr>
+        <a:xfrm>
+          <a:off x="0" y="0"/>
+          <a:ext cx="0" cy="0"/>
+          <a:chOff x="0" y="0"/>
+          <a:chExt cx="0" cy="0"/>
+        </a:xfrm>
+      </p:grpSpPr>
+      <p:pic>
+        <p:nvPicPr>
+          <p:cNvPr id="5" name="圖片 4">
+            <a:extLst>
+              <a:ext uri="{FF2B5EF4-FFF2-40B4-BE49-F238E27FC236}">
+                <a16:creationId xmlns:a16="http://schemas.microsoft.com/office/drawing/2014/main" id="{063DE1F6-C503-0E64-36E8-9117AF3318F2}"/>
+              </a:ext>
+            </a:extLst>
+          </p:cNvPr>
+          <p:cNvPicPr>
+            <a:picLocks noChangeAspect="1"/>
+          </p:cNvPicPr>
+          <p:nvPr/>
+        </p:nvPicPr>
+        <p:blipFill>
+          <a:blip r:embed="rId2"/>
+          <a:stretch>
+            <a:fillRect/>
+          </a:stretch>
+        </p:blipFill>
+        <p:spPr>
+          <a:xfrm>
+            <a:off x="5056524" y="2381396"/>
+            <a:ext cx="3191320" cy="2095792"/>
+          </a:xfrm>
+          <a:prstGeom prst="rect">
+            <a:avLst/>
+          </a:prstGeom>
+        </p:spPr>
+      </p:pic>
+      <p:pic>
+        <p:nvPicPr>
+          <p:cNvPr id="7" name="圖片 6">
+            <a:extLst>
+              <a:ext uri="{FF2B5EF4-FFF2-40B4-BE49-F238E27FC236}">
+                <a16:creationId xmlns:a16="http://schemas.microsoft.com/office/drawing/2014/main" id="{E354BEB2-CB38-D947-9E9F-6EF684A739C2}"/>
+              </a:ext>
+            </a:extLst>
+          </p:cNvPr>
+          <p:cNvPicPr>
+            <a:picLocks noChangeAspect="1"/>
+          </p:cNvPicPr>
+          <p:nvPr/>
+        </p:nvPicPr>
+        <p:blipFill>
+          <a:blip r:embed="rId3"/>
+          <a:stretch>
+            <a:fillRect/>
+          </a:stretch>
+        </p:blipFill>
+        <p:spPr>
+          <a:xfrm>
+            <a:off x="8621049" y="2168335"/>
+            <a:ext cx="3086531" cy="2543530"/>
+          </a:xfrm>
+          <a:prstGeom prst="rect">
+            <a:avLst/>
+          </a:prstGeom>
+        </p:spPr>
+      </p:pic>
+      <p:sp>
+        <p:nvSpPr>
+          <p:cNvPr id="8" name="文字方塊 7">
+            <a:extLst>
+              <a:ext uri="{FF2B5EF4-FFF2-40B4-BE49-F238E27FC236}">
+                <a16:creationId xmlns:a16="http://schemas.microsoft.com/office/drawing/2014/main" id="{4C520B91-2D74-15D6-5444-75AC453D2E51}"/>
+              </a:ext>
+            </a:extLst>
+          </p:cNvPr>
+          <p:cNvSpPr txBox="1"/>
+          <p:nvPr/>
+        </p:nvSpPr>
+        <p:spPr>
+          <a:xfrm>
+            <a:off x="1880025" y="1502067"/>
+            <a:ext cx="1107996" cy="369332"/>
+          </a:xfrm>
+          <a:prstGeom prst="rect">
+            <a:avLst/>
+          </a:prstGeom>
+          <a:noFill/>
+        </p:spPr>
+        <p:txBody>
+          <a:bodyPr wrap="none" rtlCol="0">
+            <a:spAutoFit/>
+          </a:bodyPr>
+          <a:lstStyle/>
+          <a:p>
+            <a:r>
+              <a:rPr lang="zh-TW" altLang="en-US" b="1" dirty="0">
+                <a:solidFill>
+                  <a:srgbClr val="FF0000"/>
+                </a:solidFill>
+              </a:rPr>
+              <a:t>確定連線</a:t>
+            </a:r>
+          </a:p>
+        </p:txBody>
+      </p:sp>
+      <p:sp>
+        <p:nvSpPr>
+          <p:cNvPr id="9" name="文字方塊 8">
+            <a:extLst>
+              <a:ext uri="{FF2B5EF4-FFF2-40B4-BE49-F238E27FC236}">
+                <a16:creationId xmlns:a16="http://schemas.microsoft.com/office/drawing/2014/main" id="{77FB69B7-1762-958A-9A5A-3754F9724E12}"/>
+              </a:ext>
+            </a:extLst>
+          </p:cNvPr>
+          <p:cNvSpPr txBox="1"/>
+          <p:nvPr/>
+        </p:nvSpPr>
+        <p:spPr>
+          <a:xfrm>
+            <a:off x="6098186" y="1502067"/>
+            <a:ext cx="1107996" cy="369332"/>
+          </a:xfrm>
+          <a:prstGeom prst="rect">
+            <a:avLst/>
+          </a:prstGeom>
+          <a:noFill/>
+        </p:spPr>
+        <p:txBody>
+          <a:bodyPr wrap="none" rtlCol="0">
+            <a:spAutoFit/>
+          </a:bodyPr>
+          <a:lstStyle/>
+          <a:p>
+            <a:r>
+              <a:rPr lang="zh-TW" altLang="en-US" b="1" dirty="0">
+                <a:solidFill>
+                  <a:srgbClr val="FF0000"/>
+                </a:solidFill>
+              </a:rPr>
+              <a:t>公司帳密</a:t>
+            </a:r>
+          </a:p>
+        </p:txBody>
+      </p:sp>
+      <p:sp>
+        <p:nvSpPr>
+          <p:cNvPr id="10" name="文字方塊 9">
+            <a:extLst>
+              <a:ext uri="{FF2B5EF4-FFF2-40B4-BE49-F238E27FC236}">
+                <a16:creationId xmlns:a16="http://schemas.microsoft.com/office/drawing/2014/main" id="{8A17627B-63EF-71FA-798C-5A1C1304C8F2}"/>
+              </a:ext>
+            </a:extLst>
+          </p:cNvPr>
+          <p:cNvSpPr txBox="1"/>
+          <p:nvPr/>
+        </p:nvSpPr>
+        <p:spPr>
+          <a:xfrm>
+            <a:off x="9504896" y="1502067"/>
+            <a:ext cx="1569660" cy="369332"/>
+          </a:xfrm>
+          <a:prstGeom prst="rect">
+            <a:avLst/>
+          </a:prstGeom>
+          <a:noFill/>
+        </p:spPr>
+        <p:txBody>
+          <a:bodyPr wrap="none" rtlCol="0">
+            <a:spAutoFit/>
+          </a:bodyPr>
+          <a:lstStyle/>
+          <a:p>
+            <a:r>
+              <a:rPr lang="zh-TW" altLang="en-US" b="1" dirty="0">
+                <a:solidFill>
+                  <a:srgbClr val="FF0000"/>
+                </a:solidFill>
+              </a:rPr>
+              <a:t>手機收驗證碼</a:t>
+            </a:r>
+          </a:p>
+        </p:txBody>
+      </p:sp>
+      <p:pic>
+        <p:nvPicPr>
+          <p:cNvPr id="12" name="圖片 11">
+            <a:extLst>
+              <a:ext uri="{FF2B5EF4-FFF2-40B4-BE49-F238E27FC236}">
+                <a16:creationId xmlns:a16="http://schemas.microsoft.com/office/drawing/2014/main" id="{9ACCEE04-1928-D4FF-7082-B063B5F08491}"/>
+              </a:ext>
+            </a:extLst>
+          </p:cNvPr>
+          <p:cNvPicPr>
+            <a:picLocks noChangeAspect="1"/>
+          </p:cNvPicPr>
+          <p:nvPr/>
+        </p:nvPicPr>
+        <p:blipFill>
+          <a:blip r:embed="rId4"/>
+          <a:stretch>
+            <a:fillRect/>
+          </a:stretch>
+        </p:blipFill>
+        <p:spPr>
+          <a:xfrm>
+            <a:off x="548026" y="2323081"/>
+            <a:ext cx="3879971" cy="2634710"/>
+          </a:xfrm>
+          <a:prstGeom prst="rect">
+            <a:avLst/>
+          </a:prstGeom>
+        </p:spPr>
+      </p:pic>
+      <p:sp>
+        <p:nvSpPr>
+          <p:cNvPr id="2" name="箭號: 向下 1">
+            <a:extLst>
+              <a:ext uri="{FF2B5EF4-FFF2-40B4-BE49-F238E27FC236}">
+                <a16:creationId xmlns:a16="http://schemas.microsoft.com/office/drawing/2014/main" id="{6088F960-6448-3C72-B7C7-FA2F623B51B7}"/>
+              </a:ext>
+            </a:extLst>
+          </p:cNvPr>
+          <p:cNvSpPr/>
+          <p:nvPr/>
+        </p:nvSpPr>
+        <p:spPr>
+          <a:xfrm rot="16200000">
+            <a:off x="4438112" y="3277345"/>
+            <a:ext cx="455825" cy="270356"/>
+          </a:xfrm>
+          <a:prstGeom prst="downArrow">
+            <a:avLst/>
+          </a:prstGeom>
+          <a:solidFill>
+            <a:srgbClr val="FF0000"/>
+          </a:solidFill>
+          <a:ln>
+            <a:noFill/>
+          </a:ln>
+        </p:spPr>
+        <p:style>
+          <a:lnRef idx="2">
+            <a:schemeClr val="accent1">
+              <a:shade val="15000"/>
+            </a:schemeClr>
+          </a:lnRef>
+          <a:fillRef idx="1">
+            <a:schemeClr val="accent1"/>
+          </a:fillRef>
+          <a:effectRef idx="0">
+            <a:schemeClr val="accent1"/>
+          </a:effectRef>
+          <a:fontRef idx="minor">
+            <a:schemeClr val="lt1"/>
+          </a:fontRef>
+        </p:style>
+        <p:txBody>
+          <a:bodyPr rtlCol="0" anchor="ctr"/>
+          <a:lstStyle/>
+          <a:p>
+            <a:pPr algn="ctr"/>
+            <a:endParaRPr lang="en-US"/>
+          </a:p>
+        </p:txBody>
+      </p:sp>
+      <p:sp>
+        <p:nvSpPr>
+          <p:cNvPr id="3" name="箭號: 向下 2">
+            <a:extLst>
+              <a:ext uri="{FF2B5EF4-FFF2-40B4-BE49-F238E27FC236}">
+                <a16:creationId xmlns:a16="http://schemas.microsoft.com/office/drawing/2014/main" id="{7DA7D167-A9AD-C30C-DD20-85923079D253}"/>
+              </a:ext>
+            </a:extLst>
+          </p:cNvPr>
+          <p:cNvSpPr/>
+          <p:nvPr/>
+        </p:nvSpPr>
+        <p:spPr>
+          <a:xfrm rot="16200000">
+            <a:off x="8206534" y="3277344"/>
+            <a:ext cx="455825" cy="270356"/>
+          </a:xfrm>
+          <a:prstGeom prst="downArrow">
+            <a:avLst/>
+          </a:prstGeom>
+          <a:solidFill>
+            <a:srgbClr val="FF0000"/>
+          </a:solidFill>
+          <a:ln>
+            <a:noFill/>
+          </a:ln>
+        </p:spPr>
+        <p:style>
+          <a:lnRef idx="2">
+            <a:schemeClr val="accent1">
+              <a:shade val="15000"/>
+            </a:schemeClr>
+          </a:lnRef>
+          <a:fillRef idx="1">
+            <a:schemeClr val="accent1"/>
+          </a:fillRef>
+          <a:effectRef idx="0">
+            <a:schemeClr val="accent1"/>
+          </a:effectRef>
+          <a:fontRef idx="minor">
+            <a:schemeClr val="lt1"/>
+          </a:fontRef>
+        </p:style>
+        <p:txBody>
+          <a:bodyPr rtlCol="0" anchor="ctr"/>
+          <a:lstStyle/>
+          <a:p>
+            <a:pPr algn="ctr"/>
+            <a:endParaRPr lang="en-US"/>
+          </a:p>
+        </p:txBody>
+      </p:sp>
+    </p:spTree>
+    <p:extLst>
+      <p:ext uri="{BB962C8B-B14F-4D97-AF65-F5344CB8AC3E}">
+        <p14:creationId xmlns:p14="http://schemas.microsoft.com/office/powerpoint/2010/main" val="1795280776"/>
+      </p:ext>
+    </p:extLst>
+  </p:cSld>
+  <p:clrMapOvr>
+    <a:masterClrMapping/>
+  </p:clrMapOvr>
+</p:sld>
+</file>
+
+<file path=ppt/slides/slide16.xml><?xml version="1.0" encoding="utf-8"?>
+<p:sld xmlns:a="http://schemas.openxmlformats.org/drawingml/2006/main" xmlns:r="http://schemas.openxmlformats.org/officeDocument/2006/relationships" xmlns:p="http://schemas.openxmlformats.org/presentationml/2006/main">
+  <p:cSld>
+    <p:spTree>
+      <p:nvGrpSpPr>
+        <p:cNvPr id="1" name="">
+          <a:extLst>
+            <a:ext uri="{FF2B5EF4-FFF2-40B4-BE49-F238E27FC236}">
+              <a16:creationId xmlns:a16="http://schemas.microsoft.com/office/drawing/2014/main" id="{D1A6B2A9-8528-943F-B0C7-F36548D92A3B}"/>
+            </a:ext>
+          </a:extLst>
+        </p:cNvPr>
+        <p:cNvGrpSpPr/>
+        <p:nvPr/>
+      </p:nvGrpSpPr>
+      <p:grpSpPr>
+        <a:xfrm>
+          <a:off x="0" y="0"/>
+          <a:ext cx="0" cy="0"/>
+          <a:chOff x="0" y="0"/>
+          <a:chExt cx="0" cy="0"/>
+        </a:xfrm>
+      </p:grpSpPr>
+      <p:pic>
+        <p:nvPicPr>
+          <p:cNvPr id="3" name="圖片 2" descr="一張含有 文字, 螢幕擷取畫面, 網頁, 軟體 的圖片&#10;&#10;AI 產生的內容可能不正確。">
+            <a:extLst>
+              <a:ext uri="{FF2B5EF4-FFF2-40B4-BE49-F238E27FC236}">
+                <a16:creationId xmlns:a16="http://schemas.microsoft.com/office/drawing/2014/main" id="{42DCB495-A752-27E4-E01A-CA000A1E4756}"/>
+              </a:ext>
+            </a:extLst>
+          </p:cNvPr>
+          <p:cNvPicPr>
+            <a:picLocks noChangeAspect="1"/>
+          </p:cNvPicPr>
+          <p:nvPr/>
+        </p:nvPicPr>
+        <p:blipFill>
+          <a:blip r:embed="rId2">
+            <a:extLst>
+              <a:ext uri="{28A0092B-C50C-407E-A947-70E740481C1C}">
+                <a14:useLocalDpi xmlns:a14="http://schemas.microsoft.com/office/drawing/2010/main" val="0"/>
+              </a:ext>
+            </a:extLst>
+          </a:blip>
+          <a:stretch>
+            <a:fillRect/>
+          </a:stretch>
+        </p:blipFill>
+        <p:spPr>
+          <a:xfrm>
+            <a:off x="3123775" y="812800"/>
+            <a:ext cx="5944449" cy="6045200"/>
+          </a:xfrm>
+          <a:prstGeom prst="rect">
+            <a:avLst/>
+          </a:prstGeom>
+        </p:spPr>
+      </p:pic>
+      <p:sp>
+        <p:nvSpPr>
+          <p:cNvPr id="2" name="文字方塊 1">
+            <a:extLst>
+              <a:ext uri="{FF2B5EF4-FFF2-40B4-BE49-F238E27FC236}">
+                <a16:creationId xmlns:a16="http://schemas.microsoft.com/office/drawing/2014/main" id="{061FC6CD-3CD6-1B1C-1166-3620B981C510}"/>
+              </a:ext>
+            </a:extLst>
+          </p:cNvPr>
+          <p:cNvSpPr txBox="1"/>
+          <p:nvPr/>
+        </p:nvSpPr>
+        <p:spPr>
+          <a:xfrm>
+            <a:off x="3629073" y="166469"/>
+            <a:ext cx="4703019" cy="646331"/>
+          </a:xfrm>
+          <a:prstGeom prst="rect">
+            <a:avLst/>
+          </a:prstGeom>
+          <a:noFill/>
+        </p:spPr>
+        <p:txBody>
+          <a:bodyPr wrap="none" rtlCol="0">
+            <a:spAutoFit/>
+          </a:bodyPr>
+          <a:lstStyle/>
+          <a:p>
+            <a:r>
+              <a:rPr lang="zh-TW" altLang="en-US" b="1" dirty="0">
+                <a:solidFill>
+                  <a:srgbClr val="FF0000"/>
+                </a:solidFill>
+              </a:rPr>
+              <a:t>若登入後</a:t>
+            </a:r>
+            <a:r>
+              <a:rPr lang="en-US" altLang="zh-TW" b="1" dirty="0">
+                <a:solidFill>
+                  <a:srgbClr val="FF0000"/>
+                </a:solidFill>
+              </a:rPr>
+              <a:t>login failed</a:t>
+            </a:r>
+            <a:r>
+              <a:rPr lang="zh-TW" altLang="en-US" b="1" dirty="0">
+                <a:solidFill>
+                  <a:srgbClr val="FF0000"/>
+                </a:solidFill>
+              </a:rPr>
+              <a:t>，代表帳密有誤</a:t>
+            </a:r>
+            <a:endParaRPr lang="en-US" altLang="zh-TW" b="1" dirty="0">
+              <a:solidFill>
+                <a:srgbClr val="FF0000"/>
+              </a:solidFill>
+            </a:endParaRPr>
+          </a:p>
+          <a:p>
+            <a:r>
+              <a:rPr lang="zh-TW" altLang="en-US" b="1" dirty="0">
+                <a:solidFill>
+                  <a:srgbClr val="FF0000"/>
+                </a:solidFill>
+              </a:rPr>
+              <a:t>若接收驗證碼後</a:t>
+            </a:r>
+            <a:r>
+              <a:rPr lang="en-US" altLang="zh-TW" b="1" dirty="0">
+                <a:solidFill>
+                  <a:srgbClr val="FF0000"/>
+                </a:solidFill>
+              </a:rPr>
+              <a:t>login failed</a:t>
+            </a:r>
+            <a:r>
+              <a:rPr lang="zh-TW" altLang="en-US" b="1" dirty="0">
+                <a:solidFill>
+                  <a:srgbClr val="FF0000"/>
+                </a:solidFill>
+              </a:rPr>
+              <a:t>，代表申請未通過</a:t>
+            </a:r>
+            <a:endParaRPr lang="en-US" altLang="zh-TW" b="1" dirty="0">
+              <a:solidFill>
+                <a:srgbClr val="FF0000"/>
+              </a:solidFill>
+            </a:endParaRPr>
+          </a:p>
+        </p:txBody>
+      </p:sp>
+    </p:spTree>
+    <p:extLst>
+      <p:ext uri="{BB962C8B-B14F-4D97-AF65-F5344CB8AC3E}">
+        <p14:creationId xmlns:p14="http://schemas.microsoft.com/office/powerpoint/2010/main" val="322704012"/>
+      </p:ext>
+    </p:extLst>
+  </p:cSld>
+  <p:clrMapOvr>
+    <a:masterClrMapping/>
+  </p:clrMapOvr>
+</p:sld>
+</file>
+
+<file path=ppt/slides/slide17.xml><?xml version="1.0" encoding="utf-8"?>
+<p:sld xmlns:a="http://schemas.openxmlformats.org/drawingml/2006/main" xmlns:r="http://schemas.openxmlformats.org/officeDocument/2006/relationships" xmlns:p="http://schemas.openxmlformats.org/presentationml/2006/main">
+  <p:cSld>
+    <p:spTree>
+      <p:nvGrpSpPr>
+        <p:cNvPr id="1" name=""/>
+        <p:cNvGrpSpPr/>
+        <p:nvPr/>
+      </p:nvGrpSpPr>
+      <p:grpSpPr>
+        <a:xfrm>
+          <a:off x="0" y="0"/>
+          <a:ext cx="0" cy="0"/>
+          <a:chOff x="0" y="0"/>
+          <a:chExt cx="0" cy="0"/>
+        </a:xfrm>
+      </p:grpSpPr>
+      <p:sp>
+        <p:nvSpPr>
+          <p:cNvPr id="6" name="文字方塊 5">
+            <a:extLst>
+              <a:ext uri="{FF2B5EF4-FFF2-40B4-BE49-F238E27FC236}">
+                <a16:creationId xmlns:a16="http://schemas.microsoft.com/office/drawing/2014/main" id="{CF4E190D-8541-DD02-D8A0-E6AAABBB1AB1}"/>
+              </a:ext>
+            </a:extLst>
+          </p:cNvPr>
+          <p:cNvSpPr txBox="1"/>
+          <p:nvPr/>
+        </p:nvSpPr>
+        <p:spPr>
+          <a:xfrm>
+            <a:off x="1825770" y="1449049"/>
+            <a:ext cx="1824538" cy="369332"/>
+          </a:xfrm>
+          <a:prstGeom prst="rect">
+            <a:avLst/>
+          </a:prstGeom>
+          <a:noFill/>
+        </p:spPr>
+        <p:txBody>
+          <a:bodyPr wrap="none" rtlCol="0">
+            <a:spAutoFit/>
+          </a:bodyPr>
+          <a:lstStyle/>
+          <a:p>
+            <a:r>
+              <a:rPr lang="zh-TW" altLang="en-US" b="1" dirty="0">
+                <a:solidFill>
+                  <a:srgbClr val="FF0000"/>
+                </a:solidFill>
+              </a:rPr>
+              <a:t>點擊 </a:t>
+            </a:r>
+            <a:r>
+              <a:rPr lang="en-US" altLang="zh-TW" b="1" dirty="0">
+                <a:solidFill>
+                  <a:srgbClr val="FF0000"/>
+                </a:solidFill>
+              </a:rPr>
+              <a:t>“</a:t>
+            </a:r>
+            <a:r>
+              <a:rPr lang="zh-TW" altLang="en-US" b="1" dirty="0">
+                <a:solidFill>
+                  <a:srgbClr val="FF0000"/>
+                </a:solidFill>
+              </a:rPr>
+              <a:t>顯示選項</a:t>
+            </a:r>
+            <a:r>
+              <a:rPr lang="en-US" altLang="zh-TW" b="1" dirty="0">
+                <a:solidFill>
+                  <a:srgbClr val="FF0000"/>
+                </a:solidFill>
+              </a:rPr>
+              <a:t>”</a:t>
+            </a:r>
+            <a:endParaRPr lang="zh-TW" altLang="en-US" b="1" dirty="0">
+              <a:solidFill>
+                <a:srgbClr val="FF0000"/>
+              </a:solidFill>
+            </a:endParaRPr>
+          </a:p>
+        </p:txBody>
+      </p:sp>
+      <p:sp>
+        <p:nvSpPr>
+          <p:cNvPr id="7" name="文字方塊 6">
+            <a:extLst>
+              <a:ext uri="{FF2B5EF4-FFF2-40B4-BE49-F238E27FC236}">
+                <a16:creationId xmlns:a16="http://schemas.microsoft.com/office/drawing/2014/main" id="{020F7E33-75A6-3067-B0DF-31EF00A68AFC}"/>
+              </a:ext>
+            </a:extLst>
+          </p:cNvPr>
+          <p:cNvSpPr txBox="1"/>
+          <p:nvPr/>
+        </p:nvSpPr>
+        <p:spPr>
+          <a:xfrm>
+            <a:off x="6213682" y="1310405"/>
+            <a:ext cx="5258171" cy="646331"/>
+          </a:xfrm>
+          <a:prstGeom prst="rect">
+            <a:avLst/>
+          </a:prstGeom>
+          <a:noFill/>
+        </p:spPr>
+        <p:txBody>
+          <a:bodyPr wrap="none" rtlCol="0">
+            <a:spAutoFit/>
+          </a:bodyPr>
+          <a:lstStyle/>
+          <a:p>
+            <a:r>
+              <a:rPr lang="zh-TW" altLang="en-US" b="1" dirty="0">
+                <a:solidFill>
+                  <a:srgbClr val="FF0000"/>
+                </a:solidFill>
+              </a:rPr>
+              <a:t>本機資源 </a:t>
+            </a:r>
+            <a:r>
+              <a:rPr lang="en-US" altLang="zh-TW" b="1" dirty="0">
+                <a:solidFill>
+                  <a:srgbClr val="FF0000"/>
+                </a:solidFill>
+              </a:rPr>
+              <a:t>-&gt; </a:t>
+            </a:r>
+            <a:r>
+              <a:rPr lang="zh-TW" altLang="en-US" b="1" dirty="0">
+                <a:solidFill>
+                  <a:srgbClr val="FF0000"/>
+                </a:solidFill>
+              </a:rPr>
+              <a:t>音訊設定 </a:t>
+            </a:r>
+            <a:r>
+              <a:rPr lang="en-US" altLang="zh-TW" b="1" dirty="0">
+                <a:solidFill>
+                  <a:srgbClr val="FF0000"/>
+                </a:solidFill>
+              </a:rPr>
+              <a:t>-&gt; </a:t>
+            </a:r>
+            <a:br>
+              <a:rPr lang="en-US" altLang="zh-TW" b="1" dirty="0">
+                <a:solidFill>
+                  <a:srgbClr val="FF0000"/>
+                </a:solidFill>
+              </a:rPr>
+            </a:br>
+            <a:r>
+              <a:rPr lang="zh-TW" altLang="en-US" b="1" dirty="0">
+                <a:solidFill>
+                  <a:srgbClr val="FF0000"/>
+                </a:solidFill>
+              </a:rPr>
+              <a:t>確認勾選 </a:t>
+            </a:r>
+            <a:r>
+              <a:rPr lang="en-US" altLang="zh-TW" b="1" dirty="0">
+                <a:solidFill>
+                  <a:srgbClr val="FF0000"/>
+                </a:solidFill>
+              </a:rPr>
+              <a:t>“</a:t>
+            </a:r>
+            <a:r>
+              <a:rPr lang="zh-TW" altLang="en-US" b="1" dirty="0">
+                <a:solidFill>
+                  <a:srgbClr val="FF0000"/>
+                </a:solidFill>
+              </a:rPr>
+              <a:t>在這部電腦上撥放</a:t>
+            </a:r>
+            <a:r>
+              <a:rPr lang="en-US" altLang="zh-TW" b="1" dirty="0">
+                <a:solidFill>
+                  <a:srgbClr val="FF0000"/>
+                </a:solidFill>
+              </a:rPr>
+              <a:t>”</a:t>
+            </a:r>
+            <a:r>
+              <a:rPr lang="zh-TW" altLang="en-US" b="1" dirty="0">
+                <a:solidFill>
+                  <a:srgbClr val="FF0000"/>
+                </a:solidFill>
+              </a:rPr>
+              <a:t>、</a:t>
+            </a:r>
+            <a:r>
+              <a:rPr lang="en-US" altLang="zh-TW" b="1" dirty="0">
+                <a:solidFill>
+                  <a:srgbClr val="FF0000"/>
+                </a:solidFill>
+              </a:rPr>
+              <a:t>”</a:t>
+            </a:r>
+            <a:r>
+              <a:rPr lang="zh-TW" altLang="en-US" b="1" dirty="0">
+                <a:solidFill>
+                  <a:srgbClr val="FF0000"/>
+                </a:solidFill>
+              </a:rPr>
+              <a:t>從這部電腦錄製</a:t>
+            </a:r>
+            <a:r>
+              <a:rPr lang="en-US" altLang="zh-TW" b="1" dirty="0">
+                <a:solidFill>
+                  <a:srgbClr val="FF0000"/>
+                </a:solidFill>
+              </a:rPr>
+              <a:t>”</a:t>
+            </a:r>
+            <a:endParaRPr lang="zh-TW" altLang="en-US" b="1" dirty="0">
+              <a:solidFill>
+                <a:srgbClr val="FF0000"/>
+              </a:solidFill>
+            </a:endParaRPr>
+          </a:p>
+        </p:txBody>
+      </p:sp>
+      <p:pic>
+        <p:nvPicPr>
+          <p:cNvPr id="9" name="圖片 8">
+            <a:extLst>
+              <a:ext uri="{FF2B5EF4-FFF2-40B4-BE49-F238E27FC236}">
+                <a16:creationId xmlns:a16="http://schemas.microsoft.com/office/drawing/2014/main" id="{8756C0E8-EB64-25EB-3079-BBF544005A29}"/>
+              </a:ext>
+            </a:extLst>
+          </p:cNvPr>
+          <p:cNvPicPr>
+            <a:picLocks noChangeAspect="1"/>
+          </p:cNvPicPr>
+          <p:nvPr/>
+        </p:nvPicPr>
+        <p:blipFill>
+          <a:blip r:embed="rId2"/>
+          <a:stretch>
+            <a:fillRect/>
+          </a:stretch>
+        </p:blipFill>
+        <p:spPr>
+          <a:xfrm>
+            <a:off x="418098" y="2109603"/>
+            <a:ext cx="4458322" cy="2638793"/>
+          </a:xfrm>
+          <a:prstGeom prst="rect">
+            <a:avLst/>
+          </a:prstGeom>
+        </p:spPr>
+      </p:pic>
+      <p:pic>
+        <p:nvPicPr>
+          <p:cNvPr id="13" name="圖片 12">
+            <a:extLst>
+              <a:ext uri="{FF2B5EF4-FFF2-40B4-BE49-F238E27FC236}">
+                <a16:creationId xmlns:a16="http://schemas.microsoft.com/office/drawing/2014/main" id="{4E87620C-7F3B-F7CC-B79A-488F8A60DE8E}"/>
+              </a:ext>
+            </a:extLst>
+          </p:cNvPr>
+          <p:cNvPicPr>
+            <a:picLocks noChangeAspect="1"/>
+          </p:cNvPicPr>
+          <p:nvPr/>
+        </p:nvPicPr>
+        <p:blipFill>
+          <a:blip r:embed="rId3"/>
+          <a:stretch>
+            <a:fillRect/>
+          </a:stretch>
+        </p:blipFill>
+        <p:spPr>
+          <a:xfrm>
+            <a:off x="8536632" y="2109603"/>
+            <a:ext cx="3593222" cy="2925798"/>
+          </a:xfrm>
+          <a:prstGeom prst="rect">
+            <a:avLst/>
+          </a:prstGeom>
+        </p:spPr>
+      </p:pic>
+      <p:pic>
+        <p:nvPicPr>
+          <p:cNvPr id="15" name="圖片 14">
+            <a:extLst>
+              <a:ext uri="{FF2B5EF4-FFF2-40B4-BE49-F238E27FC236}">
+                <a16:creationId xmlns:a16="http://schemas.microsoft.com/office/drawing/2014/main" id="{BA968835-8D83-B2F4-ED72-25606153ED2A}"/>
+              </a:ext>
+            </a:extLst>
+          </p:cNvPr>
+          <p:cNvPicPr>
+            <a:picLocks noChangeAspect="1"/>
+          </p:cNvPicPr>
+          <p:nvPr/>
+        </p:nvPicPr>
+        <p:blipFill>
+          <a:blip r:embed="rId4"/>
+          <a:stretch>
+            <a:fillRect/>
+          </a:stretch>
+        </p:blipFill>
+        <p:spPr>
+          <a:xfrm>
+            <a:off x="5390333" y="2109603"/>
+            <a:ext cx="3070088" cy="3664299"/>
+          </a:xfrm>
+          <a:prstGeom prst="rect">
+            <a:avLst/>
+          </a:prstGeom>
+        </p:spPr>
+      </p:pic>
+      <p:sp>
+        <p:nvSpPr>
+          <p:cNvPr id="2" name="文字方塊 1">
+            <a:extLst>
+              <a:ext uri="{FF2B5EF4-FFF2-40B4-BE49-F238E27FC236}">
+                <a16:creationId xmlns:a16="http://schemas.microsoft.com/office/drawing/2014/main" id="{1D9A1ED7-6440-D216-C1EB-A69974DDB741}"/>
+              </a:ext>
+            </a:extLst>
+          </p:cNvPr>
+          <p:cNvSpPr txBox="1"/>
+          <p:nvPr/>
+        </p:nvSpPr>
+        <p:spPr>
+          <a:xfrm>
+            <a:off x="4208303" y="265685"/>
+            <a:ext cx="4155305" cy="738664"/>
+          </a:xfrm>
+          <a:prstGeom prst="rect">
+            <a:avLst/>
+          </a:prstGeom>
+          <a:noFill/>
+        </p:spPr>
+        <p:txBody>
+          <a:bodyPr wrap="none" rtlCol="0">
+            <a:spAutoFit/>
+          </a:bodyPr>
+          <a:lstStyle/>
+          <a:p>
+            <a:r>
+              <a:rPr lang="zh-TW" altLang="en-US" sz="2800" dirty="0">
+                <a:latin typeface="微軟正黑體" panose="020B0604030504040204" pitchFamily="34" charset="-120"/>
+                <a:ea typeface="微軟正黑體" panose="020B0604030504040204" pitchFamily="34" charset="-120"/>
+              </a:rPr>
+              <a:t>此設定步驟似乎可略過 </a:t>
+            </a:r>
+            <a:r>
+              <a:rPr lang="en-US" altLang="zh-TW" sz="2800" dirty="0">
+                <a:latin typeface="微軟正黑體" panose="020B0604030504040204" pitchFamily="34" charset="-120"/>
+                <a:ea typeface="微軟正黑體" panose="020B0604030504040204" pitchFamily="34" charset="-120"/>
+              </a:rPr>
+              <a:t>(?</a:t>
+            </a:r>
+            <a:endParaRPr lang="en-US" altLang="zh-TW" sz="2800" dirty="0">
+              <a:solidFill>
+                <a:schemeClr val="tx1">
+                  <a:lumMod val="65000"/>
+                  <a:lumOff val="35000"/>
+                </a:schemeClr>
+              </a:solidFill>
+              <a:latin typeface="微軟正黑體" panose="020B0604030504040204" pitchFamily="34" charset="-120"/>
+              <a:ea typeface="微軟正黑體" panose="020B0604030504040204" pitchFamily="34" charset="-120"/>
+            </a:endParaRPr>
+          </a:p>
+          <a:p>
+            <a:r>
+              <a:rPr lang="zh-TW" altLang="en-US" sz="1400" dirty="0">
+                <a:solidFill>
+                  <a:schemeClr val="tx1">
+                    <a:lumMod val="65000"/>
+                    <a:lumOff val="35000"/>
+                  </a:schemeClr>
+                </a:solidFill>
+                <a:latin typeface="微軟正黑體" panose="020B0604030504040204" pitchFamily="34" charset="-120"/>
+                <a:ea typeface="微軟正黑體" panose="020B0604030504040204" pitchFamily="34" charset="-120"/>
+              </a:rPr>
+              <a:t>教學手冊說要做，但沒設定好像也能連線</a:t>
+            </a:r>
+            <a:endParaRPr lang="en-US" altLang="zh-TW" sz="1400" dirty="0">
+              <a:solidFill>
+                <a:schemeClr val="tx1">
+                  <a:lumMod val="65000"/>
+                  <a:lumOff val="35000"/>
+                </a:schemeClr>
+              </a:solidFill>
+              <a:latin typeface="微軟正黑體" panose="020B0604030504040204" pitchFamily="34" charset="-120"/>
+              <a:ea typeface="微軟正黑體" panose="020B0604030504040204" pitchFamily="34" charset="-120"/>
+            </a:endParaRPr>
+          </a:p>
+        </p:txBody>
+      </p:sp>
+      <p:sp>
+        <p:nvSpPr>
+          <p:cNvPr id="3" name="箭號: 向下 2">
+            <a:extLst>
+              <a:ext uri="{FF2B5EF4-FFF2-40B4-BE49-F238E27FC236}">
+                <a16:creationId xmlns:a16="http://schemas.microsoft.com/office/drawing/2014/main" id="{A2CE3358-FFA1-BB56-DB5D-62CE123CF7E9}"/>
+              </a:ext>
+            </a:extLst>
+          </p:cNvPr>
+          <p:cNvSpPr/>
+          <p:nvPr/>
+        </p:nvSpPr>
+        <p:spPr>
+          <a:xfrm rot="16200000">
+            <a:off x="4905464" y="3293821"/>
+            <a:ext cx="455825" cy="270356"/>
+          </a:xfrm>
+          <a:prstGeom prst="downArrow">
+            <a:avLst/>
+          </a:prstGeom>
+          <a:solidFill>
+            <a:srgbClr val="FF0000"/>
+          </a:solidFill>
+          <a:ln>
+            <a:noFill/>
+          </a:ln>
+        </p:spPr>
+        <p:style>
+          <a:lnRef idx="2">
+            <a:schemeClr val="accent1">
+              <a:shade val="15000"/>
+            </a:schemeClr>
+          </a:lnRef>
+          <a:fillRef idx="1">
+            <a:schemeClr val="accent1"/>
+          </a:fillRef>
+          <a:effectRef idx="0">
+            <a:schemeClr val="accent1"/>
+          </a:effectRef>
+          <a:fontRef idx="minor">
+            <a:schemeClr val="lt1"/>
+          </a:fontRef>
+        </p:style>
+        <p:txBody>
+          <a:bodyPr rtlCol="0" anchor="ctr"/>
+          <a:lstStyle/>
+          <a:p>
+            <a:pPr algn="ctr"/>
+            <a:endParaRPr lang="en-US"/>
+          </a:p>
+        </p:txBody>
+      </p:sp>
+    </p:spTree>
+    <p:extLst>
+      <p:ext uri="{BB962C8B-B14F-4D97-AF65-F5344CB8AC3E}">
+        <p14:creationId xmlns:p14="http://schemas.microsoft.com/office/powerpoint/2010/main" val="3152413103"/>
+      </p:ext>
+    </p:extLst>
+  </p:cSld>
+  <p:clrMapOvr>
+    <a:masterClrMapping/>
+  </p:clrMapOvr>
+</p:sld>
+</file>
+
+<file path=ppt/slides/slide18.xml><?xml version="1.0" encoding="utf-8"?>
+<p:sld xmlns:a="http://schemas.openxmlformats.org/drawingml/2006/main" xmlns:r="http://schemas.openxmlformats.org/officeDocument/2006/relationships" xmlns:p="http://schemas.openxmlformats.org/presentationml/2006/main">
+  <p:cSld>
+    <p:spTree>
+      <p:nvGrpSpPr>
+        <p:cNvPr id="1" name=""/>
+        <p:cNvGrpSpPr/>
+        <p:nvPr/>
+      </p:nvGrpSpPr>
+      <p:grpSpPr>
+        <a:xfrm>
+          <a:off x="0" y="0"/>
+          <a:ext cx="0" cy="0"/>
+          <a:chOff x="0" y="0"/>
+          <a:chExt cx="0" cy="0"/>
+        </a:xfrm>
+      </p:grpSpPr>
+      <p:pic>
+        <p:nvPicPr>
+          <p:cNvPr id="3" name="圖片 2">
+            <a:extLst>
+              <a:ext uri="{FF2B5EF4-FFF2-40B4-BE49-F238E27FC236}">
+                <a16:creationId xmlns:a16="http://schemas.microsoft.com/office/drawing/2014/main" id="{57BEF5B7-5AE1-30D5-B76C-1D4358AF5E21}"/>
+              </a:ext>
+            </a:extLst>
+          </p:cNvPr>
+          <p:cNvPicPr>
+            <a:picLocks noChangeAspect="1"/>
+          </p:cNvPicPr>
+          <p:nvPr/>
+        </p:nvPicPr>
+        <p:blipFill>
+          <a:blip r:embed="rId2"/>
+          <a:stretch>
+            <a:fillRect/>
+          </a:stretch>
+        </p:blipFill>
+        <p:spPr>
+          <a:xfrm>
+            <a:off x="6629294" y="2085787"/>
+            <a:ext cx="4305901" cy="3915321"/>
+          </a:xfrm>
+          <a:prstGeom prst="rect">
+            <a:avLst/>
+          </a:prstGeom>
+        </p:spPr>
+      </p:pic>
+      <p:sp>
+        <p:nvSpPr>
+          <p:cNvPr id="4" name="文字方塊 3">
+            <a:extLst>
+              <a:ext uri="{FF2B5EF4-FFF2-40B4-BE49-F238E27FC236}">
+                <a16:creationId xmlns:a16="http://schemas.microsoft.com/office/drawing/2014/main" id="{47A4EC0C-54E9-4E65-F153-CCE2236A1C29}"/>
+              </a:ext>
+            </a:extLst>
+          </p:cNvPr>
+          <p:cNvSpPr txBox="1"/>
+          <p:nvPr/>
+        </p:nvSpPr>
+        <p:spPr>
+          <a:xfrm>
+            <a:off x="2488962" y="1606243"/>
+            <a:ext cx="1994007" cy="369332"/>
+          </a:xfrm>
+          <a:prstGeom prst="rect">
+            <a:avLst/>
+          </a:prstGeom>
+          <a:noFill/>
+        </p:spPr>
+        <p:txBody>
+          <a:bodyPr wrap="none" rtlCol="0">
+            <a:spAutoFit/>
+          </a:bodyPr>
+          <a:lstStyle/>
+          <a:p>
+            <a:r>
+              <a:rPr lang="zh-TW" altLang="en-US" b="1" dirty="0">
+                <a:solidFill>
+                  <a:srgbClr val="FF0000"/>
+                </a:solidFill>
+              </a:rPr>
+              <a:t>連線 </a:t>
+            </a:r>
+            <a:r>
+              <a:rPr lang="en-US" altLang="zh-TW" b="1" dirty="0">
+                <a:solidFill>
+                  <a:srgbClr val="FF0000"/>
+                </a:solidFill>
+              </a:rPr>
+              <a:t>“NTHCTERM”</a:t>
+            </a:r>
+            <a:endParaRPr lang="zh-TW" altLang="en-US" b="1" dirty="0">
+              <a:solidFill>
+                <a:srgbClr val="FF0000"/>
+              </a:solidFill>
+            </a:endParaRPr>
+          </a:p>
+        </p:txBody>
+      </p:sp>
+      <p:pic>
+        <p:nvPicPr>
+          <p:cNvPr id="6" name="圖片 5">
+            <a:extLst>
+              <a:ext uri="{FF2B5EF4-FFF2-40B4-BE49-F238E27FC236}">
+                <a16:creationId xmlns:a16="http://schemas.microsoft.com/office/drawing/2014/main" id="{21DEA886-28F2-FE93-AA9E-E48414B2392D}"/>
+              </a:ext>
+            </a:extLst>
+          </p:cNvPr>
+          <p:cNvPicPr>
+            <a:picLocks noChangeAspect="1"/>
+          </p:cNvPicPr>
+          <p:nvPr/>
+        </p:nvPicPr>
+        <p:blipFill>
+          <a:blip r:embed="rId3"/>
+          <a:stretch>
+            <a:fillRect/>
+          </a:stretch>
+        </p:blipFill>
+        <p:spPr>
+          <a:xfrm>
+            <a:off x="1256805" y="2085787"/>
+            <a:ext cx="4458322" cy="2686425"/>
+          </a:xfrm>
+          <a:prstGeom prst="rect">
+            <a:avLst/>
+          </a:prstGeom>
+        </p:spPr>
+      </p:pic>
+      <p:sp>
+        <p:nvSpPr>
+          <p:cNvPr id="7" name="文字方塊 6">
+            <a:extLst>
+              <a:ext uri="{FF2B5EF4-FFF2-40B4-BE49-F238E27FC236}">
+                <a16:creationId xmlns:a16="http://schemas.microsoft.com/office/drawing/2014/main" id="{71F2A970-601E-083F-BFAD-243E6CFFE1D3}"/>
+              </a:ext>
+            </a:extLst>
+          </p:cNvPr>
+          <p:cNvSpPr txBox="1"/>
+          <p:nvPr/>
+        </p:nvSpPr>
+        <p:spPr>
+          <a:xfrm>
+            <a:off x="8357103" y="1606243"/>
+            <a:ext cx="1107996" cy="369332"/>
+          </a:xfrm>
+          <a:prstGeom prst="rect">
+            <a:avLst/>
+          </a:prstGeom>
+          <a:noFill/>
+        </p:spPr>
+        <p:txBody>
+          <a:bodyPr wrap="none" rtlCol="0">
+            <a:spAutoFit/>
+          </a:bodyPr>
+          <a:lstStyle/>
+          <a:p>
+            <a:r>
+              <a:rPr lang="zh-TW" altLang="en-US" b="1" dirty="0">
+                <a:solidFill>
+                  <a:srgbClr val="FF0000"/>
+                </a:solidFill>
+              </a:rPr>
+              <a:t>公司帳密</a:t>
+            </a:r>
+          </a:p>
+        </p:txBody>
+      </p:sp>
+    </p:spTree>
+    <p:extLst>
+      <p:ext uri="{BB962C8B-B14F-4D97-AF65-F5344CB8AC3E}">
+        <p14:creationId xmlns:p14="http://schemas.microsoft.com/office/powerpoint/2010/main" val="1813945076"/>
+      </p:ext>
+    </p:extLst>
+  </p:cSld>
+  <p:clrMapOvr>
+    <a:masterClrMapping/>
+  </p:clrMapOvr>
+</p:sld>
+</file>
+
+<file path=ppt/slides/slide19.xml><?xml version="1.0" encoding="utf-8"?>
+<p:sld xmlns:a="http://schemas.openxmlformats.org/drawingml/2006/main" xmlns:r="http://schemas.openxmlformats.org/officeDocument/2006/relationships" xmlns:p="http://schemas.openxmlformats.org/presentationml/2006/main">
+  <p:cSld>
+    <p:spTree>
+      <p:nvGrpSpPr>
+        <p:cNvPr id="1" name=""/>
+        <p:cNvGrpSpPr/>
+        <p:nvPr/>
+      </p:nvGrpSpPr>
+      <p:grpSpPr>
+        <a:xfrm>
+          <a:off x="0" y="0"/>
+          <a:ext cx="0" cy="0"/>
+          <a:chOff x="0" y="0"/>
+          <a:chExt cx="0" cy="0"/>
+        </a:xfrm>
+      </p:grpSpPr>
+      <p:pic>
+        <p:nvPicPr>
           <p:cNvPr id="5" name="圖片 4">
             <a:extLst>
               <a:ext uri="{FF2B5EF4-FFF2-40B4-BE49-F238E27FC236}">
@@ -4837,7 +5935,631 @@
 </p:sld>
 </file>
 
-<file path=ppt/slides/slide15.xml><?xml version="1.0" encoding="utf-8"?>
+<file path=ppt/slides/slide2.xml><?xml version="1.0" encoding="utf-8"?>
+<p:sld xmlns:a="http://schemas.openxmlformats.org/drawingml/2006/main" xmlns:r="http://schemas.openxmlformats.org/officeDocument/2006/relationships" xmlns:p="http://schemas.openxmlformats.org/presentationml/2006/main">
+  <p:cSld>
+    <p:spTree>
+      <p:nvGrpSpPr>
+        <p:cNvPr id="1" name=""/>
+        <p:cNvGrpSpPr/>
+        <p:nvPr/>
+      </p:nvGrpSpPr>
+      <p:grpSpPr>
+        <a:xfrm>
+          <a:off x="0" y="0"/>
+          <a:ext cx="0" cy="0"/>
+          <a:chOff x="0" y="0"/>
+          <a:chExt cx="0" cy="0"/>
+        </a:xfrm>
+      </p:grpSpPr>
+      <p:grpSp>
+        <p:nvGrpSpPr>
+          <p:cNvPr id="9" name="群組 8">
+            <a:extLst>
+              <a:ext uri="{FF2B5EF4-FFF2-40B4-BE49-F238E27FC236}">
+                <a16:creationId xmlns:a16="http://schemas.microsoft.com/office/drawing/2014/main" id="{120371D0-4B67-6051-BCF4-1C4FD7159F2D}"/>
+              </a:ext>
+            </a:extLst>
+          </p:cNvPr>
+          <p:cNvGrpSpPr/>
+          <p:nvPr/>
+        </p:nvGrpSpPr>
+        <p:grpSpPr>
+          <a:xfrm>
+            <a:off x="2584018" y="656610"/>
+            <a:ext cx="7023964" cy="4511218"/>
+            <a:chOff x="2073854" y="653927"/>
+            <a:chExt cx="8044291" cy="5166534"/>
+          </a:xfrm>
+        </p:grpSpPr>
+        <p:pic>
+          <p:nvPicPr>
+            <p:cNvPr id="10" name="圖片 9" descr="一張含有 文字, 螢幕擷取畫面, 數字, 字型 的圖片&#10;&#10;AI 產生的內容可能不正確。">
+              <a:extLst>
+                <a:ext uri="{FF2B5EF4-FFF2-40B4-BE49-F238E27FC236}">
+                  <a16:creationId xmlns:a16="http://schemas.microsoft.com/office/drawing/2014/main" id="{C40F0CA6-60F8-B5ED-634D-1B7DCA0E17C5}"/>
+                </a:ext>
+              </a:extLst>
+            </p:cNvPr>
+            <p:cNvPicPr>
+              <a:picLocks noChangeAspect="1"/>
+            </p:cNvPicPr>
+            <p:nvPr/>
+          </p:nvPicPr>
+          <p:blipFill>
+            <a:blip r:embed="rId2">
+              <a:extLst>
+                <a:ext uri="{28A0092B-C50C-407E-A947-70E740481C1C}">
+                  <a14:useLocalDpi xmlns:a14="http://schemas.microsoft.com/office/drawing/2010/main" val="0"/>
+                </a:ext>
+              </a:extLst>
+            </a:blip>
+            <a:stretch>
+              <a:fillRect/>
+            </a:stretch>
+          </p:blipFill>
+          <p:spPr>
+            <a:xfrm>
+              <a:off x="2073855" y="653927"/>
+              <a:ext cx="8044290" cy="3899269"/>
+            </a:xfrm>
+            <a:prstGeom prst="rect">
+              <a:avLst/>
+            </a:prstGeom>
+          </p:spPr>
+        </p:pic>
+        <p:pic>
+          <p:nvPicPr>
+            <p:cNvPr id="11" name="圖片 10" descr="一張含有 文字, 字型, 螢幕擷取畫面 的圖片&#10;&#10;AI 產生的內容可能不正確。">
+              <a:extLst>
+                <a:ext uri="{FF2B5EF4-FFF2-40B4-BE49-F238E27FC236}">
+                  <a16:creationId xmlns:a16="http://schemas.microsoft.com/office/drawing/2014/main" id="{B744740C-B79A-D7CB-56E1-6CCCFFD99406}"/>
+                </a:ext>
+              </a:extLst>
+            </p:cNvPr>
+            <p:cNvPicPr>
+              <a:picLocks noChangeAspect="1"/>
+            </p:cNvPicPr>
+            <p:nvPr/>
+          </p:nvPicPr>
+          <p:blipFill>
+            <a:blip r:embed="rId3">
+              <a:extLst>
+                <a:ext uri="{28A0092B-C50C-407E-A947-70E740481C1C}">
+                  <a14:useLocalDpi xmlns:a14="http://schemas.microsoft.com/office/drawing/2010/main" val="0"/>
+                </a:ext>
+              </a:extLst>
+            </a:blip>
+            <a:stretch>
+              <a:fillRect/>
+            </a:stretch>
+          </p:blipFill>
+          <p:spPr>
+            <a:xfrm>
+              <a:off x="2073854" y="4661121"/>
+              <a:ext cx="8044290" cy="1159340"/>
+            </a:xfrm>
+            <a:prstGeom prst="rect">
+              <a:avLst/>
+            </a:prstGeom>
+          </p:spPr>
+        </p:pic>
+      </p:grpSp>
+      <p:sp>
+        <p:nvSpPr>
+          <p:cNvPr id="5" name="文字方塊 4">
+            <a:extLst>
+              <a:ext uri="{FF2B5EF4-FFF2-40B4-BE49-F238E27FC236}">
+                <a16:creationId xmlns:a16="http://schemas.microsoft.com/office/drawing/2014/main" id="{D9A38466-C785-BC51-E489-49EFC40A135F}"/>
+              </a:ext>
+            </a:extLst>
+          </p:cNvPr>
+          <p:cNvSpPr txBox="1"/>
+          <p:nvPr/>
+        </p:nvSpPr>
+        <p:spPr>
+          <a:xfrm>
+            <a:off x="130478" y="38719"/>
+            <a:ext cx="11959922" cy="523220"/>
+          </a:xfrm>
+          <a:prstGeom prst="rect">
+            <a:avLst/>
+          </a:prstGeom>
+          <a:noFill/>
+          <a:ln w="38100">
+            <a:solidFill>
+              <a:srgbClr val="FF0000"/>
+            </a:solidFill>
+          </a:ln>
+        </p:spPr>
+        <p:txBody>
+          <a:bodyPr wrap="square">
+            <a:spAutoFit/>
+          </a:bodyPr>
+          <a:lstStyle/>
+          <a:p>
+            <a:pPr algn="ctr"/>
+            <a:r>
+              <a:rPr lang="en-US" sz="2800" dirty="0"/>
+              <a:t>https://a00a.atlassian.net/wiki/spaces/NTCITH/pages/132448907/VPN</a:t>
+            </a:r>
+          </a:p>
+        </p:txBody>
+      </p:sp>
+      <p:sp>
+        <p:nvSpPr>
+          <p:cNvPr id="8" name="矩形 7">
+            <a:extLst>
+              <a:ext uri="{FF2B5EF4-FFF2-40B4-BE49-F238E27FC236}">
+                <a16:creationId xmlns:a16="http://schemas.microsoft.com/office/drawing/2014/main" id="{F613EB6B-C2B2-E5D0-0012-80F235F1D720}"/>
+              </a:ext>
+            </a:extLst>
+          </p:cNvPr>
+          <p:cNvSpPr/>
+          <p:nvPr/>
+        </p:nvSpPr>
+        <p:spPr>
+          <a:xfrm>
+            <a:off x="6110439" y="1431636"/>
+            <a:ext cx="1056980" cy="157019"/>
+          </a:xfrm>
+          <a:prstGeom prst="rect">
+            <a:avLst/>
+          </a:prstGeom>
+          <a:noFill/>
+          <a:ln w="38100">
+            <a:solidFill>
+              <a:srgbClr val="FF0000"/>
+            </a:solidFill>
+          </a:ln>
+        </p:spPr>
+        <p:style>
+          <a:lnRef idx="2">
+            <a:schemeClr val="accent1">
+              <a:shade val="15000"/>
+            </a:schemeClr>
+          </a:lnRef>
+          <a:fillRef idx="1">
+            <a:schemeClr val="accent1"/>
+          </a:fillRef>
+          <a:effectRef idx="0">
+            <a:schemeClr val="accent1"/>
+          </a:effectRef>
+          <a:fontRef idx="minor">
+            <a:schemeClr val="lt1"/>
+          </a:fontRef>
+        </p:style>
+        <p:txBody>
+          <a:bodyPr rtlCol="0" anchor="ctr"/>
+          <a:lstStyle/>
+          <a:p>
+            <a:pPr algn="ctr"/>
+            <a:endParaRPr lang="en-US">
+              <a:ln>
+                <a:solidFill>
+                  <a:srgbClr val="FF0000"/>
+                </a:solidFill>
+              </a:ln>
+            </a:endParaRPr>
+          </a:p>
+        </p:txBody>
+      </p:sp>
+      <p:pic>
+        <p:nvPicPr>
+          <p:cNvPr id="12" name="圖片 11" descr="一張含有 文字, 螢幕擷取畫面, 字型 的圖片&#10;&#10;AI 產生的內容可能不正確。">
+            <a:extLst>
+              <a:ext uri="{FF2B5EF4-FFF2-40B4-BE49-F238E27FC236}">
+                <a16:creationId xmlns:a16="http://schemas.microsoft.com/office/drawing/2014/main" id="{1B53FCC2-6AD4-7C61-CE60-91B76D8D7427}"/>
+              </a:ext>
+            </a:extLst>
+          </p:cNvPr>
+          <p:cNvPicPr>
+            <a:picLocks noChangeAspect="1"/>
+          </p:cNvPicPr>
+          <p:nvPr/>
+        </p:nvPicPr>
+        <p:blipFill>
+          <a:blip r:embed="rId4">
+            <a:extLst>
+              <a:ext uri="{28A0092B-C50C-407E-A947-70E740481C1C}">
+                <a14:useLocalDpi xmlns:a14="http://schemas.microsoft.com/office/drawing/2010/main" val="0"/>
+              </a:ext>
+            </a:extLst>
+          </a:blip>
+          <a:stretch>
+            <a:fillRect/>
+          </a:stretch>
+        </p:blipFill>
+        <p:spPr>
+          <a:xfrm>
+            <a:off x="5093883" y="5398202"/>
+            <a:ext cx="2004231" cy="1421079"/>
+          </a:xfrm>
+          <a:prstGeom prst="rect">
+            <a:avLst/>
+          </a:prstGeom>
+        </p:spPr>
+      </p:pic>
+      <p:sp>
+        <p:nvSpPr>
+          <p:cNvPr id="14" name="箭號: 向右 13">
+            <a:extLst>
+              <a:ext uri="{FF2B5EF4-FFF2-40B4-BE49-F238E27FC236}">
+                <a16:creationId xmlns:a16="http://schemas.microsoft.com/office/drawing/2014/main" id="{0D09C369-C42C-9791-EB11-15598BFBFA06}"/>
+              </a:ext>
+            </a:extLst>
+          </p:cNvPr>
+          <p:cNvSpPr/>
+          <p:nvPr/>
+        </p:nvSpPr>
+        <p:spPr>
+          <a:xfrm>
+            <a:off x="4707005" y="5651306"/>
+            <a:ext cx="386878" cy="323272"/>
+          </a:xfrm>
+          <a:prstGeom prst="rightArrow">
+            <a:avLst/>
+          </a:prstGeom>
+          <a:solidFill>
+            <a:srgbClr val="FF0000"/>
+          </a:solidFill>
+          <a:ln>
+            <a:noFill/>
+          </a:ln>
+        </p:spPr>
+        <p:style>
+          <a:lnRef idx="2">
+            <a:schemeClr val="accent1">
+              <a:shade val="15000"/>
+            </a:schemeClr>
+          </a:lnRef>
+          <a:fillRef idx="1">
+            <a:schemeClr val="accent1"/>
+          </a:fillRef>
+          <a:effectRef idx="0">
+            <a:schemeClr val="accent1"/>
+          </a:effectRef>
+          <a:fontRef idx="minor">
+            <a:schemeClr val="lt1"/>
+          </a:fontRef>
+        </p:style>
+        <p:txBody>
+          <a:bodyPr rtlCol="0" anchor="ctr"/>
+          <a:lstStyle/>
+          <a:p>
+            <a:pPr algn="ctr"/>
+            <a:endParaRPr lang="en-US"/>
+          </a:p>
+        </p:txBody>
+      </p:sp>
+      <p:sp>
+        <p:nvSpPr>
+          <p:cNvPr id="15" name="箭號: 向右 14">
+            <a:extLst>
+              <a:ext uri="{FF2B5EF4-FFF2-40B4-BE49-F238E27FC236}">
+                <a16:creationId xmlns:a16="http://schemas.microsoft.com/office/drawing/2014/main" id="{DB99211E-7E98-6D1B-5EC1-B52C38D87ABC}"/>
+              </a:ext>
+            </a:extLst>
+          </p:cNvPr>
+          <p:cNvSpPr/>
+          <p:nvPr/>
+        </p:nvSpPr>
+        <p:spPr>
+          <a:xfrm>
+            <a:off x="4707005" y="6449068"/>
+            <a:ext cx="386878" cy="323272"/>
+          </a:xfrm>
+          <a:prstGeom prst="rightArrow">
+            <a:avLst/>
+          </a:prstGeom>
+          <a:solidFill>
+            <a:srgbClr val="FF0000"/>
+          </a:solidFill>
+          <a:ln>
+            <a:noFill/>
+          </a:ln>
+        </p:spPr>
+        <p:style>
+          <a:lnRef idx="2">
+            <a:schemeClr val="accent1">
+              <a:shade val="15000"/>
+            </a:schemeClr>
+          </a:lnRef>
+          <a:fillRef idx="1">
+            <a:schemeClr val="accent1"/>
+          </a:fillRef>
+          <a:effectRef idx="0">
+            <a:schemeClr val="accent1"/>
+          </a:effectRef>
+          <a:fontRef idx="minor">
+            <a:schemeClr val="lt1"/>
+          </a:fontRef>
+        </p:style>
+        <p:txBody>
+          <a:bodyPr rtlCol="0" anchor="ctr"/>
+          <a:lstStyle/>
+          <a:p>
+            <a:pPr algn="ctr"/>
+            <a:endParaRPr lang="en-US"/>
+          </a:p>
+        </p:txBody>
+      </p:sp>
+      <p:sp>
+        <p:nvSpPr>
+          <p:cNvPr id="16" name="文字方塊 15">
+            <a:extLst>
+              <a:ext uri="{FF2B5EF4-FFF2-40B4-BE49-F238E27FC236}">
+                <a16:creationId xmlns:a16="http://schemas.microsoft.com/office/drawing/2014/main" id="{1FEE7F85-9E75-5AD6-4C39-1756A52A3722}"/>
+              </a:ext>
+            </a:extLst>
+          </p:cNvPr>
+          <p:cNvSpPr txBox="1"/>
+          <p:nvPr/>
+        </p:nvSpPr>
+        <p:spPr>
+          <a:xfrm>
+            <a:off x="3188256" y="5623782"/>
+            <a:ext cx="1519968" cy="369332"/>
+          </a:xfrm>
+          <a:prstGeom prst="rect">
+            <a:avLst/>
+          </a:prstGeom>
+          <a:noFill/>
+        </p:spPr>
+        <p:txBody>
+          <a:bodyPr wrap="none" rtlCol="0">
+            <a:spAutoFit/>
+          </a:bodyPr>
+          <a:lstStyle/>
+          <a:p>
+            <a:r>
+              <a:rPr lang="en-US" altLang="zh-TW" b="1" dirty="0">
+                <a:solidFill>
+                  <a:srgbClr val="FF0000"/>
+                </a:solidFill>
+              </a:rPr>
+              <a:t>VPN</a:t>
+            </a:r>
+            <a:r>
+              <a:rPr lang="zh-TW" altLang="en-US" b="1" dirty="0">
+                <a:solidFill>
+                  <a:srgbClr val="FF0000"/>
+                </a:solidFill>
+              </a:rPr>
+              <a:t>下載教學</a:t>
+            </a:r>
+          </a:p>
+        </p:txBody>
+      </p:sp>
+      <p:sp>
+        <p:nvSpPr>
+          <p:cNvPr id="17" name="文字方塊 16">
+            <a:extLst>
+              <a:ext uri="{FF2B5EF4-FFF2-40B4-BE49-F238E27FC236}">
+                <a16:creationId xmlns:a16="http://schemas.microsoft.com/office/drawing/2014/main" id="{4C23EC02-8C84-EAB2-63B9-84EDE8456FD0}"/>
+              </a:ext>
+            </a:extLst>
+          </p:cNvPr>
+          <p:cNvSpPr txBox="1"/>
+          <p:nvPr/>
+        </p:nvSpPr>
+        <p:spPr>
+          <a:xfrm>
+            <a:off x="3636949" y="6426038"/>
+            <a:ext cx="1058303" cy="369332"/>
+          </a:xfrm>
+          <a:prstGeom prst="rect">
+            <a:avLst/>
+          </a:prstGeom>
+          <a:noFill/>
+        </p:spPr>
+        <p:txBody>
+          <a:bodyPr wrap="none" rtlCol="0">
+            <a:spAutoFit/>
+          </a:bodyPr>
+          <a:lstStyle/>
+          <a:p>
+            <a:r>
+              <a:rPr lang="en-US" altLang="zh-TW" b="1" dirty="0">
+                <a:solidFill>
+                  <a:srgbClr val="FF0000"/>
+                </a:solidFill>
+              </a:rPr>
+              <a:t>VPN</a:t>
+            </a:r>
+            <a:r>
+              <a:rPr lang="zh-TW" altLang="en-US" b="1" dirty="0">
+                <a:solidFill>
+                  <a:srgbClr val="FF0000"/>
+                </a:solidFill>
+              </a:rPr>
+              <a:t>下載</a:t>
+            </a:r>
+          </a:p>
+        </p:txBody>
+      </p:sp>
+      <p:sp>
+        <p:nvSpPr>
+          <p:cNvPr id="4" name="箭號: 向下 3">
+            <a:extLst>
+              <a:ext uri="{FF2B5EF4-FFF2-40B4-BE49-F238E27FC236}">
+                <a16:creationId xmlns:a16="http://schemas.microsoft.com/office/drawing/2014/main" id="{DA440939-685C-D96B-BB59-4DAB2C46D34C}"/>
+              </a:ext>
+            </a:extLst>
+          </p:cNvPr>
+          <p:cNvSpPr/>
+          <p:nvPr/>
+        </p:nvSpPr>
+        <p:spPr>
+          <a:xfrm>
+            <a:off x="5868085" y="5137204"/>
+            <a:ext cx="455825" cy="270356"/>
+          </a:xfrm>
+          <a:prstGeom prst="downArrow">
+            <a:avLst/>
+          </a:prstGeom>
+          <a:solidFill>
+            <a:srgbClr val="FF0000"/>
+          </a:solidFill>
+          <a:ln>
+            <a:noFill/>
+          </a:ln>
+        </p:spPr>
+        <p:style>
+          <a:lnRef idx="2">
+            <a:schemeClr val="accent1">
+              <a:shade val="15000"/>
+            </a:schemeClr>
+          </a:lnRef>
+          <a:fillRef idx="1">
+            <a:schemeClr val="accent1"/>
+          </a:fillRef>
+          <a:effectRef idx="0">
+            <a:schemeClr val="accent1"/>
+          </a:effectRef>
+          <a:fontRef idx="minor">
+            <a:schemeClr val="lt1"/>
+          </a:fontRef>
+        </p:style>
+        <p:txBody>
+          <a:bodyPr rtlCol="0" anchor="ctr"/>
+          <a:lstStyle/>
+          <a:p>
+            <a:pPr algn="ctr"/>
+            <a:endParaRPr lang="en-US"/>
+          </a:p>
+        </p:txBody>
+      </p:sp>
+      <p:sp>
+        <p:nvSpPr>
+          <p:cNvPr id="24" name="矩形 23">
+            <a:extLst>
+              <a:ext uri="{FF2B5EF4-FFF2-40B4-BE49-F238E27FC236}">
+                <a16:creationId xmlns:a16="http://schemas.microsoft.com/office/drawing/2014/main" id="{D32E8B7A-82A8-C405-1CA0-CDAFDE137BAF}"/>
+              </a:ext>
+            </a:extLst>
+          </p:cNvPr>
+          <p:cNvSpPr/>
+          <p:nvPr/>
+        </p:nvSpPr>
+        <p:spPr>
+          <a:xfrm>
+            <a:off x="5106855" y="5651306"/>
+            <a:ext cx="1991259" cy="341808"/>
+          </a:xfrm>
+          <a:prstGeom prst="rect">
+            <a:avLst/>
+          </a:prstGeom>
+          <a:noFill/>
+          <a:ln w="38100">
+            <a:solidFill>
+              <a:srgbClr val="FF0000"/>
+            </a:solidFill>
+          </a:ln>
+        </p:spPr>
+        <p:style>
+          <a:lnRef idx="2">
+            <a:schemeClr val="accent1">
+              <a:shade val="15000"/>
+            </a:schemeClr>
+          </a:lnRef>
+          <a:fillRef idx="1">
+            <a:schemeClr val="accent1"/>
+          </a:fillRef>
+          <a:effectRef idx="0">
+            <a:schemeClr val="accent1"/>
+          </a:effectRef>
+          <a:fontRef idx="minor">
+            <a:schemeClr val="lt1"/>
+          </a:fontRef>
+        </p:style>
+        <p:txBody>
+          <a:bodyPr rtlCol="0" anchor="ctr"/>
+          <a:lstStyle/>
+          <a:p>
+            <a:pPr algn="ctr"/>
+            <a:endParaRPr lang="en-US">
+              <a:ln>
+                <a:solidFill>
+                  <a:srgbClr val="FF0000"/>
+                </a:solidFill>
+              </a:ln>
+            </a:endParaRPr>
+          </a:p>
+        </p:txBody>
+      </p:sp>
+      <p:sp>
+        <p:nvSpPr>
+          <p:cNvPr id="25" name="矩形 24">
+            <a:extLst>
+              <a:ext uri="{FF2B5EF4-FFF2-40B4-BE49-F238E27FC236}">
+                <a16:creationId xmlns:a16="http://schemas.microsoft.com/office/drawing/2014/main" id="{4DAFBDAA-FBAD-A14E-CA4A-2216D7C440D3}"/>
+              </a:ext>
+            </a:extLst>
+          </p:cNvPr>
+          <p:cNvSpPr/>
+          <p:nvPr/>
+        </p:nvSpPr>
+        <p:spPr>
+          <a:xfrm>
+            <a:off x="5106855" y="6439800"/>
+            <a:ext cx="1991259" cy="341808"/>
+          </a:xfrm>
+          <a:prstGeom prst="rect">
+            <a:avLst/>
+          </a:prstGeom>
+          <a:noFill/>
+          <a:ln w="38100">
+            <a:solidFill>
+              <a:srgbClr val="FF0000"/>
+            </a:solidFill>
+          </a:ln>
+        </p:spPr>
+        <p:style>
+          <a:lnRef idx="2">
+            <a:schemeClr val="accent1">
+              <a:shade val="15000"/>
+            </a:schemeClr>
+          </a:lnRef>
+          <a:fillRef idx="1">
+            <a:schemeClr val="accent1"/>
+          </a:fillRef>
+          <a:effectRef idx="0">
+            <a:schemeClr val="accent1"/>
+          </a:effectRef>
+          <a:fontRef idx="minor">
+            <a:schemeClr val="lt1"/>
+          </a:fontRef>
+        </p:style>
+        <p:txBody>
+          <a:bodyPr rtlCol="0" anchor="ctr"/>
+          <a:lstStyle/>
+          <a:p>
+            <a:pPr algn="ctr"/>
+            <a:endParaRPr lang="en-US">
+              <a:ln>
+                <a:solidFill>
+                  <a:srgbClr val="FF0000"/>
+                </a:solidFill>
+              </a:ln>
+            </a:endParaRPr>
+          </a:p>
+        </p:txBody>
+      </p:sp>
+    </p:spTree>
+    <p:extLst>
+      <p:ext uri="{BB962C8B-B14F-4D97-AF65-F5344CB8AC3E}">
+        <p14:creationId xmlns:p14="http://schemas.microsoft.com/office/powerpoint/2010/main" val="2633401457"/>
+      </p:ext>
+    </p:extLst>
+  </p:cSld>
+  <p:clrMapOvr>
+    <a:masterClrMapping/>
+  </p:clrMapOvr>
+</p:sld>
+</file>
+
+<file path=ppt/slides/slide20.xml><?xml version="1.0" encoding="utf-8"?>
 <p:sld xmlns:a="http://schemas.openxmlformats.org/drawingml/2006/main" xmlns:r="http://schemas.openxmlformats.org/officeDocument/2006/relationships" xmlns:p="http://schemas.openxmlformats.org/presentationml/2006/main">
   <p:cSld>
     <p:spTree>
@@ -4874,8 +6596,8 @@
         </p:nvSpPr>
         <p:spPr>
           <a:xfrm>
-            <a:off x="5220600" y="1538226"/>
-            <a:ext cx="1750800" cy="369332"/>
+            <a:off x="4643519" y="1463276"/>
+            <a:ext cx="2904962" cy="369332"/>
           </a:xfrm>
           <a:prstGeom prst="rect">
             <a:avLst/>
@@ -4894,7 +6616,7 @@
                   <a:srgbClr val="FF0000"/>
                 </a:solidFill>
               </a:rPr>
-              <a:t>使用完關掉</a:t>
+              <a:t>使用完畢後，記得關閉</a:t>
             </a:r>
             <a:r>
               <a:rPr lang="en-US" altLang="zh-TW" b="1" dirty="0">
@@ -4976,321 +6698,6 @@
     <p:extLst>
       <p:ext uri="{BB962C8B-B14F-4D97-AF65-F5344CB8AC3E}">
         <p14:creationId xmlns:p14="http://schemas.microsoft.com/office/powerpoint/2010/main" val="2340763999"/>
-      </p:ext>
-    </p:extLst>
-  </p:cSld>
-  <p:clrMapOvr>
-    <a:masterClrMapping/>
-  </p:clrMapOvr>
-</p:sld>
-</file>
-
-<file path=ppt/slides/slide2.xml><?xml version="1.0" encoding="utf-8"?>
-<p:sld xmlns:a="http://schemas.openxmlformats.org/drawingml/2006/main" xmlns:r="http://schemas.openxmlformats.org/officeDocument/2006/relationships" xmlns:p="http://schemas.openxmlformats.org/presentationml/2006/main">
-  <p:cSld>
-    <p:spTree>
-      <p:nvGrpSpPr>
-        <p:cNvPr id="1" name="">
-          <a:extLst>
-            <a:ext uri="{FF2B5EF4-FFF2-40B4-BE49-F238E27FC236}">
-              <a16:creationId xmlns:a16="http://schemas.microsoft.com/office/drawing/2014/main" id="{35437074-28C1-AEED-6F31-2956509D7007}"/>
-            </a:ext>
-          </a:extLst>
-        </p:cNvPr>
-        <p:cNvGrpSpPr/>
-        <p:nvPr/>
-      </p:nvGrpSpPr>
-      <p:grpSpPr>
-        <a:xfrm>
-          <a:off x="0" y="0"/>
-          <a:ext cx="0" cy="0"/>
-          <a:chOff x="0" y="0"/>
-          <a:chExt cx="0" cy="0"/>
-        </a:xfrm>
-      </p:grpSpPr>
-      <p:pic>
-        <p:nvPicPr>
-          <p:cNvPr id="11" name="圖片 10" descr="一張含有 文字, 螢幕擷取畫面, 陳列, 軟體 的圖片&#10;&#10;AI 產生的內容可能不正確。">
-            <a:extLst>
-              <a:ext uri="{FF2B5EF4-FFF2-40B4-BE49-F238E27FC236}">
-                <a16:creationId xmlns:a16="http://schemas.microsoft.com/office/drawing/2014/main" id="{5D629D3F-16AE-70F0-C25E-829E8D834CEB}"/>
-              </a:ext>
-            </a:extLst>
-          </p:cNvPr>
-          <p:cNvPicPr>
-            <a:picLocks noChangeAspect="1"/>
-          </p:cNvPicPr>
-          <p:nvPr/>
-        </p:nvPicPr>
-        <p:blipFill>
-          <a:blip r:embed="rId2">
-            <a:extLst>
-              <a:ext uri="{28A0092B-C50C-407E-A947-70E740481C1C}">
-                <a14:useLocalDpi xmlns:a14="http://schemas.microsoft.com/office/drawing/2010/main" val="0"/>
-              </a:ext>
-            </a:extLst>
-          </a:blip>
-          <a:stretch>
-            <a:fillRect/>
-          </a:stretch>
-        </p:blipFill>
-        <p:spPr>
-          <a:xfrm>
-            <a:off x="3771575" y="1335920"/>
-            <a:ext cx="4648849" cy="2572109"/>
-          </a:xfrm>
-          <a:prstGeom prst="rect">
-            <a:avLst/>
-          </a:prstGeom>
-        </p:spPr>
-      </p:pic>
-      <p:sp>
-        <p:nvSpPr>
-          <p:cNvPr id="13" name="文字方塊 12">
-            <a:extLst>
-              <a:ext uri="{FF2B5EF4-FFF2-40B4-BE49-F238E27FC236}">
-                <a16:creationId xmlns:a16="http://schemas.microsoft.com/office/drawing/2014/main" id="{5B8B7FFD-484C-EFCD-EF1A-9B0E6F66DADD}"/>
-              </a:ext>
-            </a:extLst>
-          </p:cNvPr>
-          <p:cNvSpPr txBox="1"/>
-          <p:nvPr/>
-        </p:nvSpPr>
-        <p:spPr>
-          <a:xfrm>
-            <a:off x="5476642" y="998854"/>
-            <a:ext cx="1107996" cy="369332"/>
-          </a:xfrm>
-          <a:prstGeom prst="rect">
-            <a:avLst/>
-          </a:prstGeom>
-          <a:noFill/>
-        </p:spPr>
-        <p:txBody>
-          <a:bodyPr wrap="none" rtlCol="0">
-            <a:spAutoFit/>
-          </a:bodyPr>
-          <a:lstStyle/>
-          <a:p>
-            <a:r>
-              <a:rPr lang="zh-TW" altLang="en-US" b="1" dirty="0">
-                <a:solidFill>
-                  <a:srgbClr val="FF0000"/>
-                </a:solidFill>
-              </a:rPr>
-              <a:t>權限申請</a:t>
-            </a:r>
-          </a:p>
-        </p:txBody>
-      </p:sp>
-      <p:pic>
-        <p:nvPicPr>
-          <p:cNvPr id="15" name="圖片 14" descr="一張含有 文字, 字型, 行, 螢幕擷取畫面 的圖片&#10;&#10;AI 產生的內容可能不正確。">
-            <a:extLst>
-              <a:ext uri="{FF2B5EF4-FFF2-40B4-BE49-F238E27FC236}">
-                <a16:creationId xmlns:a16="http://schemas.microsoft.com/office/drawing/2014/main" id="{F0499294-3EEB-7019-CCA1-CBE98CD047EC}"/>
-              </a:ext>
-            </a:extLst>
-          </p:cNvPr>
-          <p:cNvPicPr>
-            <a:picLocks noChangeAspect="1"/>
-          </p:cNvPicPr>
-          <p:nvPr/>
-        </p:nvPicPr>
-        <p:blipFill>
-          <a:blip r:embed="rId3">
-            <a:extLst>
-              <a:ext uri="{28A0092B-C50C-407E-A947-70E740481C1C}">
-                <a14:useLocalDpi xmlns:a14="http://schemas.microsoft.com/office/drawing/2010/main" val="0"/>
-              </a:ext>
-            </a:extLst>
-          </a:blip>
-          <a:stretch>
-            <a:fillRect/>
-          </a:stretch>
-        </p:blipFill>
-        <p:spPr>
-          <a:xfrm>
-            <a:off x="2604599" y="4201136"/>
-            <a:ext cx="6982799" cy="1028844"/>
-          </a:xfrm>
-          <a:prstGeom prst="rect">
-            <a:avLst/>
-          </a:prstGeom>
-        </p:spPr>
-      </p:pic>
-      <p:sp>
-        <p:nvSpPr>
-          <p:cNvPr id="20" name="箭號: 向下 19">
-            <a:extLst>
-              <a:ext uri="{FF2B5EF4-FFF2-40B4-BE49-F238E27FC236}">
-                <a16:creationId xmlns:a16="http://schemas.microsoft.com/office/drawing/2014/main" id="{17B8956D-907D-44A0-CF89-039B4384FF5D}"/>
-              </a:ext>
-            </a:extLst>
-          </p:cNvPr>
-          <p:cNvSpPr/>
-          <p:nvPr/>
-        </p:nvSpPr>
-        <p:spPr>
-          <a:xfrm>
-            <a:off x="5834137" y="3810000"/>
-            <a:ext cx="523721" cy="520700"/>
-          </a:xfrm>
-          <a:prstGeom prst="downArrow">
-            <a:avLst/>
-          </a:prstGeom>
-          <a:solidFill>
-            <a:srgbClr val="FF0000"/>
-          </a:solidFill>
-          <a:ln>
-            <a:noFill/>
-          </a:ln>
-        </p:spPr>
-        <p:style>
-          <a:lnRef idx="2">
-            <a:schemeClr val="accent1">
-              <a:shade val="15000"/>
-            </a:schemeClr>
-          </a:lnRef>
-          <a:fillRef idx="1">
-            <a:schemeClr val="accent1"/>
-          </a:fillRef>
-          <a:effectRef idx="0">
-            <a:schemeClr val="accent1"/>
-          </a:effectRef>
-          <a:fontRef idx="minor">
-            <a:schemeClr val="lt1"/>
-          </a:fontRef>
-        </p:style>
-        <p:txBody>
-          <a:bodyPr rtlCol="0" anchor="ctr"/>
-          <a:lstStyle/>
-          <a:p>
-            <a:pPr algn="ctr"/>
-            <a:endParaRPr lang="en-US"/>
-          </a:p>
-        </p:txBody>
-      </p:sp>
-      <p:sp>
-        <p:nvSpPr>
-          <p:cNvPr id="2" name="矩形 1">
-            <a:extLst>
-              <a:ext uri="{FF2B5EF4-FFF2-40B4-BE49-F238E27FC236}">
-                <a16:creationId xmlns:a16="http://schemas.microsoft.com/office/drawing/2014/main" id="{8DE49D3E-2907-5C7F-31FD-D4399270BC55}"/>
-              </a:ext>
-            </a:extLst>
-          </p:cNvPr>
-          <p:cNvSpPr/>
-          <p:nvPr/>
-        </p:nvSpPr>
-        <p:spPr>
-          <a:xfrm>
-            <a:off x="4708235" y="1473201"/>
-            <a:ext cx="3683609" cy="685800"/>
-          </a:xfrm>
-          <a:prstGeom prst="rect">
-            <a:avLst/>
-          </a:prstGeom>
-          <a:noFill/>
-          <a:ln w="38100">
-            <a:solidFill>
-              <a:srgbClr val="FF0000"/>
-            </a:solidFill>
-          </a:ln>
-        </p:spPr>
-        <p:style>
-          <a:lnRef idx="2">
-            <a:schemeClr val="accent1">
-              <a:shade val="15000"/>
-            </a:schemeClr>
-          </a:lnRef>
-          <a:fillRef idx="1">
-            <a:schemeClr val="accent1"/>
-          </a:fillRef>
-          <a:effectRef idx="0">
-            <a:schemeClr val="accent1"/>
-          </a:effectRef>
-          <a:fontRef idx="minor">
-            <a:schemeClr val="lt1"/>
-          </a:fontRef>
-        </p:style>
-        <p:txBody>
-          <a:bodyPr rtlCol="0" anchor="ctr"/>
-          <a:lstStyle/>
-          <a:p>
-            <a:pPr algn="ctr"/>
-            <a:endParaRPr lang="en-US">
-              <a:ln>
-                <a:solidFill>
-                  <a:srgbClr val="FF0000"/>
-                </a:solidFill>
-              </a:ln>
-            </a:endParaRPr>
-          </a:p>
-        </p:txBody>
-      </p:sp>
-      <p:sp>
-        <p:nvSpPr>
-          <p:cNvPr id="3" name="矩形 2">
-            <a:extLst>
-              <a:ext uri="{FF2B5EF4-FFF2-40B4-BE49-F238E27FC236}">
-                <a16:creationId xmlns:a16="http://schemas.microsoft.com/office/drawing/2014/main" id="{5E100ACB-0FC6-4149-CC85-BC106F3EB4B8}"/>
-              </a:ext>
-            </a:extLst>
-          </p:cNvPr>
-          <p:cNvSpPr/>
-          <p:nvPr/>
-        </p:nvSpPr>
-        <p:spPr>
-          <a:xfrm>
-            <a:off x="4936835" y="4753371"/>
-            <a:ext cx="4092865" cy="426672"/>
-          </a:xfrm>
-          <a:prstGeom prst="rect">
-            <a:avLst/>
-          </a:prstGeom>
-          <a:noFill/>
-          <a:ln w="38100">
-            <a:solidFill>
-              <a:srgbClr val="FF0000"/>
-            </a:solidFill>
-          </a:ln>
-        </p:spPr>
-        <p:style>
-          <a:lnRef idx="2">
-            <a:schemeClr val="accent1">
-              <a:shade val="15000"/>
-            </a:schemeClr>
-          </a:lnRef>
-          <a:fillRef idx="1">
-            <a:schemeClr val="accent1"/>
-          </a:fillRef>
-          <a:effectRef idx="0">
-            <a:schemeClr val="accent1"/>
-          </a:effectRef>
-          <a:fontRef idx="minor">
-            <a:schemeClr val="lt1"/>
-          </a:fontRef>
-        </p:style>
-        <p:txBody>
-          <a:bodyPr rtlCol="0" anchor="ctr"/>
-          <a:lstStyle/>
-          <a:p>
-            <a:pPr algn="ctr"/>
-            <a:endParaRPr lang="en-US">
-              <a:ln>
-                <a:solidFill>
-                  <a:srgbClr val="FF0000"/>
-                </a:solidFill>
-              </a:ln>
-            </a:endParaRPr>
-          </a:p>
-        </p:txBody>
-      </p:sp>
-    </p:spTree>
-    <p:extLst>
-      <p:ext uri="{BB962C8B-B14F-4D97-AF65-F5344CB8AC3E}">
-        <p14:creationId xmlns:p14="http://schemas.microsoft.com/office/powerpoint/2010/main" val="2438757720"/>
       </p:ext>
     </p:extLst>
   </p:cSld>
@@ -5317,42 +6724,99 @@
           <a:chExt cx="0" cy="0"/>
         </a:xfrm>
       </p:grpSpPr>
-      <p:pic>
-        <p:nvPicPr>
-          <p:cNvPr id="19" name="圖片 18" descr="一張含有 文字, 字型, 螢幕擷取畫面 的圖片&#10;&#10;AI 產生的內容可能不正確。">
-            <a:extLst>
-              <a:ext uri="{FF2B5EF4-FFF2-40B4-BE49-F238E27FC236}">
-                <a16:creationId xmlns:a16="http://schemas.microsoft.com/office/drawing/2014/main" id="{A1C62712-1027-5641-404F-E3D9625B0B86}"/>
-              </a:ext>
-            </a:extLst>
-          </p:cNvPr>
-          <p:cNvPicPr>
-            <a:picLocks noChangeAspect="1"/>
-          </p:cNvPicPr>
-          <p:nvPr/>
-        </p:nvPicPr>
-        <p:blipFill>
-          <a:blip r:embed="rId2">
-            <a:extLst>
-              <a:ext uri="{28A0092B-C50C-407E-A947-70E740481C1C}">
-                <a14:useLocalDpi xmlns:a14="http://schemas.microsoft.com/office/drawing/2010/main" val="0"/>
-              </a:ext>
-            </a:extLst>
-          </a:blip>
-          <a:stretch>
-            <a:fillRect/>
-          </a:stretch>
-        </p:blipFill>
-        <p:spPr>
-          <a:xfrm>
-            <a:off x="457200" y="4942717"/>
-            <a:ext cx="11277600" cy="1625324"/>
-          </a:xfrm>
-          <a:prstGeom prst="rect">
-            <a:avLst/>
-          </a:prstGeom>
-        </p:spPr>
-      </p:pic>
+      <p:grpSp>
+        <p:nvGrpSpPr>
+          <p:cNvPr id="5" name="群組 4">
+            <a:extLst>
+              <a:ext uri="{FF2B5EF4-FFF2-40B4-BE49-F238E27FC236}">
+                <a16:creationId xmlns:a16="http://schemas.microsoft.com/office/drawing/2014/main" id="{EEF43ED9-07AE-F772-7463-2807B274FA79}"/>
+              </a:ext>
+            </a:extLst>
+          </p:cNvPr>
+          <p:cNvGrpSpPr/>
+          <p:nvPr/>
+        </p:nvGrpSpPr>
+        <p:grpSpPr>
+          <a:xfrm>
+            <a:off x="2584018" y="656610"/>
+            <a:ext cx="7023964" cy="4511218"/>
+            <a:chOff x="2073854" y="653927"/>
+            <a:chExt cx="8044291" cy="5166534"/>
+          </a:xfrm>
+        </p:grpSpPr>
+        <p:pic>
+          <p:nvPicPr>
+            <p:cNvPr id="2" name="圖片 1" descr="一張含有 文字, 螢幕擷取畫面, 數字, 字型 的圖片&#10;&#10;AI 產生的內容可能不正確。">
+              <a:extLst>
+                <a:ext uri="{FF2B5EF4-FFF2-40B4-BE49-F238E27FC236}">
+                  <a16:creationId xmlns:a16="http://schemas.microsoft.com/office/drawing/2014/main" id="{98CD30ED-F54F-8657-D965-23EB7EEE3DDC}"/>
+                </a:ext>
+              </a:extLst>
+            </p:cNvPr>
+            <p:cNvPicPr>
+              <a:picLocks noChangeAspect="1"/>
+            </p:cNvPicPr>
+            <p:nvPr/>
+          </p:nvPicPr>
+          <p:blipFill>
+            <a:blip r:embed="rId2">
+              <a:extLst>
+                <a:ext uri="{28A0092B-C50C-407E-A947-70E740481C1C}">
+                  <a14:useLocalDpi xmlns:a14="http://schemas.microsoft.com/office/drawing/2010/main" val="0"/>
+                </a:ext>
+              </a:extLst>
+            </a:blip>
+            <a:stretch>
+              <a:fillRect/>
+            </a:stretch>
+          </p:blipFill>
+          <p:spPr>
+            <a:xfrm>
+              <a:off x="2073855" y="653927"/>
+              <a:ext cx="8044290" cy="3899269"/>
+            </a:xfrm>
+            <a:prstGeom prst="rect">
+              <a:avLst/>
+            </a:prstGeom>
+          </p:spPr>
+        </p:pic>
+        <p:pic>
+          <p:nvPicPr>
+            <p:cNvPr id="19" name="圖片 18" descr="一張含有 文字, 字型, 螢幕擷取畫面 的圖片&#10;&#10;AI 產生的內容可能不正確。">
+              <a:extLst>
+                <a:ext uri="{FF2B5EF4-FFF2-40B4-BE49-F238E27FC236}">
+                  <a16:creationId xmlns:a16="http://schemas.microsoft.com/office/drawing/2014/main" id="{A1C62712-1027-5641-404F-E3D9625B0B86}"/>
+                </a:ext>
+              </a:extLst>
+            </p:cNvPr>
+            <p:cNvPicPr>
+              <a:picLocks noChangeAspect="1"/>
+            </p:cNvPicPr>
+            <p:nvPr/>
+          </p:nvPicPr>
+          <p:blipFill>
+            <a:blip r:embed="rId3">
+              <a:extLst>
+                <a:ext uri="{28A0092B-C50C-407E-A947-70E740481C1C}">
+                  <a14:useLocalDpi xmlns:a14="http://schemas.microsoft.com/office/drawing/2010/main" val="0"/>
+                </a:ext>
+              </a:extLst>
+            </a:blip>
+            <a:stretch>
+              <a:fillRect/>
+            </a:stretch>
+          </p:blipFill>
+          <p:spPr>
+            <a:xfrm>
+              <a:off x="2073854" y="4661121"/>
+              <a:ext cx="8044290" cy="1159340"/>
+            </a:xfrm>
+            <a:prstGeom prst="rect">
+              <a:avLst/>
+            </a:prstGeom>
+          </p:spPr>
+        </p:pic>
+      </p:grpSp>
       <p:sp>
         <p:nvSpPr>
           <p:cNvPr id="21" name="文字方塊 20">
@@ -5367,8 +6831,8 @@
         </p:nvSpPr>
         <p:spPr>
           <a:xfrm>
-            <a:off x="4924970" y="311569"/>
-            <a:ext cx="2262158" cy="369332"/>
+            <a:off x="7041845" y="6062904"/>
+            <a:ext cx="1800493" cy="369332"/>
           </a:xfrm>
           <a:prstGeom prst="rect">
             <a:avLst/>
@@ -5387,53 +6851,17 @@
                   <a:srgbClr val="FF0000"/>
                 </a:solidFill>
               </a:rPr>
-              <a:t>申請教學網頁上很多</a:t>
-            </a:r>
-          </a:p>
-        </p:txBody>
-      </p:sp>
-      <p:pic>
-        <p:nvPicPr>
-          <p:cNvPr id="23" name="圖片 22" descr="一張含有 文字, 螢幕擷取畫面, 陳列, 軟體 的圖片&#10;&#10;AI 產生的內容可能不正確。">
-            <a:extLst>
-              <a:ext uri="{FF2B5EF4-FFF2-40B4-BE49-F238E27FC236}">
-                <a16:creationId xmlns:a16="http://schemas.microsoft.com/office/drawing/2014/main" id="{A8160479-6E54-E829-D80C-440CAF09EB44}"/>
-              </a:ext>
-            </a:extLst>
-          </p:cNvPr>
-          <p:cNvPicPr>
-            <a:picLocks noChangeAspect="1"/>
-          </p:cNvPicPr>
-          <p:nvPr/>
-        </p:nvPicPr>
-        <p:blipFill>
-          <a:blip r:embed="rId3">
-            <a:extLst>
-              <a:ext uri="{28A0092B-C50C-407E-A947-70E740481C1C}">
-                <a14:useLocalDpi xmlns:a14="http://schemas.microsoft.com/office/drawing/2010/main" val="0"/>
-              </a:ext>
-            </a:extLst>
-          </a:blip>
-          <a:stretch>
-            <a:fillRect/>
-          </a:stretch>
-        </p:blipFill>
-        <p:spPr>
-          <a:xfrm>
-            <a:off x="3800154" y="757101"/>
-            <a:ext cx="4591691" cy="4096322"/>
-          </a:xfrm>
-          <a:prstGeom prst="rect">
-            <a:avLst/>
-          </a:prstGeom>
-        </p:spPr>
-      </p:pic>
-      <p:sp>
-        <p:nvSpPr>
-          <p:cNvPr id="24" name="矩形 23">
-            <a:extLst>
-              <a:ext uri="{FF2B5EF4-FFF2-40B4-BE49-F238E27FC236}">
-                <a16:creationId xmlns:a16="http://schemas.microsoft.com/office/drawing/2014/main" id="{19B35E39-6E55-D2B6-E862-4D8B934BA12F}"/>
+              <a:t>填寫權限申請表</a:t>
+            </a:r>
+          </a:p>
+        </p:txBody>
+      </p:sp>
+      <p:sp>
+        <p:nvSpPr>
+          <p:cNvPr id="25" name="矩形 24">
+            <a:extLst>
+              <a:ext uri="{FF2B5EF4-FFF2-40B4-BE49-F238E27FC236}">
+                <a16:creationId xmlns:a16="http://schemas.microsoft.com/office/drawing/2014/main" id="{9FD3BE04-0C01-ED71-50A5-028EAE58AD84}"/>
               </a:ext>
             </a:extLst>
           </p:cNvPr>
@@ -5442,8 +6870,8 @@
         </p:nvSpPr>
         <p:spPr>
           <a:xfrm>
-            <a:off x="4708235" y="1796474"/>
-            <a:ext cx="3683609" cy="667325"/>
+            <a:off x="2584018" y="4818097"/>
+            <a:ext cx="7023963" cy="369332"/>
           </a:xfrm>
           <a:prstGeom prst="rect">
             <a:avLst/>
@@ -5488,10 +6916,51 @@
       </p:sp>
       <p:sp>
         <p:nvSpPr>
-          <p:cNvPr id="25" name="矩形 24">
-            <a:extLst>
-              <a:ext uri="{FF2B5EF4-FFF2-40B4-BE49-F238E27FC236}">
-                <a16:creationId xmlns:a16="http://schemas.microsoft.com/office/drawing/2014/main" id="{9FD3BE04-0C01-ED71-50A5-028EAE58AD84}"/>
+          <p:cNvPr id="4" name="文字方塊 3">
+            <a:extLst>
+              <a:ext uri="{FF2B5EF4-FFF2-40B4-BE49-F238E27FC236}">
+                <a16:creationId xmlns:a16="http://schemas.microsoft.com/office/drawing/2014/main" id="{A2009F61-076B-3F35-EFF7-B6282437EDBB}"/>
+              </a:ext>
+            </a:extLst>
+          </p:cNvPr>
+          <p:cNvSpPr txBox="1"/>
+          <p:nvPr/>
+        </p:nvSpPr>
+        <p:spPr>
+          <a:xfrm>
+            <a:off x="130478" y="38719"/>
+            <a:ext cx="11959922" cy="523220"/>
+          </a:xfrm>
+          <a:prstGeom prst="rect">
+            <a:avLst/>
+          </a:prstGeom>
+          <a:noFill/>
+          <a:ln w="38100">
+            <a:solidFill>
+              <a:srgbClr val="FF0000"/>
+            </a:solidFill>
+          </a:ln>
+        </p:spPr>
+        <p:txBody>
+          <a:bodyPr wrap="square">
+            <a:spAutoFit/>
+          </a:bodyPr>
+          <a:lstStyle/>
+          <a:p>
+            <a:pPr algn="ctr"/>
+            <a:r>
+              <a:rPr lang="en-US" sz="2800" dirty="0"/>
+              <a:t>https://a00a.atlassian.net/wiki/spaces/NTCITH/pages/132448907/VPN</a:t>
+            </a:r>
+          </a:p>
+        </p:txBody>
+      </p:sp>
+      <p:sp>
+        <p:nvSpPr>
+          <p:cNvPr id="6" name="箭號: 向下 5">
+            <a:extLst>
+              <a:ext uri="{FF2B5EF4-FFF2-40B4-BE49-F238E27FC236}">
+                <a16:creationId xmlns:a16="http://schemas.microsoft.com/office/drawing/2014/main" id="{3C04F07B-6AF1-0B4F-7B54-BBAA3EC25856}"/>
               </a:ext>
             </a:extLst>
           </p:cNvPr>
@@ -5500,8 +6969,101 @@
         </p:nvSpPr>
         <p:spPr>
           <a:xfrm>
-            <a:off x="618835" y="5967846"/>
-            <a:ext cx="11115965" cy="600195"/>
+            <a:off x="5868085" y="5137204"/>
+            <a:ext cx="455825" cy="270356"/>
+          </a:xfrm>
+          <a:prstGeom prst="downArrow">
+            <a:avLst/>
+          </a:prstGeom>
+          <a:solidFill>
+            <a:srgbClr val="FF0000"/>
+          </a:solidFill>
+          <a:ln>
+            <a:noFill/>
+          </a:ln>
+        </p:spPr>
+        <p:style>
+          <a:lnRef idx="2">
+            <a:schemeClr val="accent1">
+              <a:shade val="15000"/>
+            </a:schemeClr>
+          </a:lnRef>
+          <a:fillRef idx="1">
+            <a:schemeClr val="accent1"/>
+          </a:fillRef>
+          <a:effectRef idx="0">
+            <a:schemeClr val="accent1"/>
+          </a:effectRef>
+          <a:fontRef idx="minor">
+            <a:schemeClr val="lt1"/>
+          </a:fontRef>
+        </p:style>
+        <p:txBody>
+          <a:bodyPr rtlCol="0" anchor="ctr"/>
+          <a:lstStyle/>
+          <a:p>
+            <a:pPr algn="ctr"/>
+            <a:endParaRPr lang="en-US"/>
+          </a:p>
+        </p:txBody>
+      </p:sp>
+      <p:pic>
+        <p:nvPicPr>
+          <p:cNvPr id="10" name="圖片 9">
+            <a:extLst>
+              <a:ext uri="{FF2B5EF4-FFF2-40B4-BE49-F238E27FC236}">
+                <a16:creationId xmlns:a16="http://schemas.microsoft.com/office/drawing/2014/main" id="{5E7E66A7-17A4-DD9A-00FB-E15A6E225B1D}"/>
+              </a:ext>
+            </a:extLst>
+          </p:cNvPr>
+          <p:cNvPicPr>
+            <a:picLocks noChangeAspect="1"/>
+          </p:cNvPicPr>
+          <p:nvPr/>
+        </p:nvPicPr>
+        <p:blipFill>
+          <a:blip r:embed="rId4">
+            <a:extLst>
+              <a:ext uri="{28A0092B-C50C-407E-A947-70E740481C1C}">
+                <a14:useLocalDpi xmlns:a14="http://schemas.microsoft.com/office/drawing/2010/main" val="0"/>
+              </a:ext>
+            </a:extLst>
+          </a:blip>
+          <a:stretch>
+            <a:fillRect/>
+          </a:stretch>
+        </p:blipFill>
+        <p:spPr>
+          <a:xfrm>
+            <a:off x="2584015" y="5515906"/>
+            <a:ext cx="7023963" cy="435329"/>
+          </a:xfrm>
+          <a:prstGeom prst="rect">
+            <a:avLst/>
+          </a:prstGeom>
+          <a:ln>
+            <a:solidFill>
+              <a:schemeClr val="tx1"/>
+            </a:solidFill>
+          </a:ln>
+        </p:spPr>
+      </p:pic>
+      <p:sp>
+        <p:nvSpPr>
+          <p:cNvPr id="11" name="矩形 10">
+            <a:extLst>
+              <a:ext uri="{FF2B5EF4-FFF2-40B4-BE49-F238E27FC236}">
+                <a16:creationId xmlns:a16="http://schemas.microsoft.com/office/drawing/2014/main" id="{DCE05380-CE6C-905E-EF3B-AD88C3E06015}"/>
+              </a:ext>
+            </a:extLst>
+          </p:cNvPr>
+          <p:cNvSpPr/>
+          <p:nvPr/>
+        </p:nvSpPr>
+        <p:spPr>
+          <a:xfrm>
+            <a:off x="6110440" y="5772847"/>
+            <a:ext cx="3319888" cy="240554"/>
           </a:xfrm>
           <a:prstGeom prst="rect">
             <a:avLst/>
@@ -5576,10 +7138,10 @@
       </p:grpSpPr>
       <p:pic>
         <p:nvPicPr>
-          <p:cNvPr id="5" name="圖片 4">
-            <a:extLst>
-              <a:ext uri="{FF2B5EF4-FFF2-40B4-BE49-F238E27FC236}">
-                <a16:creationId xmlns:a16="http://schemas.microsoft.com/office/drawing/2014/main" id="{7E3C8180-34D5-875A-B321-B2E4862ACDF0}"/>
+          <p:cNvPr id="12" name="圖片 11" descr="一張含有 文字, 螢幕擷取畫面, 行, 數字 的圖片&#10;&#10;AI 產生的內容可能不正確。">
+            <a:extLst>
+              <a:ext uri="{FF2B5EF4-FFF2-40B4-BE49-F238E27FC236}">
+                <a16:creationId xmlns:a16="http://schemas.microsoft.com/office/drawing/2014/main" id="{438A67DD-1998-9B75-8639-2593BF1FDB32}"/>
               </a:ext>
             </a:extLst>
           </p:cNvPr>
@@ -5596,14 +7158,13 @@
               </a:ext>
             </a:extLst>
           </a:blip>
-          <a:stretch>
-            <a:fillRect/>
-          </a:stretch>
+          <a:srcRect t="7046" b="5798"/>
+          <a:stretch/>
         </p:blipFill>
         <p:spPr>
           <a:xfrm>
-            <a:off x="0" y="1531670"/>
-            <a:ext cx="12192000" cy="1245419"/>
+            <a:off x="1025236" y="0"/>
+            <a:ext cx="10141528" cy="4221018"/>
           </a:xfrm>
           <a:prstGeom prst="rect">
             <a:avLst/>
@@ -5612,10 +7173,366 @@
       </p:pic>
       <p:sp>
         <p:nvSpPr>
-          <p:cNvPr id="6" name="矩形 5">
-            <a:extLst>
-              <a:ext uri="{FF2B5EF4-FFF2-40B4-BE49-F238E27FC236}">
-                <a16:creationId xmlns:a16="http://schemas.microsoft.com/office/drawing/2014/main" id="{63D86C97-EA4E-DF58-4B26-A9032D63F7CF}"/>
+          <p:cNvPr id="3" name="文字方塊 2">
+            <a:extLst>
+              <a:ext uri="{FF2B5EF4-FFF2-40B4-BE49-F238E27FC236}">
+                <a16:creationId xmlns:a16="http://schemas.microsoft.com/office/drawing/2014/main" id="{6FF48A95-8945-71BC-BA14-FCEC608DBB16}"/>
+              </a:ext>
+            </a:extLst>
+          </p:cNvPr>
+          <p:cNvSpPr txBox="1"/>
+          <p:nvPr/>
+        </p:nvSpPr>
+        <p:spPr>
+          <a:xfrm>
+            <a:off x="6560289" y="4304064"/>
+            <a:ext cx="2526037" cy="2492990"/>
+          </a:xfrm>
+          <a:prstGeom prst="rect">
+            <a:avLst/>
+          </a:prstGeom>
+          <a:noFill/>
+          <a:ln>
+            <a:solidFill>
+              <a:schemeClr val="tx1"/>
+            </a:solidFill>
+          </a:ln>
+        </p:spPr>
+        <p:txBody>
+          <a:bodyPr wrap="square">
+            <a:spAutoFit/>
+          </a:bodyPr>
+          <a:lstStyle/>
+          <a:p>
+            <a:r>
+              <a:rPr lang="en-US" sz="1200" dirty="0"/>
+              <a:t>1. </a:t>
+            </a:r>
+            <a:r>
+              <a:rPr lang="en-US" sz="1200" dirty="0" err="1"/>
+              <a:t>申請項目：一般VPN連線</a:t>
+            </a:r>
+            <a:r>
+              <a:rPr lang="en-US" sz="1200" dirty="0"/>
+              <a:t> </a:t>
+            </a:r>
+          </a:p>
+          <a:p>
+            <a:endParaRPr lang="en-US" sz="1200" dirty="0"/>
+          </a:p>
+          <a:p>
+            <a:r>
+              <a:rPr lang="en-US" sz="1200" dirty="0"/>
+              <a:t>2. </a:t>
+            </a:r>
+            <a:r>
+              <a:rPr lang="en-US" sz="1200" dirty="0" err="1"/>
+              <a:t>部門</a:t>
+            </a:r>
+            <a:r>
+              <a:rPr lang="en-US" sz="1200" dirty="0"/>
+              <a:t>： S220</a:t>
+            </a:r>
+          </a:p>
+          <a:p>
+            <a:endParaRPr lang="en-US" sz="1200" dirty="0"/>
+          </a:p>
+          <a:p>
+            <a:r>
+              <a:rPr lang="en-US" sz="1200" dirty="0"/>
+              <a:t>3. Alias： JYLin</a:t>
+            </a:r>
+          </a:p>
+          <a:p>
+            <a:endParaRPr lang="en-US" sz="1200" dirty="0"/>
+          </a:p>
+          <a:p>
+            <a:r>
+              <a:rPr lang="en-US" sz="1200" dirty="0"/>
+              <a:t>4. </a:t>
+            </a:r>
+            <a:r>
+              <a:rPr lang="en-US" sz="1200" dirty="0" err="1"/>
+              <a:t>電腦名稱</a:t>
+            </a:r>
+            <a:r>
+              <a:rPr lang="en-US" sz="1200" dirty="0"/>
+              <a:t> ：OAPCD03789</a:t>
+            </a:r>
+          </a:p>
+          <a:p>
+            <a:endParaRPr lang="en-US" sz="1200" dirty="0"/>
+          </a:p>
+          <a:p>
+            <a:r>
+              <a:rPr lang="en-US" sz="1200" dirty="0"/>
+              <a:t>5. MAC Address： </a:t>
+            </a:r>
+          </a:p>
+          <a:p>
+            <a:r>
+              <a:rPr lang="en-US" sz="1200" dirty="0" err="1"/>
+              <a:t>乙太</a:t>
+            </a:r>
+            <a:r>
+              <a:rPr lang="en-US" sz="1200" dirty="0"/>
+              <a:t>： xx-xx-xx-xx-xx-xx</a:t>
+            </a:r>
+          </a:p>
+          <a:p>
+            <a:r>
+              <a:rPr lang="en-US" sz="1200" dirty="0" err="1"/>
+              <a:t>WIFI：xx-xx-xx-xx-xx-xx</a:t>
+            </a:r>
+            <a:r>
+              <a:rPr lang="en-US" sz="1200" dirty="0"/>
+              <a:t>  </a:t>
+            </a:r>
+            <a:r>
+              <a:rPr lang="en-US" altLang="zh-TW" sz="1200" dirty="0">
+                <a:solidFill>
+                  <a:srgbClr val="FF0000"/>
+                </a:solidFill>
+              </a:rPr>
+              <a:t>(</a:t>
+            </a:r>
+            <a:r>
+              <a:rPr lang="zh-TW" altLang="en-US" sz="1200" dirty="0">
+                <a:solidFill>
+                  <a:srgbClr val="FF0000"/>
+                </a:solidFill>
+              </a:rPr>
+              <a:t>選填</a:t>
+            </a:r>
+            <a:r>
+              <a:rPr lang="en-US" altLang="zh-TW" sz="1200" dirty="0">
+                <a:solidFill>
+                  <a:srgbClr val="FF0000"/>
+                </a:solidFill>
+              </a:rPr>
+              <a:t>)</a:t>
+            </a:r>
+            <a:endParaRPr lang="en-US" sz="1200" dirty="0">
+              <a:solidFill>
+                <a:srgbClr val="FF0000"/>
+              </a:solidFill>
+            </a:endParaRPr>
+          </a:p>
+          <a:p>
+            <a:endParaRPr lang="en-US" sz="1200" dirty="0"/>
+          </a:p>
+          <a:p>
+            <a:r>
+              <a:rPr lang="en-US" sz="1200" dirty="0"/>
+              <a:t>6. </a:t>
+            </a:r>
+            <a:r>
+              <a:rPr lang="en-US" sz="1200" dirty="0" err="1"/>
+              <a:t>電話</a:t>
+            </a:r>
+            <a:r>
+              <a:rPr lang="en-US" sz="1200" dirty="0"/>
+              <a:t>(</a:t>
+            </a:r>
+            <a:r>
+              <a:rPr lang="en-US" sz="1200" dirty="0" err="1"/>
+              <a:t>收簡訊驗證用</a:t>
+            </a:r>
+            <a:r>
+              <a:rPr lang="en-US" sz="1200" dirty="0"/>
+              <a:t>)： </a:t>
+            </a:r>
+            <a:r>
+              <a:rPr lang="en-US" sz="1200" dirty="0" err="1"/>
+              <a:t>xxxxxxxxxx</a:t>
+            </a:r>
+            <a:endParaRPr lang="en-US" sz="1200" dirty="0"/>
+          </a:p>
+        </p:txBody>
+      </p:sp>
+      <p:sp>
+        <p:nvSpPr>
+          <p:cNvPr id="10" name="文字方塊 9">
+            <a:extLst>
+              <a:ext uri="{FF2B5EF4-FFF2-40B4-BE49-F238E27FC236}">
+                <a16:creationId xmlns:a16="http://schemas.microsoft.com/office/drawing/2014/main" id="{F329CFE5-0457-5338-BE83-AEAE33A3FBCE}"/>
+              </a:ext>
+            </a:extLst>
+          </p:cNvPr>
+          <p:cNvSpPr txBox="1"/>
+          <p:nvPr/>
+        </p:nvSpPr>
+        <p:spPr>
+          <a:xfrm>
+            <a:off x="3105675" y="4396397"/>
+            <a:ext cx="2526037" cy="2308324"/>
+          </a:xfrm>
+          <a:prstGeom prst="rect">
+            <a:avLst/>
+          </a:prstGeom>
+          <a:noFill/>
+          <a:ln>
+            <a:solidFill>
+              <a:schemeClr val="tx1"/>
+            </a:solidFill>
+          </a:ln>
+        </p:spPr>
+        <p:txBody>
+          <a:bodyPr wrap="square">
+            <a:spAutoFit/>
+          </a:bodyPr>
+          <a:lstStyle/>
+          <a:p>
+            <a:r>
+              <a:rPr lang="en-US" altLang="zh-TW" sz="1200" dirty="0"/>
+              <a:t>1.</a:t>
+            </a:r>
+            <a:r>
+              <a:rPr lang="zh-TW" altLang="en-US" sz="1200" dirty="0"/>
+              <a:t> </a:t>
+            </a:r>
+            <a:r>
+              <a:rPr lang="en-US" sz="1200" dirty="0" err="1"/>
+              <a:t>申請項目</a:t>
+            </a:r>
+            <a:r>
+              <a:rPr lang="en-US" sz="1200" dirty="0"/>
+              <a:t>： </a:t>
+            </a:r>
+            <a:r>
+              <a:rPr lang="en-US" sz="1200" dirty="0" err="1"/>
+              <a:t>一般VPN連線</a:t>
+            </a:r>
+            <a:r>
+              <a:rPr lang="en-US" sz="1200" dirty="0"/>
+              <a:t> </a:t>
+            </a:r>
+          </a:p>
+          <a:p>
+            <a:endParaRPr lang="en-US" sz="1200" dirty="0"/>
+          </a:p>
+          <a:p>
+            <a:r>
+              <a:rPr lang="en-US" sz="1200" dirty="0"/>
+              <a:t>2. </a:t>
+            </a:r>
+            <a:r>
+              <a:rPr lang="en-US" sz="1200" dirty="0" err="1"/>
+              <a:t>部門</a:t>
+            </a:r>
+            <a:r>
+              <a:rPr lang="en-US" sz="1200" dirty="0"/>
+              <a:t>：</a:t>
+            </a:r>
+            <a:r>
+              <a:rPr lang="zh-TW" altLang="en-US" sz="1200" dirty="0"/>
+              <a:t> </a:t>
+            </a:r>
+            <a:endParaRPr lang="en-US" sz="1200" dirty="0"/>
+          </a:p>
+          <a:p>
+            <a:endParaRPr lang="en-US" sz="1200" dirty="0"/>
+          </a:p>
+          <a:p>
+            <a:r>
+              <a:rPr lang="en-US" sz="1200" dirty="0"/>
+              <a:t>3. Alias：</a:t>
+            </a:r>
+            <a:r>
+              <a:rPr lang="zh-TW" altLang="en-US" sz="1200" dirty="0"/>
+              <a:t> </a:t>
+            </a:r>
+            <a:endParaRPr lang="en-US" sz="1200" dirty="0"/>
+          </a:p>
+          <a:p>
+            <a:endParaRPr lang="en-US" sz="1200" dirty="0"/>
+          </a:p>
+          <a:p>
+            <a:r>
+              <a:rPr lang="en-US" sz="1200" dirty="0"/>
+              <a:t>4. </a:t>
+            </a:r>
+            <a:r>
+              <a:rPr lang="en-US" sz="1200" dirty="0" err="1"/>
+              <a:t>電腦名稱</a:t>
+            </a:r>
+            <a:r>
+              <a:rPr lang="en-US" sz="1200" dirty="0"/>
+              <a:t> ：</a:t>
+            </a:r>
+            <a:r>
+              <a:rPr lang="zh-TW" altLang="en-US" sz="1200" dirty="0"/>
+              <a:t> </a:t>
+            </a:r>
+            <a:endParaRPr lang="en-US" sz="1200" dirty="0"/>
+          </a:p>
+          <a:p>
+            <a:endParaRPr lang="en-US" sz="1200" dirty="0"/>
+          </a:p>
+          <a:p>
+            <a:r>
+              <a:rPr lang="en-US" sz="1200" dirty="0"/>
+              <a:t>5. MAC Address： </a:t>
+            </a:r>
+            <a:r>
+              <a:rPr lang="zh-TW" altLang="en-US" sz="1200" dirty="0"/>
+              <a:t> </a:t>
+            </a:r>
+            <a:endParaRPr lang="en-US" sz="1200" dirty="0"/>
+          </a:p>
+          <a:p>
+            <a:r>
+              <a:rPr lang="en-US" sz="1200" dirty="0" err="1"/>
+              <a:t>乙太</a:t>
+            </a:r>
+            <a:r>
+              <a:rPr lang="en-US" sz="1200" dirty="0"/>
+              <a:t>：</a:t>
+            </a:r>
+            <a:r>
+              <a:rPr lang="zh-TW" altLang="en-US" sz="1200" dirty="0"/>
+              <a:t> </a:t>
+            </a:r>
+            <a:br>
+              <a:rPr lang="en-US" sz="1200" dirty="0"/>
+            </a:br>
+            <a:endParaRPr lang="en-US" sz="1200" dirty="0"/>
+          </a:p>
+          <a:p>
+            <a:r>
+              <a:rPr lang="en-US" sz="1200" dirty="0"/>
+              <a:t>6. </a:t>
+            </a:r>
+            <a:r>
+              <a:rPr lang="en-US" sz="1200" dirty="0" err="1"/>
+              <a:t>電話</a:t>
+            </a:r>
+            <a:r>
+              <a:rPr lang="en-US" sz="1200" dirty="0"/>
+              <a:t>(</a:t>
+            </a:r>
+            <a:r>
+              <a:rPr lang="en-US" sz="1200" dirty="0" err="1"/>
+              <a:t>收簡訊驗證用</a:t>
+            </a:r>
+            <a:r>
+              <a:rPr lang="en-US" sz="1200" dirty="0"/>
+              <a:t>)：</a:t>
+            </a:r>
+            <a:r>
+              <a:rPr lang="zh-TW" altLang="en-US" sz="1200" dirty="0"/>
+              <a:t> </a:t>
+            </a:r>
+            <a:endParaRPr lang="en-US" sz="1200" dirty="0"/>
+          </a:p>
+        </p:txBody>
+      </p:sp>
+      <p:sp>
+        <p:nvSpPr>
+          <p:cNvPr id="13" name="矩形 12">
+            <a:extLst>
+              <a:ext uri="{FF2B5EF4-FFF2-40B4-BE49-F238E27FC236}">
+                <a16:creationId xmlns:a16="http://schemas.microsoft.com/office/drawing/2014/main" id="{B4C95F38-A2D9-1A4F-1FE3-62B58E63A2FD}"/>
               </a:ext>
             </a:extLst>
           </p:cNvPr>
@@ -5624,8 +7541,8 @@
         </p:nvSpPr>
         <p:spPr>
           <a:xfrm>
-            <a:off x="11397673" y="1948870"/>
-            <a:ext cx="794327" cy="196274"/>
+            <a:off x="1025236" y="-1"/>
+            <a:ext cx="7398328" cy="692727"/>
           </a:xfrm>
           <a:prstGeom prst="rect">
             <a:avLst/>
@@ -5670,116 +7587,10 @@
       </p:sp>
       <p:sp>
         <p:nvSpPr>
-          <p:cNvPr id="7" name="文字方塊 6">
-            <a:extLst>
-              <a:ext uri="{FF2B5EF4-FFF2-40B4-BE49-F238E27FC236}">
-                <a16:creationId xmlns:a16="http://schemas.microsoft.com/office/drawing/2014/main" id="{A7023700-2AC7-768E-D7E5-0935D81F65FE}"/>
-              </a:ext>
-            </a:extLst>
-          </p:cNvPr>
-          <p:cNvSpPr txBox="1"/>
-          <p:nvPr/>
-        </p:nvSpPr>
-        <p:spPr>
-          <a:xfrm>
-            <a:off x="3082995" y="791858"/>
-            <a:ext cx="6078908" cy="646331"/>
-          </a:xfrm>
-          <a:prstGeom prst="rect">
-            <a:avLst/>
-          </a:prstGeom>
-          <a:noFill/>
-        </p:spPr>
-        <p:txBody>
-          <a:bodyPr wrap="none" rtlCol="0">
-            <a:spAutoFit/>
-          </a:bodyPr>
-          <a:lstStyle/>
-          <a:p>
-            <a:r>
-              <a:rPr lang="zh-TW" altLang="en-US" b="1" dirty="0">
-                <a:solidFill>
-                  <a:srgbClr val="FF0000"/>
-                </a:solidFill>
-              </a:rPr>
-              <a:t>申請完成</a:t>
-            </a:r>
-            <a:endParaRPr lang="en-US" altLang="zh-TW" b="1" dirty="0">
-              <a:solidFill>
-                <a:srgbClr val="FF0000"/>
-              </a:solidFill>
-            </a:endParaRPr>
-          </a:p>
-          <a:p>
-            <a:r>
-              <a:rPr lang="zh-TW" altLang="en-US" b="1" dirty="0">
-                <a:solidFill>
-                  <a:srgbClr val="FF0000"/>
-                </a:solidFill>
-              </a:rPr>
-              <a:t>點擊 </a:t>
-            </a:r>
-            <a:r>
-              <a:rPr lang="en-US" altLang="zh-TW" b="1" dirty="0">
-                <a:solidFill>
-                  <a:srgbClr val="FF0000"/>
-                </a:solidFill>
-              </a:rPr>
-              <a:t>“Generate an application mail for approval” </a:t>
-            </a:r>
-            <a:r>
-              <a:rPr lang="zh-TW" altLang="en-US" b="1" dirty="0">
-                <a:solidFill>
-                  <a:srgbClr val="FF0000"/>
-                </a:solidFill>
-              </a:rPr>
-              <a:t>生成信件</a:t>
-            </a:r>
-          </a:p>
-        </p:txBody>
-      </p:sp>
-      <p:pic>
-        <p:nvPicPr>
-          <p:cNvPr id="4" name="圖片 3" descr="一張含有 文字, 行, 字型, 數字 的圖片&#10;&#10;AI 產生的內容可能不正確。">
-            <a:extLst>
-              <a:ext uri="{FF2B5EF4-FFF2-40B4-BE49-F238E27FC236}">
-                <a16:creationId xmlns:a16="http://schemas.microsoft.com/office/drawing/2014/main" id="{00F40EF0-722D-3046-E5A1-6718784222FF}"/>
-              </a:ext>
-            </a:extLst>
-          </p:cNvPr>
-          <p:cNvPicPr>
-            <a:picLocks noChangeAspect="1"/>
-          </p:cNvPicPr>
-          <p:nvPr/>
-        </p:nvPicPr>
-        <p:blipFill>
-          <a:blip r:embed="rId3">
-            <a:extLst>
-              <a:ext uri="{28A0092B-C50C-407E-A947-70E740481C1C}">
-                <a14:useLocalDpi xmlns:a14="http://schemas.microsoft.com/office/drawing/2010/main" val="0"/>
-              </a:ext>
-            </a:extLst>
-          </a:blip>
-          <a:stretch>
-            <a:fillRect/>
-          </a:stretch>
-        </p:blipFill>
-        <p:spPr>
-          <a:xfrm>
-            <a:off x="0" y="3705187"/>
-            <a:ext cx="12192000" cy="2883557"/>
-          </a:xfrm>
-          <a:prstGeom prst="rect">
-            <a:avLst/>
-          </a:prstGeom>
-        </p:spPr>
-      </p:pic>
-      <p:sp>
-        <p:nvSpPr>
-          <p:cNvPr id="8" name="矩形 7">
-            <a:extLst>
-              <a:ext uri="{FF2B5EF4-FFF2-40B4-BE49-F238E27FC236}">
-                <a16:creationId xmlns:a16="http://schemas.microsoft.com/office/drawing/2014/main" id="{D89DCDD3-FE6A-370B-CC43-4C5EBD7C1554}"/>
+          <p:cNvPr id="14" name="矩形 13">
+            <a:extLst>
+              <a:ext uri="{FF2B5EF4-FFF2-40B4-BE49-F238E27FC236}">
+                <a16:creationId xmlns:a16="http://schemas.microsoft.com/office/drawing/2014/main" id="{4C09C0D5-9D7A-6416-BF09-699B7727874A}"/>
               </a:ext>
             </a:extLst>
           </p:cNvPr>
@@ -5788,8 +7599,8 @@
         </p:nvSpPr>
         <p:spPr>
           <a:xfrm>
-            <a:off x="10076873" y="5326330"/>
-            <a:ext cx="2022763" cy="196274"/>
+            <a:off x="1025235" y="3429000"/>
+            <a:ext cx="10141527" cy="792018"/>
           </a:xfrm>
           <a:prstGeom prst="rect">
             <a:avLst/>
@@ -5846,6 +7657,1153 @@
 </file>
 
 <file path=ppt/slides/slide5.xml><?xml version="1.0" encoding="utf-8"?>
+<p:sld xmlns:a="http://schemas.openxmlformats.org/drawingml/2006/main" xmlns:r="http://schemas.openxmlformats.org/officeDocument/2006/relationships" xmlns:p="http://schemas.openxmlformats.org/presentationml/2006/main">
+  <p:cSld>
+    <p:spTree>
+      <p:nvGrpSpPr>
+        <p:cNvPr id="1" name=""/>
+        <p:cNvGrpSpPr/>
+        <p:nvPr/>
+      </p:nvGrpSpPr>
+      <p:grpSpPr>
+        <a:xfrm>
+          <a:off x="0" y="0"/>
+          <a:ext cx="0" cy="0"/>
+          <a:chOff x="0" y="0"/>
+          <a:chExt cx="0" cy="0"/>
+        </a:xfrm>
+      </p:grpSpPr>
+      <p:pic>
+        <p:nvPicPr>
+          <p:cNvPr id="15" name="圖片 14" descr="一張含有 文字, 螢幕擷取畫面, 數字, 軟體 的圖片&#10;&#10;AI 產生的內容可能不正確。">
+            <a:extLst>
+              <a:ext uri="{FF2B5EF4-FFF2-40B4-BE49-F238E27FC236}">
+                <a16:creationId xmlns:a16="http://schemas.microsoft.com/office/drawing/2014/main" id="{C4F46051-4AD9-38D1-7AE3-4077531A57BB}"/>
+              </a:ext>
+            </a:extLst>
+          </p:cNvPr>
+          <p:cNvPicPr>
+            <a:picLocks noChangeAspect="1"/>
+          </p:cNvPicPr>
+          <p:nvPr/>
+        </p:nvPicPr>
+        <p:blipFill>
+          <a:blip r:embed="rId2">
+            <a:extLst>
+              <a:ext uri="{28A0092B-C50C-407E-A947-70E740481C1C}">
+                <a14:useLocalDpi xmlns:a14="http://schemas.microsoft.com/office/drawing/2010/main" val="0"/>
+              </a:ext>
+            </a:extLst>
+          </a:blip>
+          <a:stretch>
+            <a:fillRect/>
+          </a:stretch>
+        </p:blipFill>
+        <p:spPr>
+          <a:xfrm>
+            <a:off x="6554446" y="1687883"/>
+            <a:ext cx="5637554" cy="3499560"/>
+          </a:xfrm>
+          <a:prstGeom prst="rect">
+            <a:avLst/>
+          </a:prstGeom>
+        </p:spPr>
+      </p:pic>
+      <p:sp>
+        <p:nvSpPr>
+          <p:cNvPr id="4" name="文字方塊 3">
+            <a:extLst>
+              <a:ext uri="{FF2B5EF4-FFF2-40B4-BE49-F238E27FC236}">
+                <a16:creationId xmlns:a16="http://schemas.microsoft.com/office/drawing/2014/main" id="{BE868DBD-34EF-6BD5-F5CD-A3082057C3F9}"/>
+              </a:ext>
+            </a:extLst>
+          </p:cNvPr>
+          <p:cNvSpPr txBox="1"/>
+          <p:nvPr/>
+        </p:nvSpPr>
+        <p:spPr>
+          <a:xfrm>
+            <a:off x="5316010" y="157019"/>
+            <a:ext cx="2191562" cy="369332"/>
+          </a:xfrm>
+          <a:prstGeom prst="rect">
+            <a:avLst/>
+          </a:prstGeom>
+          <a:noFill/>
+        </p:spPr>
+        <p:txBody>
+          <a:bodyPr wrap="none" rtlCol="0">
+            <a:spAutoFit/>
+          </a:bodyPr>
+          <a:lstStyle/>
+          <a:p>
+            <a:r>
+              <a:rPr lang="en-US" altLang="zh-TW" dirty="0"/>
+              <a:t>MAC</a:t>
+            </a:r>
+            <a:r>
+              <a:rPr lang="zh-TW" altLang="en-US" dirty="0"/>
+              <a:t>位址查詢示範 </a:t>
+            </a:r>
+            <a:r>
+              <a:rPr lang="en-US" altLang="zh-TW" dirty="0"/>
+              <a:t>1</a:t>
+            </a:r>
+            <a:endParaRPr lang="en-US" dirty="0"/>
+          </a:p>
+        </p:txBody>
+      </p:sp>
+      <p:pic>
+        <p:nvPicPr>
+          <p:cNvPr id="6" name="圖片 5" descr="一張含有 文字, 螢幕擷取畫面, 軟體, 數字 的圖片&#10;&#10;AI 產生的內容可能不正確。">
+            <a:extLst>
+              <a:ext uri="{FF2B5EF4-FFF2-40B4-BE49-F238E27FC236}">
+                <a16:creationId xmlns:a16="http://schemas.microsoft.com/office/drawing/2014/main" id="{4B644728-7F3B-A243-7F31-F79B8B666B56}"/>
+              </a:ext>
+            </a:extLst>
+          </p:cNvPr>
+          <p:cNvPicPr>
+            <a:picLocks noChangeAspect="1"/>
+          </p:cNvPicPr>
+          <p:nvPr/>
+        </p:nvPicPr>
+        <p:blipFill>
+          <a:blip r:embed="rId3">
+            <a:extLst>
+              <a:ext uri="{28A0092B-C50C-407E-A947-70E740481C1C}">
+                <a14:useLocalDpi xmlns:a14="http://schemas.microsoft.com/office/drawing/2010/main" val="0"/>
+              </a:ext>
+            </a:extLst>
+          </a:blip>
+          <a:stretch>
+            <a:fillRect/>
+          </a:stretch>
+        </p:blipFill>
+        <p:spPr>
+          <a:xfrm>
+            <a:off x="0" y="1000728"/>
+            <a:ext cx="6243457" cy="4856544"/>
+          </a:xfrm>
+          <a:prstGeom prst="rect">
+            <a:avLst/>
+          </a:prstGeom>
+        </p:spPr>
+      </p:pic>
+      <p:sp>
+        <p:nvSpPr>
+          <p:cNvPr id="7" name="矩形 6">
+            <a:extLst>
+              <a:ext uri="{FF2B5EF4-FFF2-40B4-BE49-F238E27FC236}">
+                <a16:creationId xmlns:a16="http://schemas.microsoft.com/office/drawing/2014/main" id="{A750548F-1308-4279-AA28-CD14620A8483}"/>
+              </a:ext>
+            </a:extLst>
+          </p:cNvPr>
+          <p:cNvSpPr/>
+          <p:nvPr/>
+        </p:nvSpPr>
+        <p:spPr>
+          <a:xfrm>
+            <a:off x="5177468" y="5412510"/>
+            <a:ext cx="853881" cy="147782"/>
+          </a:xfrm>
+          <a:prstGeom prst="rect">
+            <a:avLst/>
+          </a:prstGeom>
+          <a:noFill/>
+          <a:ln w="19050">
+            <a:solidFill>
+              <a:srgbClr val="FF0000"/>
+            </a:solidFill>
+          </a:ln>
+        </p:spPr>
+        <p:style>
+          <a:lnRef idx="2">
+            <a:schemeClr val="accent1">
+              <a:shade val="15000"/>
+            </a:schemeClr>
+          </a:lnRef>
+          <a:fillRef idx="1">
+            <a:schemeClr val="accent1"/>
+          </a:fillRef>
+          <a:effectRef idx="0">
+            <a:schemeClr val="accent1"/>
+          </a:effectRef>
+          <a:fontRef idx="minor">
+            <a:schemeClr val="lt1"/>
+          </a:fontRef>
+        </p:style>
+        <p:txBody>
+          <a:bodyPr rtlCol="0" anchor="ctr"/>
+          <a:lstStyle/>
+          <a:p>
+            <a:pPr algn="ctr"/>
+            <a:endParaRPr lang="en-US">
+              <a:ln>
+                <a:solidFill>
+                  <a:srgbClr val="FF0000"/>
+                </a:solidFill>
+              </a:ln>
+            </a:endParaRPr>
+          </a:p>
+        </p:txBody>
+      </p:sp>
+      <p:sp>
+        <p:nvSpPr>
+          <p:cNvPr id="8" name="矩形 7">
+            <a:extLst>
+              <a:ext uri="{FF2B5EF4-FFF2-40B4-BE49-F238E27FC236}">
+                <a16:creationId xmlns:a16="http://schemas.microsoft.com/office/drawing/2014/main" id="{9DF7D164-33B5-1E87-FD9A-19676831DFD2}"/>
+              </a:ext>
+            </a:extLst>
+          </p:cNvPr>
+          <p:cNvSpPr/>
+          <p:nvPr/>
+        </p:nvSpPr>
+        <p:spPr>
+          <a:xfrm>
+            <a:off x="106704" y="1893456"/>
+            <a:ext cx="4696205" cy="295562"/>
+          </a:xfrm>
+          <a:prstGeom prst="rect">
+            <a:avLst/>
+          </a:prstGeom>
+          <a:noFill/>
+          <a:ln w="19050">
+            <a:solidFill>
+              <a:srgbClr val="FF0000"/>
+            </a:solidFill>
+          </a:ln>
+        </p:spPr>
+        <p:style>
+          <a:lnRef idx="2">
+            <a:schemeClr val="accent1">
+              <a:shade val="15000"/>
+            </a:schemeClr>
+          </a:lnRef>
+          <a:fillRef idx="1">
+            <a:schemeClr val="accent1"/>
+          </a:fillRef>
+          <a:effectRef idx="0">
+            <a:schemeClr val="accent1"/>
+          </a:effectRef>
+          <a:fontRef idx="minor">
+            <a:schemeClr val="lt1"/>
+          </a:fontRef>
+        </p:style>
+        <p:txBody>
+          <a:bodyPr rtlCol="0" anchor="ctr"/>
+          <a:lstStyle/>
+          <a:p>
+            <a:pPr algn="ctr"/>
+            <a:endParaRPr lang="en-US">
+              <a:ln>
+                <a:solidFill>
+                  <a:srgbClr val="FF0000"/>
+                </a:solidFill>
+              </a:ln>
+            </a:endParaRPr>
+          </a:p>
+        </p:txBody>
+      </p:sp>
+      <p:sp>
+        <p:nvSpPr>
+          <p:cNvPr id="9" name="箭號: 向下 8">
+            <a:extLst>
+              <a:ext uri="{FF2B5EF4-FFF2-40B4-BE49-F238E27FC236}">
+                <a16:creationId xmlns:a16="http://schemas.microsoft.com/office/drawing/2014/main" id="{9B933EB7-8E8F-B576-380C-AFC0C783F741}"/>
+              </a:ext>
+            </a:extLst>
+          </p:cNvPr>
+          <p:cNvSpPr/>
+          <p:nvPr/>
+        </p:nvSpPr>
+        <p:spPr>
+          <a:xfrm flipV="1">
+            <a:off x="5523345" y="5794035"/>
+            <a:ext cx="138546" cy="218838"/>
+          </a:xfrm>
+          <a:prstGeom prst="downArrow">
+            <a:avLst/>
+          </a:prstGeom>
+          <a:solidFill>
+            <a:srgbClr val="FF0000"/>
+          </a:solidFill>
+          <a:ln>
+            <a:noFill/>
+          </a:ln>
+        </p:spPr>
+        <p:style>
+          <a:lnRef idx="2">
+            <a:schemeClr val="accent1">
+              <a:shade val="15000"/>
+            </a:schemeClr>
+          </a:lnRef>
+          <a:fillRef idx="1">
+            <a:schemeClr val="accent1"/>
+          </a:fillRef>
+          <a:effectRef idx="0">
+            <a:schemeClr val="accent1"/>
+          </a:effectRef>
+          <a:fontRef idx="minor">
+            <a:schemeClr val="lt1"/>
+          </a:fontRef>
+        </p:style>
+        <p:txBody>
+          <a:bodyPr rtlCol="0" anchor="ctr"/>
+          <a:lstStyle/>
+          <a:p>
+            <a:pPr algn="ctr"/>
+            <a:endParaRPr lang="en-US"/>
+          </a:p>
+        </p:txBody>
+      </p:sp>
+      <p:sp>
+        <p:nvSpPr>
+          <p:cNvPr id="10" name="文字方塊 9">
+            <a:extLst>
+              <a:ext uri="{FF2B5EF4-FFF2-40B4-BE49-F238E27FC236}">
+                <a16:creationId xmlns:a16="http://schemas.microsoft.com/office/drawing/2014/main" id="{33295D2D-BB5A-CB01-15BF-BA99262B78DB}"/>
+              </a:ext>
+            </a:extLst>
+          </p:cNvPr>
+          <p:cNvSpPr txBox="1"/>
+          <p:nvPr/>
+        </p:nvSpPr>
+        <p:spPr>
+          <a:xfrm>
+            <a:off x="5128538" y="5985021"/>
+            <a:ext cx="902811" cy="307777"/>
+          </a:xfrm>
+          <a:prstGeom prst="rect">
+            <a:avLst/>
+          </a:prstGeom>
+          <a:noFill/>
+        </p:spPr>
+        <p:txBody>
+          <a:bodyPr wrap="none" rtlCol="0">
+            <a:spAutoFit/>
+          </a:bodyPr>
+          <a:lstStyle/>
+          <a:p>
+            <a:r>
+              <a:rPr lang="zh-TW" altLang="en-US" sz="1400" dirty="0"/>
+              <a:t>滑鼠右鍵</a:t>
+            </a:r>
+            <a:endParaRPr lang="en-US" sz="1400" dirty="0"/>
+          </a:p>
+        </p:txBody>
+      </p:sp>
+      <p:sp>
+        <p:nvSpPr>
+          <p:cNvPr id="13" name="箭號: 向下 12">
+            <a:extLst>
+              <a:ext uri="{FF2B5EF4-FFF2-40B4-BE49-F238E27FC236}">
+                <a16:creationId xmlns:a16="http://schemas.microsoft.com/office/drawing/2014/main" id="{FA1C9419-5620-13C9-75D6-435ADF044896}"/>
+              </a:ext>
+            </a:extLst>
+          </p:cNvPr>
+          <p:cNvSpPr/>
+          <p:nvPr/>
+        </p:nvSpPr>
+        <p:spPr>
+          <a:xfrm rot="16200000">
+            <a:off x="6135937" y="3276890"/>
+            <a:ext cx="455825" cy="270356"/>
+          </a:xfrm>
+          <a:prstGeom prst="downArrow">
+            <a:avLst/>
+          </a:prstGeom>
+          <a:solidFill>
+            <a:srgbClr val="FF0000"/>
+          </a:solidFill>
+          <a:ln>
+            <a:noFill/>
+          </a:ln>
+        </p:spPr>
+        <p:style>
+          <a:lnRef idx="2">
+            <a:schemeClr val="accent1">
+              <a:shade val="15000"/>
+            </a:schemeClr>
+          </a:lnRef>
+          <a:fillRef idx="1">
+            <a:schemeClr val="accent1"/>
+          </a:fillRef>
+          <a:effectRef idx="0">
+            <a:schemeClr val="accent1"/>
+          </a:effectRef>
+          <a:fontRef idx="minor">
+            <a:schemeClr val="lt1"/>
+          </a:fontRef>
+        </p:style>
+        <p:txBody>
+          <a:bodyPr rtlCol="0" anchor="ctr"/>
+          <a:lstStyle/>
+          <a:p>
+            <a:pPr algn="ctr"/>
+            <a:endParaRPr lang="en-US"/>
+          </a:p>
+        </p:txBody>
+      </p:sp>
+      <p:cxnSp>
+        <p:nvCxnSpPr>
+          <p:cNvPr id="17" name="直線接點 16">
+            <a:extLst>
+              <a:ext uri="{FF2B5EF4-FFF2-40B4-BE49-F238E27FC236}">
+                <a16:creationId xmlns:a16="http://schemas.microsoft.com/office/drawing/2014/main" id="{EB6DF5A5-D995-5A0D-33D6-669CD4FF7DC4}"/>
+              </a:ext>
+            </a:extLst>
+          </p:cNvPr>
+          <p:cNvCxnSpPr>
+            <a:cxnSpLocks/>
+          </p:cNvCxnSpPr>
+          <p:nvPr/>
+        </p:nvCxnSpPr>
+        <p:spPr>
+          <a:xfrm>
+            <a:off x="7767782" y="5098472"/>
+            <a:ext cx="701963" cy="0"/>
+          </a:xfrm>
+          <a:prstGeom prst="line">
+            <a:avLst/>
+          </a:prstGeom>
+          <a:ln w="28575">
+            <a:solidFill>
+              <a:srgbClr val="FF0000"/>
+            </a:solidFill>
+          </a:ln>
+        </p:spPr>
+        <p:style>
+          <a:lnRef idx="1">
+            <a:schemeClr val="accent1"/>
+          </a:lnRef>
+          <a:fillRef idx="0">
+            <a:schemeClr val="accent1"/>
+          </a:fillRef>
+          <a:effectRef idx="0">
+            <a:schemeClr val="accent1"/>
+          </a:effectRef>
+          <a:fontRef idx="minor">
+            <a:schemeClr val="tx1"/>
+          </a:fontRef>
+        </p:style>
+      </p:cxnSp>
+    </p:spTree>
+    <p:extLst>
+      <p:ext uri="{BB962C8B-B14F-4D97-AF65-F5344CB8AC3E}">
+        <p14:creationId xmlns:p14="http://schemas.microsoft.com/office/powerpoint/2010/main" val="127458158"/>
+      </p:ext>
+    </p:extLst>
+  </p:cSld>
+  <p:clrMapOvr>
+    <a:masterClrMapping/>
+  </p:clrMapOvr>
+</p:sld>
+</file>
+
+<file path=ppt/slides/slide6.xml><?xml version="1.0" encoding="utf-8"?>
+<p:sld xmlns:a="http://schemas.openxmlformats.org/drawingml/2006/main" xmlns:r="http://schemas.openxmlformats.org/officeDocument/2006/relationships" xmlns:p="http://schemas.openxmlformats.org/presentationml/2006/main">
+  <p:cSld>
+    <p:spTree>
+      <p:nvGrpSpPr>
+        <p:cNvPr id="1" name="">
+          <a:extLst>
+            <a:ext uri="{FF2B5EF4-FFF2-40B4-BE49-F238E27FC236}">
+              <a16:creationId xmlns:a16="http://schemas.microsoft.com/office/drawing/2014/main" id="{EA2D5429-9661-0A1F-156B-71579F864F17}"/>
+            </a:ext>
+          </a:extLst>
+        </p:cNvPr>
+        <p:cNvGrpSpPr/>
+        <p:nvPr/>
+      </p:nvGrpSpPr>
+      <p:grpSpPr>
+        <a:xfrm>
+          <a:off x="0" y="0"/>
+          <a:ext cx="0" cy="0"/>
+          <a:chOff x="0" y="0"/>
+          <a:chExt cx="0" cy="0"/>
+        </a:xfrm>
+      </p:grpSpPr>
+      <p:sp>
+        <p:nvSpPr>
+          <p:cNvPr id="4" name="文字方塊 3">
+            <a:extLst>
+              <a:ext uri="{FF2B5EF4-FFF2-40B4-BE49-F238E27FC236}">
+                <a16:creationId xmlns:a16="http://schemas.microsoft.com/office/drawing/2014/main" id="{73958309-0D0E-5239-6893-D35EED47139C}"/>
+              </a:ext>
+            </a:extLst>
+          </p:cNvPr>
+          <p:cNvSpPr txBox="1"/>
+          <p:nvPr/>
+        </p:nvSpPr>
+        <p:spPr>
+          <a:xfrm>
+            <a:off x="5316010" y="157019"/>
+            <a:ext cx="2191562" cy="369332"/>
+          </a:xfrm>
+          <a:prstGeom prst="rect">
+            <a:avLst/>
+          </a:prstGeom>
+          <a:noFill/>
+        </p:spPr>
+        <p:txBody>
+          <a:bodyPr wrap="none" rtlCol="0">
+            <a:spAutoFit/>
+          </a:bodyPr>
+          <a:lstStyle/>
+          <a:p>
+            <a:r>
+              <a:rPr lang="en-US" altLang="zh-TW" dirty="0"/>
+              <a:t>MAC</a:t>
+            </a:r>
+            <a:r>
+              <a:rPr lang="zh-TW" altLang="en-US" dirty="0"/>
+              <a:t>位址查詢示範 </a:t>
+            </a:r>
+            <a:r>
+              <a:rPr lang="en-US" altLang="zh-TW" dirty="0"/>
+              <a:t>2</a:t>
+            </a:r>
+            <a:endParaRPr lang="en-US" dirty="0"/>
+          </a:p>
+        </p:txBody>
+      </p:sp>
+      <p:pic>
+        <p:nvPicPr>
+          <p:cNvPr id="3" name="圖片 2" descr="一張含有 文字, 螢幕擷取畫面, 字型, 數字 的圖片&#10;&#10;AI 產生的內容可能不正確。">
+            <a:extLst>
+              <a:ext uri="{FF2B5EF4-FFF2-40B4-BE49-F238E27FC236}">
+                <a16:creationId xmlns:a16="http://schemas.microsoft.com/office/drawing/2014/main" id="{AC071066-C4F3-4F0C-50C2-A5D52194328F}"/>
+              </a:ext>
+            </a:extLst>
+          </p:cNvPr>
+          <p:cNvPicPr>
+            <a:picLocks noChangeAspect="1"/>
+          </p:cNvPicPr>
+          <p:nvPr/>
+        </p:nvPicPr>
+        <p:blipFill>
+          <a:blip r:embed="rId2">
+            <a:extLst>
+              <a:ext uri="{28A0092B-C50C-407E-A947-70E740481C1C}">
+                <a14:useLocalDpi xmlns:a14="http://schemas.microsoft.com/office/drawing/2010/main" val="0"/>
+              </a:ext>
+            </a:extLst>
+          </a:blip>
+          <a:stretch>
+            <a:fillRect/>
+          </a:stretch>
+        </p:blipFill>
+        <p:spPr>
+          <a:xfrm>
+            <a:off x="2016467" y="2481130"/>
+            <a:ext cx="3772426" cy="1895740"/>
+          </a:xfrm>
+          <a:prstGeom prst="rect">
+            <a:avLst/>
+          </a:prstGeom>
+        </p:spPr>
+      </p:pic>
+      <p:sp>
+        <p:nvSpPr>
+          <p:cNvPr id="5" name="文字方塊 4">
+            <a:extLst>
+              <a:ext uri="{FF2B5EF4-FFF2-40B4-BE49-F238E27FC236}">
+                <a16:creationId xmlns:a16="http://schemas.microsoft.com/office/drawing/2014/main" id="{ED30AFDA-23A1-61E5-1F22-B909CA709AC5}"/>
+              </a:ext>
+            </a:extLst>
+          </p:cNvPr>
+          <p:cNvSpPr txBox="1"/>
+          <p:nvPr/>
+        </p:nvSpPr>
+        <p:spPr>
+          <a:xfrm>
+            <a:off x="2482643" y="4488730"/>
+            <a:ext cx="2945871" cy="523220"/>
+          </a:xfrm>
+          <a:prstGeom prst="rect">
+            <a:avLst/>
+          </a:prstGeom>
+          <a:noFill/>
+        </p:spPr>
+        <p:txBody>
+          <a:bodyPr wrap="none" rtlCol="0">
+            <a:spAutoFit/>
+          </a:bodyPr>
+          <a:lstStyle/>
+          <a:p>
+            <a:r>
+              <a:rPr lang="zh-TW" altLang="en-US" sz="1400" dirty="0"/>
+              <a:t>鍵盤案 </a:t>
+            </a:r>
+            <a:r>
+              <a:rPr lang="en-US" altLang="zh-TW" sz="1400" dirty="0"/>
+              <a:t>“</a:t>
+            </a:r>
+            <a:r>
+              <a:rPr lang="en-US" sz="1400" dirty="0"/>
+              <a:t>Win</a:t>
+            </a:r>
+            <a:r>
+              <a:rPr lang="en-US" altLang="zh-TW" sz="1400" dirty="0"/>
+              <a:t>“ </a:t>
+            </a:r>
+            <a:r>
+              <a:rPr lang="en-US" sz="1400" dirty="0"/>
+              <a:t>+ </a:t>
+            </a:r>
+            <a:r>
+              <a:rPr lang="en-US" altLang="zh-TW" sz="1400" dirty="0"/>
+              <a:t>“</a:t>
+            </a:r>
+            <a:r>
+              <a:rPr lang="en-US" sz="1400" dirty="0"/>
+              <a:t>R</a:t>
+            </a:r>
+            <a:r>
+              <a:rPr lang="en-US" altLang="zh-TW" sz="1400" dirty="0"/>
+              <a:t>”</a:t>
+            </a:r>
+            <a:r>
+              <a:rPr lang="zh-TW" altLang="en-US" sz="1400" dirty="0"/>
+              <a:t>，開啟執行功能</a:t>
+            </a:r>
+            <a:endParaRPr lang="en-US" altLang="zh-TW" sz="1400" dirty="0"/>
+          </a:p>
+          <a:p>
+            <a:r>
+              <a:rPr lang="zh-TW" altLang="en-US" sz="1400" dirty="0"/>
+              <a:t>輸入 </a:t>
+            </a:r>
+            <a:r>
+              <a:rPr lang="en-US" altLang="zh-TW" sz="1400" dirty="0"/>
+              <a:t>“CMD”</a:t>
+            </a:r>
+            <a:r>
+              <a:rPr lang="zh-TW" altLang="en-US" sz="1400" dirty="0"/>
+              <a:t>，開啟</a:t>
+            </a:r>
+            <a:r>
+              <a:rPr lang="zh-TW" altLang="en-US" sz="1400" b="0" i="0" dirty="0">
+                <a:solidFill>
+                  <a:srgbClr val="001D35"/>
+                </a:solidFill>
+                <a:effectLst/>
+                <a:latin typeface="Arial" panose="020B0604020202020204" pitchFamily="34" charset="0"/>
+              </a:rPr>
+              <a:t>命令提示字元</a:t>
+            </a:r>
+            <a:endParaRPr lang="en-US" sz="1400" dirty="0"/>
+          </a:p>
+        </p:txBody>
+      </p:sp>
+      <p:pic>
+        <p:nvPicPr>
+          <p:cNvPr id="14" name="圖片 13" descr="一張含有 文字, 螢幕擷取畫面, 黑與白 的圖片&#10;&#10;AI 產生的內容可能不正確。">
+            <a:extLst>
+              <a:ext uri="{FF2B5EF4-FFF2-40B4-BE49-F238E27FC236}">
+                <a16:creationId xmlns:a16="http://schemas.microsoft.com/office/drawing/2014/main" id="{21E55F01-1E22-B991-F44C-C2A16CE14947}"/>
+              </a:ext>
+            </a:extLst>
+          </p:cNvPr>
+          <p:cNvPicPr>
+            <a:picLocks noChangeAspect="1"/>
+          </p:cNvPicPr>
+          <p:nvPr/>
+        </p:nvPicPr>
+        <p:blipFill>
+          <a:blip r:embed="rId3">
+            <a:extLst>
+              <a:ext uri="{28A0092B-C50C-407E-A947-70E740481C1C}">
+                <a14:useLocalDpi xmlns:a14="http://schemas.microsoft.com/office/drawing/2010/main" val="0"/>
+              </a:ext>
+            </a:extLst>
+          </a:blip>
+          <a:stretch>
+            <a:fillRect/>
+          </a:stretch>
+        </p:blipFill>
+        <p:spPr>
+          <a:xfrm>
+            <a:off x="6403108" y="1077107"/>
+            <a:ext cx="5040747" cy="4284249"/>
+          </a:xfrm>
+          <a:prstGeom prst="rect">
+            <a:avLst/>
+          </a:prstGeom>
+        </p:spPr>
+      </p:pic>
+      <p:sp>
+        <p:nvSpPr>
+          <p:cNvPr id="16" name="文字方塊 15">
+            <a:extLst>
+              <a:ext uri="{FF2B5EF4-FFF2-40B4-BE49-F238E27FC236}">
+                <a16:creationId xmlns:a16="http://schemas.microsoft.com/office/drawing/2014/main" id="{DFE022FA-2598-2899-C508-627EA2A3A7D8}"/>
+              </a:ext>
+            </a:extLst>
+          </p:cNvPr>
+          <p:cNvSpPr txBox="1"/>
+          <p:nvPr/>
+        </p:nvSpPr>
+        <p:spPr>
+          <a:xfrm>
+            <a:off x="7598887" y="5361356"/>
+            <a:ext cx="2649187" cy="307777"/>
+          </a:xfrm>
+          <a:prstGeom prst="rect">
+            <a:avLst/>
+          </a:prstGeom>
+          <a:noFill/>
+        </p:spPr>
+        <p:txBody>
+          <a:bodyPr wrap="none" rtlCol="0">
+            <a:spAutoFit/>
+          </a:bodyPr>
+          <a:lstStyle/>
+          <a:p>
+            <a:r>
+              <a:rPr lang="zh-TW" altLang="en-US" sz="1400" dirty="0"/>
+              <a:t>輸入 </a:t>
+            </a:r>
+            <a:r>
+              <a:rPr lang="en-US" altLang="zh-TW" sz="1400" dirty="0"/>
+              <a:t>“ipconfig –all”</a:t>
+            </a:r>
+            <a:r>
+              <a:rPr lang="zh-TW" altLang="en-US" sz="1400" dirty="0"/>
+              <a:t>，查詢</a:t>
+            </a:r>
+            <a:r>
+              <a:rPr lang="en-US" altLang="zh-TW" sz="1400" dirty="0"/>
+              <a:t>IP</a:t>
+            </a:r>
+            <a:r>
+              <a:rPr lang="zh-TW" altLang="en-US" sz="1400" dirty="0"/>
+              <a:t>資訊</a:t>
+            </a:r>
+            <a:endParaRPr lang="en-US" sz="1400" dirty="0"/>
+          </a:p>
+        </p:txBody>
+      </p:sp>
+      <p:cxnSp>
+        <p:nvCxnSpPr>
+          <p:cNvPr id="18" name="直線接點 17">
+            <a:extLst>
+              <a:ext uri="{FF2B5EF4-FFF2-40B4-BE49-F238E27FC236}">
+                <a16:creationId xmlns:a16="http://schemas.microsoft.com/office/drawing/2014/main" id="{BC15D569-1A49-0E15-959F-2154DFDCC47B}"/>
+              </a:ext>
+            </a:extLst>
+          </p:cNvPr>
+          <p:cNvCxnSpPr>
+            <a:cxnSpLocks/>
+          </p:cNvCxnSpPr>
+          <p:nvPr/>
+        </p:nvCxnSpPr>
+        <p:spPr>
+          <a:xfrm>
+            <a:off x="8811491" y="3112654"/>
+            <a:ext cx="1080654" cy="0"/>
+          </a:xfrm>
+          <a:prstGeom prst="line">
+            <a:avLst/>
+          </a:prstGeom>
+          <a:ln w="28575">
+            <a:solidFill>
+              <a:srgbClr val="FF0000"/>
+            </a:solidFill>
+          </a:ln>
+        </p:spPr>
+        <p:style>
+          <a:lnRef idx="1">
+            <a:schemeClr val="accent1"/>
+          </a:lnRef>
+          <a:fillRef idx="0">
+            <a:schemeClr val="accent1"/>
+          </a:fillRef>
+          <a:effectRef idx="0">
+            <a:schemeClr val="accent1"/>
+          </a:effectRef>
+          <a:fontRef idx="minor">
+            <a:schemeClr val="tx1"/>
+          </a:fontRef>
+        </p:style>
+      </p:cxnSp>
+    </p:spTree>
+    <p:extLst>
+      <p:ext uri="{BB962C8B-B14F-4D97-AF65-F5344CB8AC3E}">
+        <p14:creationId xmlns:p14="http://schemas.microsoft.com/office/powerpoint/2010/main" val="1361811964"/>
+      </p:ext>
+    </p:extLst>
+  </p:cSld>
+  <p:clrMapOvr>
+    <a:masterClrMapping/>
+  </p:clrMapOvr>
+</p:sld>
+</file>
+
+<file path=ppt/slides/slide7.xml><?xml version="1.0" encoding="utf-8"?>
+<p:sld xmlns:a="http://schemas.openxmlformats.org/drawingml/2006/main" xmlns:r="http://schemas.openxmlformats.org/officeDocument/2006/relationships" xmlns:p="http://schemas.openxmlformats.org/presentationml/2006/main">
+  <p:cSld>
+    <p:spTree>
+      <p:nvGrpSpPr>
+        <p:cNvPr id="1" name="">
+          <a:extLst>
+            <a:ext uri="{FF2B5EF4-FFF2-40B4-BE49-F238E27FC236}">
+              <a16:creationId xmlns:a16="http://schemas.microsoft.com/office/drawing/2014/main" id="{1BAF1899-1C34-6C87-1B84-AA7D6CB1039E}"/>
+            </a:ext>
+          </a:extLst>
+        </p:cNvPr>
+        <p:cNvGrpSpPr/>
+        <p:nvPr/>
+      </p:nvGrpSpPr>
+      <p:grpSpPr>
+        <a:xfrm>
+          <a:off x="0" y="0"/>
+          <a:ext cx="0" cy="0"/>
+          <a:chOff x="0" y="0"/>
+          <a:chExt cx="0" cy="0"/>
+        </a:xfrm>
+      </p:grpSpPr>
+      <p:sp>
+        <p:nvSpPr>
+          <p:cNvPr id="7" name="文字方塊 6">
+            <a:extLst>
+              <a:ext uri="{FF2B5EF4-FFF2-40B4-BE49-F238E27FC236}">
+                <a16:creationId xmlns:a16="http://schemas.microsoft.com/office/drawing/2014/main" id="{8378B42D-185C-F8D8-B9AF-3DFAB7A909E8}"/>
+              </a:ext>
+            </a:extLst>
+          </p:cNvPr>
+          <p:cNvSpPr txBox="1"/>
+          <p:nvPr/>
+        </p:nvSpPr>
+        <p:spPr>
+          <a:xfrm>
+            <a:off x="2606904" y="269256"/>
+            <a:ext cx="6771405" cy="646331"/>
+          </a:xfrm>
+          <a:prstGeom prst="rect">
+            <a:avLst/>
+          </a:prstGeom>
+          <a:noFill/>
+        </p:spPr>
+        <p:txBody>
+          <a:bodyPr wrap="none" rtlCol="0">
+            <a:spAutoFit/>
+          </a:bodyPr>
+          <a:lstStyle/>
+          <a:p>
+            <a:r>
+              <a:rPr lang="zh-TW" altLang="en-US" b="1" dirty="0">
+                <a:solidFill>
+                  <a:srgbClr val="FF0000"/>
+                </a:solidFill>
+              </a:rPr>
+              <a:t>申請完成後，點擊最左上</a:t>
+            </a:r>
+            <a:r>
+              <a:rPr lang="en-US" altLang="zh-TW" b="1" dirty="0">
+                <a:solidFill>
+                  <a:srgbClr val="FF0000"/>
+                </a:solidFill>
+              </a:rPr>
+              <a:t>/</a:t>
+            </a:r>
+            <a:r>
+              <a:rPr lang="zh-TW" altLang="en-US" b="1" dirty="0">
+                <a:solidFill>
+                  <a:srgbClr val="FF0000"/>
+                </a:solidFill>
+              </a:rPr>
+              <a:t>下方的搜尋功能，尋找自己的申請紀錄</a:t>
+            </a:r>
+            <a:endParaRPr lang="en-US" altLang="zh-TW" b="1" dirty="0">
+              <a:solidFill>
+                <a:srgbClr val="FF0000"/>
+              </a:solidFill>
+            </a:endParaRPr>
+          </a:p>
+          <a:p>
+            <a:r>
+              <a:rPr lang="zh-TW" altLang="en-US" b="1" dirty="0">
+                <a:solidFill>
+                  <a:srgbClr val="FF0000"/>
+                </a:solidFill>
+              </a:rPr>
+              <a:t>並點擊 </a:t>
+            </a:r>
+            <a:r>
+              <a:rPr lang="en-US" altLang="zh-TW" b="1" dirty="0">
+                <a:solidFill>
+                  <a:srgbClr val="FF0000"/>
+                </a:solidFill>
+              </a:rPr>
+              <a:t>“Generate an application mail for approval” </a:t>
+            </a:r>
+            <a:r>
+              <a:rPr lang="zh-TW" altLang="en-US" b="1" dirty="0">
+                <a:solidFill>
+                  <a:srgbClr val="FF0000"/>
+                </a:solidFill>
+              </a:rPr>
+              <a:t>下載生成的信件</a:t>
+            </a:r>
+          </a:p>
+        </p:txBody>
+      </p:sp>
+      <p:pic>
+        <p:nvPicPr>
+          <p:cNvPr id="4" name="圖片 3" descr="一張含有 文字, 行, 字型, 數字 的圖片&#10;&#10;AI 產生的內容可能不正確。">
+            <a:extLst>
+              <a:ext uri="{FF2B5EF4-FFF2-40B4-BE49-F238E27FC236}">
+                <a16:creationId xmlns:a16="http://schemas.microsoft.com/office/drawing/2014/main" id="{60CB0F82-0EF0-4911-FD36-5992CA246815}"/>
+              </a:ext>
+            </a:extLst>
+          </p:cNvPr>
+          <p:cNvPicPr>
+            <a:picLocks noChangeAspect="1"/>
+          </p:cNvPicPr>
+          <p:nvPr/>
+        </p:nvPicPr>
+        <p:blipFill>
+          <a:blip r:embed="rId2">
+            <a:extLst>
+              <a:ext uri="{28A0092B-C50C-407E-A947-70E740481C1C}">
+                <a14:useLocalDpi xmlns:a14="http://schemas.microsoft.com/office/drawing/2010/main" val="0"/>
+              </a:ext>
+            </a:extLst>
+          </a:blip>
+          <a:stretch>
+            <a:fillRect/>
+          </a:stretch>
+        </p:blipFill>
+        <p:spPr>
+          <a:xfrm>
+            <a:off x="0" y="3705187"/>
+            <a:ext cx="12192000" cy="2883557"/>
+          </a:xfrm>
+          <a:prstGeom prst="rect">
+            <a:avLst/>
+          </a:prstGeom>
+        </p:spPr>
+      </p:pic>
+      <p:sp>
+        <p:nvSpPr>
+          <p:cNvPr id="8" name="矩形 7">
+            <a:extLst>
+              <a:ext uri="{FF2B5EF4-FFF2-40B4-BE49-F238E27FC236}">
+                <a16:creationId xmlns:a16="http://schemas.microsoft.com/office/drawing/2014/main" id="{BE7925B8-EF50-4AFE-2186-6BE0B6F330D6}"/>
+              </a:ext>
+            </a:extLst>
+          </p:cNvPr>
+          <p:cNvSpPr/>
+          <p:nvPr/>
+        </p:nvSpPr>
+        <p:spPr>
+          <a:xfrm>
+            <a:off x="10076873" y="5326330"/>
+            <a:ext cx="2022763" cy="196274"/>
+          </a:xfrm>
+          <a:prstGeom prst="rect">
+            <a:avLst/>
+          </a:prstGeom>
+          <a:noFill/>
+          <a:ln w="38100">
+            <a:solidFill>
+              <a:srgbClr val="FF0000"/>
+            </a:solidFill>
+          </a:ln>
+        </p:spPr>
+        <p:style>
+          <a:lnRef idx="2">
+            <a:schemeClr val="accent1">
+              <a:shade val="15000"/>
+            </a:schemeClr>
+          </a:lnRef>
+          <a:fillRef idx="1">
+            <a:schemeClr val="accent1"/>
+          </a:fillRef>
+          <a:effectRef idx="0">
+            <a:schemeClr val="accent1"/>
+          </a:effectRef>
+          <a:fontRef idx="minor">
+            <a:schemeClr val="lt1"/>
+          </a:fontRef>
+        </p:style>
+        <p:txBody>
+          <a:bodyPr rtlCol="0" anchor="ctr"/>
+          <a:lstStyle/>
+          <a:p>
+            <a:pPr algn="ctr"/>
+            <a:endParaRPr lang="en-US">
+              <a:ln>
+                <a:solidFill>
+                  <a:srgbClr val="FF0000"/>
+                </a:solidFill>
+              </a:ln>
+            </a:endParaRPr>
+          </a:p>
+        </p:txBody>
+      </p:sp>
+      <p:pic>
+        <p:nvPicPr>
+          <p:cNvPr id="12" name="圖片 11" descr="一張含有 文字, 螢幕擷取畫面, 字型, 行 的圖片&#10;&#10;AI 產生的內容可能不正確。">
+            <a:extLst>
+              <a:ext uri="{FF2B5EF4-FFF2-40B4-BE49-F238E27FC236}">
+                <a16:creationId xmlns:a16="http://schemas.microsoft.com/office/drawing/2014/main" id="{CFDC95ED-3CBE-D2F3-1F85-A87B4411BAFD}"/>
+              </a:ext>
+            </a:extLst>
+          </p:cNvPr>
+          <p:cNvPicPr>
+            <a:picLocks noChangeAspect="1"/>
+          </p:cNvPicPr>
+          <p:nvPr/>
+        </p:nvPicPr>
+        <p:blipFill>
+          <a:blip r:embed="rId3">
+            <a:extLst>
+              <a:ext uri="{28A0092B-C50C-407E-A947-70E740481C1C}">
+                <a14:useLocalDpi xmlns:a14="http://schemas.microsoft.com/office/drawing/2010/main" val="0"/>
+              </a:ext>
+            </a:extLst>
+          </a:blip>
+          <a:stretch>
+            <a:fillRect/>
+          </a:stretch>
+        </p:blipFill>
+        <p:spPr>
+          <a:xfrm>
+            <a:off x="3447680" y="1276126"/>
+            <a:ext cx="5296639" cy="1876687"/>
+          </a:xfrm>
+          <a:prstGeom prst="rect">
+            <a:avLst/>
+          </a:prstGeom>
+        </p:spPr>
+      </p:pic>
+      <p:sp>
+        <p:nvSpPr>
+          <p:cNvPr id="13" name="矩形 12">
+            <a:extLst>
+              <a:ext uri="{FF2B5EF4-FFF2-40B4-BE49-F238E27FC236}">
+                <a16:creationId xmlns:a16="http://schemas.microsoft.com/office/drawing/2014/main" id="{096ED103-F1C8-4CC3-DCA8-95825BA66EC5}"/>
+              </a:ext>
+            </a:extLst>
+          </p:cNvPr>
+          <p:cNvSpPr/>
+          <p:nvPr/>
+        </p:nvSpPr>
+        <p:spPr>
+          <a:xfrm>
+            <a:off x="3895583" y="1276126"/>
+            <a:ext cx="463982" cy="269347"/>
+          </a:xfrm>
+          <a:prstGeom prst="rect">
+            <a:avLst/>
+          </a:prstGeom>
+          <a:noFill/>
+          <a:ln w="38100">
+            <a:solidFill>
+              <a:srgbClr val="FF0000"/>
+            </a:solidFill>
+          </a:ln>
+        </p:spPr>
+        <p:style>
+          <a:lnRef idx="2">
+            <a:schemeClr val="accent1">
+              <a:shade val="15000"/>
+            </a:schemeClr>
+          </a:lnRef>
+          <a:fillRef idx="1">
+            <a:schemeClr val="accent1"/>
+          </a:fillRef>
+          <a:effectRef idx="0">
+            <a:schemeClr val="accent1"/>
+          </a:effectRef>
+          <a:fontRef idx="minor">
+            <a:schemeClr val="lt1"/>
+          </a:fontRef>
+        </p:style>
+        <p:txBody>
+          <a:bodyPr rtlCol="0" anchor="ctr"/>
+          <a:lstStyle/>
+          <a:p>
+            <a:pPr algn="ctr"/>
+            <a:endParaRPr lang="en-US">
+              <a:ln>
+                <a:solidFill>
+                  <a:srgbClr val="FF0000"/>
+                </a:solidFill>
+              </a:ln>
+            </a:endParaRPr>
+          </a:p>
+        </p:txBody>
+      </p:sp>
+      <p:sp>
+        <p:nvSpPr>
+          <p:cNvPr id="14" name="箭號: 向下 13">
+            <a:extLst>
+              <a:ext uri="{FF2B5EF4-FFF2-40B4-BE49-F238E27FC236}">
+                <a16:creationId xmlns:a16="http://schemas.microsoft.com/office/drawing/2014/main" id="{956EE29F-B69E-795C-5D2D-4AF452BE3902}"/>
+              </a:ext>
+            </a:extLst>
+          </p:cNvPr>
+          <p:cNvSpPr/>
+          <p:nvPr/>
+        </p:nvSpPr>
+        <p:spPr>
+          <a:xfrm>
+            <a:off x="5868086" y="3276890"/>
+            <a:ext cx="455825" cy="270356"/>
+          </a:xfrm>
+          <a:prstGeom prst="downArrow">
+            <a:avLst/>
+          </a:prstGeom>
+          <a:solidFill>
+            <a:srgbClr val="FF0000"/>
+          </a:solidFill>
+          <a:ln>
+            <a:noFill/>
+          </a:ln>
+        </p:spPr>
+        <p:style>
+          <a:lnRef idx="2">
+            <a:schemeClr val="accent1">
+              <a:shade val="15000"/>
+            </a:schemeClr>
+          </a:lnRef>
+          <a:fillRef idx="1">
+            <a:schemeClr val="accent1"/>
+          </a:fillRef>
+          <a:effectRef idx="0">
+            <a:schemeClr val="accent1"/>
+          </a:effectRef>
+          <a:fontRef idx="minor">
+            <a:schemeClr val="lt1"/>
+          </a:fontRef>
+        </p:style>
+        <p:txBody>
+          <a:bodyPr rtlCol="0" anchor="ctr"/>
+          <a:lstStyle/>
+          <a:p>
+            <a:pPr algn="ctr"/>
+            <a:endParaRPr lang="en-US"/>
+          </a:p>
+        </p:txBody>
+      </p:sp>
+    </p:spTree>
+    <p:extLst>
+      <p:ext uri="{BB962C8B-B14F-4D97-AF65-F5344CB8AC3E}">
+        <p14:creationId xmlns:p14="http://schemas.microsoft.com/office/powerpoint/2010/main" val="627336602"/>
+      </p:ext>
+    </p:extLst>
+  </p:cSld>
+  <p:clrMapOvr>
+    <a:masterClrMapping/>
+  </p:clrMapOvr>
+</p:sld>
+</file>
+
+<file path=ppt/slides/slide8.xml><?xml version="1.0" encoding="utf-8"?>
 <p:sld xmlns:a="http://schemas.openxmlformats.org/drawingml/2006/main" xmlns:r="http://schemas.openxmlformats.org/officeDocument/2006/relationships" xmlns:p="http://schemas.openxmlformats.org/presentationml/2006/main">
   <p:cSld>
     <p:spTree>
@@ -5883,7 +8841,7 @@
         <p:spPr>
           <a:xfrm>
             <a:off x="4041591" y="87546"/>
-            <a:ext cx="4108817" cy="646331"/>
+            <a:ext cx="4155689" cy="646331"/>
           </a:xfrm>
           <a:prstGeom prst="rect">
             <a:avLst/>
@@ -5917,23 +8875,7 @@
                   <a:srgbClr val="FF0000"/>
                 </a:solidFill>
               </a:rPr>
-              <a:t>使用</a:t>
-            </a:r>
-            <a:r>
-              <a:rPr lang="en-US" altLang="zh-TW" b="1" dirty="0">
-                <a:solidFill>
-                  <a:srgbClr val="FF0000"/>
-                </a:solidFill>
-              </a:rPr>
-              <a:t>chrome</a:t>
-            </a:r>
-            <a:r>
-              <a:rPr lang="zh-TW" altLang="en-US" b="1" dirty="0">
-                <a:solidFill>
-                  <a:srgbClr val="FF0000"/>
-                </a:solidFill>
-              </a:rPr>
-              <a:t>或</a:t>
+              <a:t>改成使用</a:t>
             </a:r>
             <a:r>
               <a:rPr lang="en-US" altLang="zh-TW" b="1" dirty="0">
@@ -5949,7 +8891,7 @@
                   <a:srgbClr val="FF0000"/>
                 </a:solidFill>
               </a:rPr>
-              <a:t>開啟，並下載</a:t>
+              <a:t>開啟</a:t>
             </a:r>
           </a:p>
         </p:txBody>
@@ -6200,159 +9142,12 @@
           </a:p>
         </p:txBody>
       </p:sp>
-    </p:spTree>
-    <p:extLst>
-      <p:ext uri="{BB962C8B-B14F-4D97-AF65-F5344CB8AC3E}">
-        <p14:creationId xmlns:p14="http://schemas.microsoft.com/office/powerpoint/2010/main" val="3923481285"/>
-      </p:ext>
-    </p:extLst>
-  </p:cSld>
-  <p:clrMapOvr>
-    <a:masterClrMapping/>
-  </p:clrMapOvr>
-</p:sld>
-</file>
-
-<file path=ppt/slides/slide6.xml><?xml version="1.0" encoding="utf-8"?>
-<p:sld xmlns:a="http://schemas.openxmlformats.org/drawingml/2006/main" xmlns:r="http://schemas.openxmlformats.org/officeDocument/2006/relationships" xmlns:p="http://schemas.openxmlformats.org/presentationml/2006/main">
-  <p:cSld>
-    <p:spTree>
-      <p:nvGrpSpPr>
-        <p:cNvPr id="1" name="">
-          <a:extLst>
-            <a:ext uri="{FF2B5EF4-FFF2-40B4-BE49-F238E27FC236}">
-              <a16:creationId xmlns:a16="http://schemas.microsoft.com/office/drawing/2014/main" id="{F9116C4D-CE4E-0FB1-861B-888AD24E0D1B}"/>
-            </a:ext>
-          </a:extLst>
-        </p:cNvPr>
-        <p:cNvGrpSpPr/>
-        <p:nvPr/>
-      </p:nvGrpSpPr>
-      <p:grpSpPr>
-        <a:xfrm>
-          <a:off x="0" y="0"/>
-          <a:ext cx="0" cy="0"/>
-          <a:chOff x="0" y="0"/>
-          <a:chExt cx="0" cy="0"/>
-        </a:xfrm>
-      </p:grpSpPr>
-      <p:sp>
-        <p:nvSpPr>
-          <p:cNvPr id="21" name="文字方塊 20">
-            <a:extLst>
-              <a:ext uri="{FF2B5EF4-FFF2-40B4-BE49-F238E27FC236}">
-                <a16:creationId xmlns:a16="http://schemas.microsoft.com/office/drawing/2014/main" id="{2E7D6F21-82FC-DA25-849C-C88678DF0547}"/>
-              </a:ext>
-            </a:extLst>
-          </p:cNvPr>
-          <p:cNvSpPr txBox="1"/>
-          <p:nvPr/>
-        </p:nvSpPr>
-        <p:spPr>
-          <a:xfrm>
-            <a:off x="4410894" y="828805"/>
-            <a:ext cx="3416320" cy="369332"/>
-          </a:xfrm>
-          <a:prstGeom prst="rect">
-            <a:avLst/>
-          </a:prstGeom>
-          <a:noFill/>
-        </p:spPr>
-        <p:txBody>
-          <a:bodyPr wrap="none" rtlCol="0">
-            <a:spAutoFit/>
-          </a:bodyPr>
-          <a:lstStyle/>
-          <a:p>
-            <a:r>
-              <a:rPr lang="zh-TW" altLang="en-US" b="1" dirty="0">
-                <a:solidFill>
-                  <a:srgbClr val="FF0000"/>
-                </a:solidFill>
-              </a:rPr>
-              <a:t>下載系統信後，要送出表單申請</a:t>
-            </a:r>
-          </a:p>
-        </p:txBody>
-      </p:sp>
-      <p:pic>
-        <p:nvPicPr>
-          <p:cNvPr id="3" name="圖片 2" descr="一張含有 文字, 字型, 螢幕擷取畫面 的圖片&#10;&#10;AI 產生的內容可能不正確。">
-            <a:extLst>
-              <a:ext uri="{FF2B5EF4-FFF2-40B4-BE49-F238E27FC236}">
-                <a16:creationId xmlns:a16="http://schemas.microsoft.com/office/drawing/2014/main" id="{2A2E2C14-C4F8-FB50-047B-3EC34FBED6E4}"/>
-              </a:ext>
-            </a:extLst>
-          </p:cNvPr>
-          <p:cNvPicPr>
-            <a:picLocks noChangeAspect="1"/>
-          </p:cNvPicPr>
-          <p:nvPr/>
-        </p:nvPicPr>
-        <p:blipFill>
-          <a:blip r:embed="rId2">
-            <a:extLst>
-              <a:ext uri="{28A0092B-C50C-407E-A947-70E740481C1C}">
-                <a14:useLocalDpi xmlns:a14="http://schemas.microsoft.com/office/drawing/2010/main" val="0"/>
-              </a:ext>
-            </a:extLst>
-          </a:blip>
-          <a:stretch>
-            <a:fillRect/>
-          </a:stretch>
-        </p:blipFill>
-        <p:spPr>
-          <a:xfrm>
-            <a:off x="979054" y="1355100"/>
-            <a:ext cx="10233891" cy="1512468"/>
-          </a:xfrm>
-          <a:prstGeom prst="rect">
-            <a:avLst/>
-          </a:prstGeom>
-        </p:spPr>
-      </p:pic>
-      <p:pic>
-        <p:nvPicPr>
-          <p:cNvPr id="4" name="圖片 3" descr="一張含有 文字, 螢幕擷取畫面, 字型 的圖片&#10;&#10;AI 產生的內容可能不正確。">
-            <a:extLst>
-              <a:ext uri="{FF2B5EF4-FFF2-40B4-BE49-F238E27FC236}">
-                <a16:creationId xmlns:a16="http://schemas.microsoft.com/office/drawing/2014/main" id="{C9CBA5BC-1B94-05D1-8452-90497EAA5FE8}"/>
-              </a:ext>
-            </a:extLst>
-          </p:cNvPr>
-          <p:cNvPicPr>
-            <a:picLocks noChangeAspect="1"/>
-          </p:cNvPicPr>
-          <p:nvPr/>
-        </p:nvPicPr>
-        <p:blipFill>
-          <a:blip r:embed="rId3">
-            <a:extLst>
-              <a:ext uri="{28A0092B-C50C-407E-A947-70E740481C1C}">
-                <a14:useLocalDpi xmlns:a14="http://schemas.microsoft.com/office/drawing/2010/main" val="0"/>
-              </a:ext>
-            </a:extLst>
-          </a:blip>
-          <a:stretch>
-            <a:fillRect/>
-          </a:stretch>
-        </p:blipFill>
-        <p:spPr>
-          <a:xfrm>
-            <a:off x="2997087" y="3717262"/>
-            <a:ext cx="6197825" cy="2763641"/>
-          </a:xfrm>
-          <a:prstGeom prst="rect">
-            <a:avLst/>
-          </a:prstGeom>
-        </p:spPr>
-      </p:pic>
-      <p:sp>
-        <p:nvSpPr>
-          <p:cNvPr id="7" name="矩形 6">
-            <a:extLst>
-              <a:ext uri="{FF2B5EF4-FFF2-40B4-BE49-F238E27FC236}">
-                <a16:creationId xmlns:a16="http://schemas.microsoft.com/office/drawing/2014/main" id="{20817315-A529-936F-7A42-6CC2B9638F2C}"/>
+      <p:sp>
+        <p:nvSpPr>
+          <p:cNvPr id="2" name="矩形 1">
+            <a:extLst>
+              <a:ext uri="{FF2B5EF4-FFF2-40B4-BE49-F238E27FC236}">
+                <a16:creationId xmlns:a16="http://schemas.microsoft.com/office/drawing/2014/main" id="{A2E9CA18-8087-0F6D-9266-9FFB744388E1}"/>
               </a:ext>
             </a:extLst>
           </p:cNvPr>
@@ -6361,8 +9156,8 @@
         </p:nvSpPr>
         <p:spPr>
           <a:xfrm>
-            <a:off x="6465455" y="1911927"/>
-            <a:ext cx="951345" cy="329865"/>
+            <a:off x="4821380" y="2830948"/>
+            <a:ext cx="1136076" cy="290944"/>
           </a:xfrm>
           <a:prstGeom prst="rect">
             <a:avLst/>
@@ -6405,31 +9200,127 @@
           </a:p>
         </p:txBody>
       </p:sp>
-      <p:sp>
-        <p:nvSpPr>
-          <p:cNvPr id="8" name="矩形 7">
-            <a:extLst>
-              <a:ext uri="{FF2B5EF4-FFF2-40B4-BE49-F238E27FC236}">
-                <a16:creationId xmlns:a16="http://schemas.microsoft.com/office/drawing/2014/main" id="{2E7D1B4D-EBEA-CAEB-BC95-DEF570661A1C}"/>
-              </a:ext>
-            </a:extLst>
-          </p:cNvPr>
-          <p:cNvSpPr/>
-          <p:nvPr/>
-        </p:nvSpPr>
-        <p:spPr>
-          <a:xfrm>
-            <a:off x="3103419" y="5902706"/>
-            <a:ext cx="6091493" cy="608929"/>
-          </a:xfrm>
-          <a:prstGeom prst="rect">
-            <a:avLst/>
-          </a:prstGeom>
-          <a:noFill/>
-          <a:ln w="38100">
+      <p:cxnSp>
+        <p:nvCxnSpPr>
+          <p:cNvPr id="7" name="接點: 肘形 6">
+            <a:extLst>
+              <a:ext uri="{FF2B5EF4-FFF2-40B4-BE49-F238E27FC236}">
+                <a16:creationId xmlns:a16="http://schemas.microsoft.com/office/drawing/2014/main" id="{25B98DAA-EFE1-BEE4-47C3-D8519A7673D5}"/>
+              </a:ext>
+            </a:extLst>
+          </p:cNvPr>
+          <p:cNvCxnSpPr>
+            <a:cxnSpLocks/>
+            <a:stCxn id="2" idx="3"/>
+            <a:endCxn id="6" idx="1"/>
+          </p:cNvCxnSpPr>
+          <p:nvPr/>
+        </p:nvCxnSpPr>
+        <p:spPr>
+          <a:xfrm flipV="1">
+            <a:off x="5957456" y="2503056"/>
+            <a:ext cx="828962" cy="473364"/>
+          </a:xfrm>
+          <a:prstGeom prst="bentConnector3">
+            <a:avLst>
+              <a:gd name="adj1" fmla="val 50000"/>
+            </a:avLst>
+          </a:prstGeom>
+          <a:ln w="12700">
             <a:solidFill>
               <a:srgbClr val="FF0000"/>
             </a:solidFill>
+            <a:tailEnd type="triangle"/>
+          </a:ln>
+        </p:spPr>
+        <p:style>
+          <a:lnRef idx="1">
+            <a:schemeClr val="accent1"/>
+          </a:lnRef>
+          <a:fillRef idx="0">
+            <a:schemeClr val="accent1"/>
+          </a:fillRef>
+          <a:effectRef idx="0">
+            <a:schemeClr val="accent1"/>
+          </a:effectRef>
+          <a:fontRef idx="minor">
+            <a:schemeClr val="tx1"/>
+          </a:fontRef>
+        </p:style>
+      </p:cxnSp>
+      <p:cxnSp>
+        <p:nvCxnSpPr>
+          <p:cNvPr id="19" name="接點: 肘形 18">
+            <a:extLst>
+              <a:ext uri="{FF2B5EF4-FFF2-40B4-BE49-F238E27FC236}">
+                <a16:creationId xmlns:a16="http://schemas.microsoft.com/office/drawing/2014/main" id="{84310115-1A38-DF64-90B8-B12A5958A008}"/>
+              </a:ext>
+            </a:extLst>
+          </p:cNvPr>
+          <p:cNvCxnSpPr>
+            <a:cxnSpLocks/>
+            <a:stCxn id="4" idx="3"/>
+            <a:endCxn id="2" idx="1"/>
+          </p:cNvCxnSpPr>
+          <p:nvPr/>
+        </p:nvCxnSpPr>
+        <p:spPr>
+          <a:xfrm>
+            <a:off x="3925455" y="1812638"/>
+            <a:ext cx="895925" cy="1163782"/>
+          </a:xfrm>
+          <a:prstGeom prst="bentConnector3">
+            <a:avLst>
+              <a:gd name="adj1" fmla="val 50000"/>
+            </a:avLst>
+          </a:prstGeom>
+          <a:ln w="12700">
+            <a:solidFill>
+              <a:srgbClr val="FF0000"/>
+            </a:solidFill>
+            <a:tailEnd type="triangle"/>
+          </a:ln>
+        </p:spPr>
+        <p:style>
+          <a:lnRef idx="1">
+            <a:schemeClr val="accent1"/>
+          </a:lnRef>
+          <a:fillRef idx="0">
+            <a:schemeClr val="accent1"/>
+          </a:fillRef>
+          <a:effectRef idx="0">
+            <a:schemeClr val="accent1"/>
+          </a:effectRef>
+          <a:fontRef idx="minor">
+            <a:schemeClr val="tx1"/>
+          </a:fontRef>
+        </p:style>
+      </p:cxnSp>
+      <p:sp>
+        <p:nvSpPr>
+          <p:cNvPr id="23" name="箭號: 向右 22">
+            <a:extLst>
+              <a:ext uri="{FF2B5EF4-FFF2-40B4-BE49-F238E27FC236}">
+                <a16:creationId xmlns:a16="http://schemas.microsoft.com/office/drawing/2014/main" id="{1E4841A0-DDAA-8C1E-EFFD-C71BEA43AAD0}"/>
+              </a:ext>
+            </a:extLst>
+          </p:cNvPr>
+          <p:cNvSpPr/>
+          <p:nvPr/>
+        </p:nvSpPr>
+        <p:spPr>
+          <a:xfrm>
+            <a:off x="1463428" y="6162884"/>
+            <a:ext cx="286327" cy="249382"/>
+          </a:xfrm>
+          <a:prstGeom prst="rightArrow">
+            <a:avLst/>
+          </a:prstGeom>
+          <a:solidFill>
+            <a:srgbClr val="FF0000"/>
+          </a:solidFill>
+          <a:ln>
+            <a:noFill/>
           </a:ln>
         </p:spPr>
         <p:style>
@@ -6453,203 +9344,14 @@
           <a:lstStyle/>
           <a:p>
             <a:pPr algn="ctr"/>
-            <a:endParaRPr lang="en-US">
-              <a:ln>
-                <a:solidFill>
-                  <a:srgbClr val="FF0000"/>
-                </a:solidFill>
-              </a:ln>
-            </a:endParaRPr>
+            <a:endParaRPr lang="en-US"/>
           </a:p>
         </p:txBody>
       </p:sp>
     </p:spTree>
     <p:extLst>
       <p:ext uri="{BB962C8B-B14F-4D97-AF65-F5344CB8AC3E}">
-        <p14:creationId xmlns:p14="http://schemas.microsoft.com/office/powerpoint/2010/main" val="3775983163"/>
-      </p:ext>
-    </p:extLst>
-  </p:cSld>
-  <p:clrMapOvr>
-    <a:masterClrMapping/>
-  </p:clrMapOvr>
-</p:sld>
-</file>
-
-<file path=ppt/slides/slide7.xml><?xml version="1.0" encoding="utf-8"?>
-<p:sld xmlns:a="http://schemas.openxmlformats.org/drawingml/2006/main" xmlns:r="http://schemas.openxmlformats.org/officeDocument/2006/relationships" xmlns:p="http://schemas.openxmlformats.org/presentationml/2006/main">
-  <p:cSld>
-    <p:spTree>
-      <p:nvGrpSpPr>
-        <p:cNvPr id="1" name="">
-          <a:extLst>
-            <a:ext uri="{FF2B5EF4-FFF2-40B4-BE49-F238E27FC236}">
-              <a16:creationId xmlns:a16="http://schemas.microsoft.com/office/drawing/2014/main" id="{B11C87AD-A558-5E6C-BFAC-688B603CC886}"/>
-            </a:ext>
-          </a:extLst>
-        </p:cNvPr>
-        <p:cNvGrpSpPr/>
-        <p:nvPr/>
-      </p:nvGrpSpPr>
-      <p:grpSpPr>
-        <a:xfrm>
-          <a:off x="0" y="0"/>
-          <a:ext cx="0" cy="0"/>
-          <a:chOff x="0" y="0"/>
-          <a:chExt cx="0" cy="0"/>
-        </a:xfrm>
-      </p:grpSpPr>
-      <p:sp>
-        <p:nvSpPr>
-          <p:cNvPr id="21" name="文字方塊 20">
-            <a:extLst>
-              <a:ext uri="{FF2B5EF4-FFF2-40B4-BE49-F238E27FC236}">
-                <a16:creationId xmlns:a16="http://schemas.microsoft.com/office/drawing/2014/main" id="{F6A16AD1-D88D-2E2A-D209-05484C223FF2}"/>
-              </a:ext>
-            </a:extLst>
-          </p:cNvPr>
-          <p:cNvSpPr txBox="1"/>
-          <p:nvPr/>
-        </p:nvSpPr>
-        <p:spPr>
-          <a:xfrm>
-            <a:off x="5080336" y="623249"/>
-            <a:ext cx="2031325" cy="369332"/>
-          </a:xfrm>
-          <a:prstGeom prst="rect">
-            <a:avLst/>
-          </a:prstGeom>
-          <a:noFill/>
-        </p:spPr>
-        <p:txBody>
-          <a:bodyPr wrap="none" rtlCol="0">
-            <a:spAutoFit/>
-          </a:bodyPr>
-          <a:lstStyle/>
-          <a:p>
-            <a:r>
-              <a:rPr lang="zh-TW" altLang="en-US" b="1" dirty="0">
-                <a:solidFill>
-                  <a:srgbClr val="FF0000"/>
-                </a:solidFill>
-              </a:rPr>
-              <a:t>附件上傳生成的信</a:t>
-            </a:r>
-          </a:p>
-        </p:txBody>
-      </p:sp>
-      <p:pic>
-        <p:nvPicPr>
-          <p:cNvPr id="6" name="圖片 5" descr="一張含有 文字, 螢幕擷取畫面, 數字, 行 的圖片&#10;&#10;AI 產生的內容可能不正確。">
-            <a:extLst>
-              <a:ext uri="{FF2B5EF4-FFF2-40B4-BE49-F238E27FC236}">
-                <a16:creationId xmlns:a16="http://schemas.microsoft.com/office/drawing/2014/main" id="{4F03B3D5-C11C-9D27-6921-5BD8BBABA314}"/>
-              </a:ext>
-            </a:extLst>
-          </p:cNvPr>
-          <p:cNvPicPr>
-            <a:picLocks noChangeAspect="1"/>
-          </p:cNvPicPr>
-          <p:nvPr/>
-        </p:nvPicPr>
-        <p:blipFill>
-          <a:blip r:embed="rId2">
-            <a:extLst>
-              <a:ext uri="{28A0092B-C50C-407E-A947-70E740481C1C}">
-                <a14:useLocalDpi xmlns:a14="http://schemas.microsoft.com/office/drawing/2010/main" val="0"/>
-              </a:ext>
-            </a:extLst>
-          </a:blip>
-          <a:stretch>
-            <a:fillRect/>
-          </a:stretch>
-        </p:blipFill>
-        <p:spPr>
-          <a:xfrm>
-            <a:off x="1023229" y="992581"/>
-            <a:ext cx="10145541" cy="5553850"/>
-          </a:xfrm>
-          <a:prstGeom prst="rect">
-            <a:avLst/>
-          </a:prstGeom>
-        </p:spPr>
-      </p:pic>
-    </p:spTree>
-    <p:extLst>
-      <p:ext uri="{BB962C8B-B14F-4D97-AF65-F5344CB8AC3E}">
-        <p14:creationId xmlns:p14="http://schemas.microsoft.com/office/powerpoint/2010/main" val="2891456126"/>
-      </p:ext>
-    </p:extLst>
-  </p:cSld>
-  <p:clrMapOvr>
-    <a:masterClrMapping/>
-  </p:clrMapOvr>
-</p:sld>
-</file>
-
-<file path=ppt/slides/slide8.xml><?xml version="1.0" encoding="utf-8"?>
-<p:sld xmlns:a="http://schemas.openxmlformats.org/drawingml/2006/main" xmlns:r="http://schemas.openxmlformats.org/officeDocument/2006/relationships" xmlns:p="http://schemas.openxmlformats.org/presentationml/2006/main">
-  <p:cSld>
-    <p:spTree>
-      <p:nvGrpSpPr>
-        <p:cNvPr id="1" name="">
-          <a:extLst>
-            <a:ext uri="{FF2B5EF4-FFF2-40B4-BE49-F238E27FC236}">
-              <a16:creationId xmlns:a16="http://schemas.microsoft.com/office/drawing/2014/main" id="{FCB722A4-6196-14C2-FDB9-10A9BB878089}"/>
-            </a:ext>
-          </a:extLst>
-        </p:cNvPr>
-        <p:cNvGrpSpPr/>
-        <p:nvPr/>
-      </p:nvGrpSpPr>
-      <p:grpSpPr>
-        <a:xfrm>
-          <a:off x="0" y="0"/>
-          <a:ext cx="0" cy="0"/>
-          <a:chOff x="0" y="0"/>
-          <a:chExt cx="0" cy="0"/>
-        </a:xfrm>
-      </p:grpSpPr>
-      <p:pic>
-        <p:nvPicPr>
-          <p:cNvPr id="5" name="圖片 4" descr="一張含有 文字, 螢幕擷取畫面, 軟體, 網頁 的圖片&#10;&#10;AI 產生的內容可能不正確。">
-            <a:extLst>
-              <a:ext uri="{FF2B5EF4-FFF2-40B4-BE49-F238E27FC236}">
-                <a16:creationId xmlns:a16="http://schemas.microsoft.com/office/drawing/2014/main" id="{63702DAA-E974-D2C9-F8B4-0C007C77ED84}"/>
-              </a:ext>
-            </a:extLst>
-          </p:cNvPr>
-          <p:cNvPicPr>
-            <a:picLocks noChangeAspect="1"/>
-          </p:cNvPicPr>
-          <p:nvPr/>
-        </p:nvPicPr>
-        <p:blipFill>
-          <a:blip r:embed="rId2">
-            <a:extLst>
-              <a:ext uri="{28A0092B-C50C-407E-A947-70E740481C1C}">
-                <a14:useLocalDpi xmlns:a14="http://schemas.microsoft.com/office/drawing/2010/main" val="0"/>
-              </a:ext>
-            </a:extLst>
-          </a:blip>
-          <a:stretch>
-            <a:fillRect/>
-          </a:stretch>
-        </p:blipFill>
-        <p:spPr>
-          <a:xfrm>
-            <a:off x="2578479" y="0"/>
-            <a:ext cx="7035041" cy="6858000"/>
-          </a:xfrm>
-          <a:prstGeom prst="rect">
-            <a:avLst/>
-          </a:prstGeom>
-        </p:spPr>
-      </p:pic>
-    </p:spTree>
-    <p:extLst>
-      <p:ext uri="{BB962C8B-B14F-4D97-AF65-F5344CB8AC3E}">
-        <p14:creationId xmlns:p14="http://schemas.microsoft.com/office/powerpoint/2010/main" val="787195075"/>
+        <p14:creationId xmlns:p14="http://schemas.microsoft.com/office/powerpoint/2010/main" val="3923481285"/>
       </p:ext>
     </p:extLst>
   </p:cSld>
@@ -6667,7 +9369,7 @@
         <p:cNvPr id="1" name="">
           <a:extLst>
             <a:ext uri="{FF2B5EF4-FFF2-40B4-BE49-F238E27FC236}">
-              <a16:creationId xmlns:a16="http://schemas.microsoft.com/office/drawing/2014/main" id="{D1A6B2A9-8528-943F-B0C7-F36548D92A3B}"/>
+              <a16:creationId xmlns:a16="http://schemas.microsoft.com/office/drawing/2014/main" id="{C1AF42F1-14CE-8DA5-564F-D04FBA9C3955}"/>
             </a:ext>
           </a:extLst>
         </p:cNvPr>
@@ -6684,10 +9386,10 @@
       </p:grpSpPr>
       <p:pic>
         <p:nvPicPr>
-          <p:cNvPr id="3" name="圖片 2" descr="一張含有 文字, 螢幕擷取畫面, 網頁, 軟體 的圖片&#10;&#10;AI 產生的內容可能不正確。">
-            <a:extLst>
-              <a:ext uri="{FF2B5EF4-FFF2-40B4-BE49-F238E27FC236}">
-                <a16:creationId xmlns:a16="http://schemas.microsoft.com/office/drawing/2014/main" id="{42DCB495-A752-27E4-E01A-CA000A1E4756}"/>
+          <p:cNvPr id="3" name="圖片 2" descr="一張含有 文字, 數字, 字型, 軟體 的圖片&#10;&#10;AI 產生的內容可能不正確。">
+            <a:extLst>
+              <a:ext uri="{FF2B5EF4-FFF2-40B4-BE49-F238E27FC236}">
+                <a16:creationId xmlns:a16="http://schemas.microsoft.com/office/drawing/2014/main" id="{05264265-AD71-86F3-C422-C510B5012B15}"/>
               </a:ext>
             </a:extLst>
           </p:cNvPr>
@@ -6710,20 +9412,25 @@
         </p:blipFill>
         <p:spPr>
           <a:xfrm>
-            <a:off x="3177020" y="921093"/>
-            <a:ext cx="5837959" cy="5936907"/>
+            <a:off x="1925782" y="83124"/>
+            <a:ext cx="8340436" cy="3808781"/>
           </a:xfrm>
           <a:prstGeom prst="rect">
             <a:avLst/>
           </a:prstGeom>
+          <a:ln>
+            <a:solidFill>
+              <a:schemeClr val="tx1"/>
+            </a:solidFill>
+          </a:ln>
         </p:spPr>
       </p:pic>
       <p:sp>
         <p:nvSpPr>
-          <p:cNvPr id="2" name="文字方塊 1">
-            <a:extLst>
-              <a:ext uri="{FF2B5EF4-FFF2-40B4-BE49-F238E27FC236}">
-                <a16:creationId xmlns:a16="http://schemas.microsoft.com/office/drawing/2014/main" id="{061FC6CD-3CD6-1B1C-1166-3620B981C510}"/>
+          <p:cNvPr id="7" name="文字方塊 6">
+            <a:extLst>
+              <a:ext uri="{FF2B5EF4-FFF2-40B4-BE49-F238E27FC236}">
+                <a16:creationId xmlns:a16="http://schemas.microsoft.com/office/drawing/2014/main" id="{6B0B20E4-8858-5D4F-B5CF-D59E5928D022}"/>
               </a:ext>
             </a:extLst>
           </p:cNvPr>
@@ -6732,8 +9439,8 @@
         </p:nvSpPr>
         <p:spPr>
           <a:xfrm>
-            <a:off x="3831854" y="394743"/>
-            <a:ext cx="4528291" cy="369332"/>
+            <a:off x="3075710" y="5164019"/>
+            <a:ext cx="1107996" cy="369332"/>
           </a:xfrm>
           <a:prstGeom prst="rect">
             <a:avLst/>
@@ -6752,47 +9459,307 @@
                   <a:srgbClr val="FF0000"/>
                 </a:solidFill>
               </a:rPr>
-              <a:t>登入</a:t>
-            </a:r>
-            <a:r>
-              <a:rPr lang="en-US" altLang="zh-TW" b="1" dirty="0">
+              <a:t>下載信件</a:t>
+            </a:r>
+          </a:p>
+        </p:txBody>
+      </p:sp>
+      <p:sp>
+        <p:nvSpPr>
+          <p:cNvPr id="13" name="矩形 12">
+            <a:extLst>
+              <a:ext uri="{FF2B5EF4-FFF2-40B4-BE49-F238E27FC236}">
+                <a16:creationId xmlns:a16="http://schemas.microsoft.com/office/drawing/2014/main" id="{4803AEEB-2851-A8DB-E022-4CCE84BBB02D}"/>
+              </a:ext>
+            </a:extLst>
+          </p:cNvPr>
+          <p:cNvSpPr/>
+          <p:nvPr/>
+        </p:nvSpPr>
+        <p:spPr>
+          <a:xfrm>
+            <a:off x="1925782" y="92056"/>
+            <a:ext cx="290945" cy="185032"/>
+          </a:xfrm>
+          <a:prstGeom prst="rect">
+            <a:avLst/>
+          </a:prstGeom>
+          <a:noFill/>
+          <a:ln w="38100">
+            <a:solidFill>
+              <a:srgbClr val="FF0000"/>
+            </a:solidFill>
+          </a:ln>
+        </p:spPr>
+        <p:style>
+          <a:lnRef idx="2">
+            <a:schemeClr val="accent1">
+              <a:shade val="15000"/>
+            </a:schemeClr>
+          </a:lnRef>
+          <a:fillRef idx="1">
+            <a:schemeClr val="accent1"/>
+          </a:fillRef>
+          <a:effectRef idx="0">
+            <a:schemeClr val="accent1"/>
+          </a:effectRef>
+          <a:fontRef idx="minor">
+            <a:schemeClr val="lt1"/>
+          </a:fontRef>
+        </p:style>
+        <p:txBody>
+          <a:bodyPr rtlCol="0" anchor="ctr"/>
+          <a:lstStyle/>
+          <a:p>
+            <a:pPr algn="ctr"/>
+            <a:endParaRPr lang="en-US">
+              <a:ln>
                 <a:solidFill>
                   <a:srgbClr val="FF0000"/>
                 </a:solidFill>
-              </a:rPr>
-              <a:t>VPN</a:t>
-            </a:r>
-            <a:r>
-              <a:rPr lang="zh-TW" altLang="en-US" b="1" dirty="0">
+              </a:ln>
+            </a:endParaRPr>
+          </a:p>
+        </p:txBody>
+      </p:sp>
+      <p:pic>
+        <p:nvPicPr>
+          <p:cNvPr id="6" name="圖片 5" descr="一張含有 文字, 螢幕擷取畫面, 字型, 數字 的圖片&#10;&#10;AI 產生的內容可能不正確。">
+            <a:extLst>
+              <a:ext uri="{FF2B5EF4-FFF2-40B4-BE49-F238E27FC236}">
+                <a16:creationId xmlns:a16="http://schemas.microsoft.com/office/drawing/2014/main" id="{8653CA4F-522F-A481-1242-AE5BED21BABF}"/>
+              </a:ext>
+            </a:extLst>
+          </p:cNvPr>
+          <p:cNvPicPr>
+            <a:picLocks noChangeAspect="1"/>
+          </p:cNvPicPr>
+          <p:nvPr/>
+        </p:nvPicPr>
+        <p:blipFill>
+          <a:blip r:embed="rId3">
+            <a:extLst>
+              <a:ext uri="{28A0092B-C50C-407E-A947-70E740481C1C}">
+                <a14:useLocalDpi xmlns:a14="http://schemas.microsoft.com/office/drawing/2010/main" val="0"/>
+              </a:ext>
+            </a:extLst>
+          </a:blip>
+          <a:stretch>
+            <a:fillRect/>
+          </a:stretch>
+        </p:blipFill>
+        <p:spPr>
+          <a:xfrm>
+            <a:off x="1925782" y="4205639"/>
+            <a:ext cx="1094509" cy="2251119"/>
+          </a:xfrm>
+          <a:prstGeom prst="rect">
+            <a:avLst/>
+          </a:prstGeom>
+        </p:spPr>
+      </p:pic>
+      <p:sp>
+        <p:nvSpPr>
+          <p:cNvPr id="9" name="矩形 8">
+            <a:extLst>
+              <a:ext uri="{FF2B5EF4-FFF2-40B4-BE49-F238E27FC236}">
+                <a16:creationId xmlns:a16="http://schemas.microsoft.com/office/drawing/2014/main" id="{A70ECCEB-7BA5-F79F-ACFA-6759D2F92FAC}"/>
+              </a:ext>
+            </a:extLst>
+          </p:cNvPr>
+          <p:cNvSpPr/>
+          <p:nvPr/>
+        </p:nvSpPr>
+        <p:spPr>
+          <a:xfrm>
+            <a:off x="1925782" y="5238681"/>
+            <a:ext cx="1094509" cy="220008"/>
+          </a:xfrm>
+          <a:prstGeom prst="rect">
+            <a:avLst/>
+          </a:prstGeom>
+          <a:noFill/>
+          <a:ln w="38100">
+            <a:solidFill>
+              <a:srgbClr val="FF0000"/>
+            </a:solidFill>
+          </a:ln>
+        </p:spPr>
+        <p:style>
+          <a:lnRef idx="2">
+            <a:schemeClr val="accent1">
+              <a:shade val="15000"/>
+            </a:schemeClr>
+          </a:lnRef>
+          <a:fillRef idx="1">
+            <a:schemeClr val="accent1"/>
+          </a:fillRef>
+          <a:effectRef idx="0">
+            <a:schemeClr val="accent1"/>
+          </a:effectRef>
+          <a:fontRef idx="minor">
+            <a:schemeClr val="lt1"/>
+          </a:fontRef>
+        </p:style>
+        <p:txBody>
+          <a:bodyPr rtlCol="0" anchor="ctr"/>
+          <a:lstStyle/>
+          <a:p>
+            <a:pPr algn="ctr"/>
+            <a:endParaRPr lang="en-US">
+              <a:ln>
                 <a:solidFill>
                   <a:srgbClr val="FF0000"/>
                 </a:solidFill>
-              </a:rPr>
-              <a:t>一直 </a:t>
-            </a:r>
-            <a:r>
-              <a:rPr lang="en-US" altLang="zh-TW" b="1" dirty="0">
-                <a:solidFill>
-                  <a:srgbClr val="FF0000"/>
-                </a:solidFill>
-              </a:rPr>
-              <a:t>login failed</a:t>
-            </a:r>
-            <a:r>
-              <a:rPr lang="zh-TW" altLang="en-US" b="1" dirty="0">
-                <a:solidFill>
-                  <a:srgbClr val="FF0000"/>
-                </a:solidFill>
-              </a:rPr>
-              <a:t> 代表申請還沒通過</a:t>
-            </a:r>
-          </a:p>
-        </p:txBody>
-      </p:sp>
+              </a:ln>
+            </a:endParaRPr>
+          </a:p>
+        </p:txBody>
+      </p:sp>
+      <p:sp>
+        <p:nvSpPr>
+          <p:cNvPr id="10" name="箭號: 向右 9">
+            <a:extLst>
+              <a:ext uri="{FF2B5EF4-FFF2-40B4-BE49-F238E27FC236}">
+                <a16:creationId xmlns:a16="http://schemas.microsoft.com/office/drawing/2014/main" id="{C667089A-9011-A4C2-68B7-4CDB906E5C35}"/>
+              </a:ext>
+            </a:extLst>
+          </p:cNvPr>
+          <p:cNvSpPr/>
+          <p:nvPr/>
+        </p:nvSpPr>
+        <p:spPr>
+          <a:xfrm>
+            <a:off x="1542473" y="59881"/>
+            <a:ext cx="286327" cy="249382"/>
+          </a:xfrm>
+          <a:prstGeom prst="rightArrow">
+            <a:avLst/>
+          </a:prstGeom>
+          <a:solidFill>
+            <a:srgbClr val="FF0000"/>
+          </a:solidFill>
+          <a:ln>
+            <a:noFill/>
+          </a:ln>
+        </p:spPr>
+        <p:style>
+          <a:lnRef idx="2">
+            <a:schemeClr val="accent1">
+              <a:shade val="15000"/>
+            </a:schemeClr>
+          </a:lnRef>
+          <a:fillRef idx="1">
+            <a:schemeClr val="accent1"/>
+          </a:fillRef>
+          <a:effectRef idx="0">
+            <a:schemeClr val="accent1"/>
+          </a:effectRef>
+          <a:fontRef idx="minor">
+            <a:schemeClr val="lt1"/>
+          </a:fontRef>
+        </p:style>
+        <p:txBody>
+          <a:bodyPr rtlCol="0" anchor="ctr"/>
+          <a:lstStyle/>
+          <a:p>
+            <a:pPr algn="ctr"/>
+            <a:endParaRPr lang="en-US"/>
+          </a:p>
+        </p:txBody>
+      </p:sp>
+      <p:sp>
+        <p:nvSpPr>
+          <p:cNvPr id="11" name="箭號: 向右 10">
+            <a:extLst>
+              <a:ext uri="{FF2B5EF4-FFF2-40B4-BE49-F238E27FC236}">
+                <a16:creationId xmlns:a16="http://schemas.microsoft.com/office/drawing/2014/main" id="{EEBC8E25-3733-B9BD-C83C-EC41AD855147}"/>
+              </a:ext>
+            </a:extLst>
+          </p:cNvPr>
+          <p:cNvSpPr/>
+          <p:nvPr/>
+        </p:nvSpPr>
+        <p:spPr>
+          <a:xfrm>
+            <a:off x="1584036" y="5223994"/>
+            <a:ext cx="286327" cy="249382"/>
+          </a:xfrm>
+          <a:prstGeom prst="rightArrow">
+            <a:avLst/>
+          </a:prstGeom>
+          <a:solidFill>
+            <a:srgbClr val="FF0000"/>
+          </a:solidFill>
+          <a:ln>
+            <a:noFill/>
+          </a:ln>
+        </p:spPr>
+        <p:style>
+          <a:lnRef idx="2">
+            <a:schemeClr val="accent1">
+              <a:shade val="15000"/>
+            </a:schemeClr>
+          </a:lnRef>
+          <a:fillRef idx="1">
+            <a:schemeClr val="accent1"/>
+          </a:fillRef>
+          <a:effectRef idx="0">
+            <a:schemeClr val="accent1"/>
+          </a:effectRef>
+          <a:fontRef idx="minor">
+            <a:schemeClr val="lt1"/>
+          </a:fontRef>
+        </p:style>
+        <p:txBody>
+          <a:bodyPr rtlCol="0" anchor="ctr"/>
+          <a:lstStyle/>
+          <a:p>
+            <a:pPr algn="ctr"/>
+            <a:endParaRPr lang="en-US"/>
+          </a:p>
+        </p:txBody>
+      </p:sp>
+      <p:pic>
+        <p:nvPicPr>
+          <p:cNvPr id="4" name="圖片 3" descr="一張含有 文字, 字型, 螢幕擷取畫面, 數字 的圖片&#10;&#10;AI 產生的內容可能不正確。">
+            <a:extLst>
+              <a:ext uri="{FF2B5EF4-FFF2-40B4-BE49-F238E27FC236}">
+                <a16:creationId xmlns:a16="http://schemas.microsoft.com/office/drawing/2014/main" id="{F9C8DA94-C754-9831-B424-75A2D68DD2A1}"/>
+              </a:ext>
+            </a:extLst>
+          </p:cNvPr>
+          <p:cNvPicPr>
+            <a:picLocks noChangeAspect="1"/>
+          </p:cNvPicPr>
+          <p:nvPr/>
+        </p:nvPicPr>
+        <p:blipFill>
+          <a:blip r:embed="rId4">
+            <a:extLst>
+              <a:ext uri="{28A0092B-C50C-407E-A947-70E740481C1C}">
+                <a14:useLocalDpi xmlns:a14="http://schemas.microsoft.com/office/drawing/2010/main" val="0"/>
+              </a:ext>
+            </a:extLst>
+          </a:blip>
+          <a:stretch>
+            <a:fillRect/>
+          </a:stretch>
+        </p:blipFill>
+        <p:spPr>
+          <a:xfrm>
+            <a:off x="5073164" y="4205639"/>
+            <a:ext cx="875053" cy="2257740"/>
+          </a:xfrm>
+          <a:prstGeom prst="rect">
+            <a:avLst/>
+          </a:prstGeom>
+        </p:spPr>
+      </p:pic>
     </p:spTree>
     <p:extLst>
       <p:ext uri="{BB962C8B-B14F-4D97-AF65-F5344CB8AC3E}">
-        <p14:creationId xmlns:p14="http://schemas.microsoft.com/office/powerpoint/2010/main" val="322704012"/>
+        <p14:creationId xmlns:p14="http://schemas.microsoft.com/office/powerpoint/2010/main" val="762915001"/>
       </p:ext>
     </p:extLst>
   </p:cSld>
